--- a/Lecture slides/NYT E01 - Scientific Writing.pptx
+++ b/Lecture slides/NYT E01 - Scientific Writing.pptx
@@ -9837,7 +9837,7 @@
             </a:pPr>
             <a:r>
               <a:rPr lang="en"/>
-              <a:t>Dirk Riehle, Univ. Erlangen</a:t>
+              <a:t>Dirk Riehle, FAU Erlangen</a:t>
             </a:r>
             <a:endParaRPr/>
           </a:p>
@@ -11299,7 +11299,7 @@
             <a:tbl>
               <a:tblPr>
                 <a:noFill/>
-                <a:tableStyleId>{F65FECC6-762F-422A-9A9B-3D2458720008}</a:tableStyleId>
+                <a:tableStyleId>{B8B1287B-0280-4061-81DC-422D31685EAB}</a:tableStyleId>
               </a:tblPr>
               <a:tblGrid>
                 <a:gridCol w="2865125"/>
@@ -18720,7 +18720,7 @@
             <a:tbl>
               <a:tblPr>
                 <a:noFill/>
-                <a:tableStyleId>{F65FECC6-762F-422A-9A9B-3D2458720008}</a:tableStyleId>
+                <a:tableStyleId>{B8B1287B-0280-4061-81DC-422D31685EAB}</a:tableStyleId>
               </a:tblPr>
               <a:tblGrid>
                 <a:gridCol w="2022025"/>
@@ -25007,6 +25007,285 @@
 </file>
 
 <file path=ppt/theme/theme1.xml><?xml version="1.0" encoding="utf-8"?>
+<a:theme xmlns:a="http://schemas.openxmlformats.org/drawingml/2006/main" xmlns:r="http://schemas.openxmlformats.org/officeDocument/2006/relationships" name="NYT Slides Template">
+  <a:themeElements>
+    <a:clrScheme name="Simple Light">
+      <a:dk1>
+        <a:srgbClr val="000000"/>
+      </a:dk1>
+      <a:lt1>
+        <a:srgbClr val="FFFFFF"/>
+      </a:lt1>
+      <a:dk2>
+        <a:srgbClr val="404040"/>
+      </a:dk2>
+      <a:lt2>
+        <a:srgbClr val="808080"/>
+      </a:lt2>
+      <a:accent1>
+        <a:srgbClr val="D0D0D0"/>
+      </a:accent1>
+      <a:accent2>
+        <a:srgbClr val="4169E1"/>
+      </a:accent2>
+      <a:accent3>
+        <a:srgbClr val="D50D01"/>
+      </a:accent3>
+      <a:accent4>
+        <a:srgbClr val="FEB612"/>
+      </a:accent4>
+      <a:accent5>
+        <a:srgbClr val="4CAF50"/>
+      </a:accent5>
+      <a:accent6>
+        <a:srgbClr val="8E44AD"/>
+      </a:accent6>
+      <a:hlink>
+        <a:srgbClr val="34A3C5"/>
+      </a:hlink>
+      <a:folHlink>
+        <a:srgbClr val="0097A7"/>
+      </a:folHlink>
+    </a:clrScheme>
+    <a:fontScheme name="Office">
+      <a:majorFont>
+        <a:latin typeface="Arial"/>
+        <a:ea typeface=""/>
+        <a:cs typeface=""/>
+        <a:font script="Jpan" typeface="ＭＳ Ｐゴシック"/>
+        <a:font script="Hang" typeface="맑은 고딕"/>
+        <a:font script="Hans" typeface="宋体"/>
+        <a:font script="Hant" typeface="新細明體"/>
+        <a:font script="Arab" typeface="Times New Roman"/>
+        <a:font script="Hebr" typeface="Times New Roman"/>
+        <a:font script="Thai" typeface="Angsana New"/>
+        <a:font script="Ethi" typeface="Nyala"/>
+        <a:font script="Beng" typeface="Vrinda"/>
+        <a:font script="Gujr" typeface="Shruti"/>
+        <a:font script="Khmr" typeface="MoolBoran"/>
+        <a:font script="Knda" typeface="Tunga"/>
+        <a:font script="Guru" typeface="Raavi"/>
+        <a:font script="Cans" typeface="Euphemia"/>
+        <a:font script="Cher" typeface="Plantagenet Cherokee"/>
+        <a:font script="Yiii" typeface="Microsoft Yi Baiti"/>
+        <a:font script="Tibt" typeface="Microsoft Himalaya"/>
+        <a:font script="Thaa" typeface="MV Boli"/>
+        <a:font script="Deva" typeface="Mangal"/>
+        <a:font script="Telu" typeface="Gautami"/>
+        <a:font script="Taml" typeface="Latha"/>
+        <a:font script="Syrc" typeface="Estrangelo Edessa"/>
+        <a:font script="Orya" typeface="Kalinga"/>
+        <a:font script="Mlym" typeface="Kartika"/>
+        <a:font script="Laoo" typeface="DokChampa"/>
+        <a:font script="Sinh" typeface="Iskoola Pota"/>
+        <a:font script="Mong" typeface="Mongolian Baiti"/>
+        <a:font script="Viet" typeface="Times New Roman"/>
+        <a:font script="Uigh" typeface="Microsoft Uighur"/>
+        <a:font script="Geor" typeface="Sylfaen"/>
+      </a:majorFont>
+      <a:minorFont>
+        <a:latin typeface="Arial"/>
+        <a:ea typeface=""/>
+        <a:cs typeface=""/>
+        <a:font script="Jpan" typeface="ＭＳ Ｐゴシック"/>
+        <a:font script="Hang" typeface="맑은 고딕"/>
+        <a:font script="Hans" typeface="宋体"/>
+        <a:font script="Hant" typeface="新細明體"/>
+        <a:font script="Arab" typeface="Arial"/>
+        <a:font script="Hebr" typeface="Arial"/>
+        <a:font script="Thai" typeface="Cordia New"/>
+        <a:font script="Ethi" typeface="Nyala"/>
+        <a:font script="Beng" typeface="Vrinda"/>
+        <a:font script="Gujr" typeface="Shruti"/>
+        <a:font script="Khmr" typeface="DaunPenh"/>
+        <a:font script="Knda" typeface="Tunga"/>
+        <a:font script="Guru" typeface="Raavi"/>
+        <a:font script="Cans" typeface="Euphemia"/>
+        <a:font script="Cher" typeface="Plantagenet Cherokee"/>
+        <a:font script="Yiii" typeface="Microsoft Yi Baiti"/>
+        <a:font script="Tibt" typeface="Microsoft Himalaya"/>
+        <a:font script="Thaa" typeface="MV Boli"/>
+        <a:font script="Deva" typeface="Mangal"/>
+        <a:font script="Telu" typeface="Gautami"/>
+        <a:font script="Taml" typeface="Latha"/>
+        <a:font script="Syrc" typeface="Estrangelo Edessa"/>
+        <a:font script="Orya" typeface="Kalinga"/>
+        <a:font script="Mlym" typeface="Kartika"/>
+        <a:font script="Laoo" typeface="DokChampa"/>
+        <a:font script="Sinh" typeface="Iskoola Pota"/>
+        <a:font script="Mong" typeface="Mongolian Baiti"/>
+        <a:font script="Viet" typeface="Arial"/>
+        <a:font script="Uigh" typeface="Microsoft Uighur"/>
+        <a:font script="Geor" typeface="Sylfaen"/>
+      </a:minorFont>
+    </a:fontScheme>
+    <a:fmtScheme name="Office">
+      <a:fillStyleLst>
+        <a:solidFill>
+          <a:schemeClr val="phClr"/>
+        </a:solidFill>
+        <a:gradFill rotWithShape="1">
+          <a:gsLst>
+            <a:gs pos="0">
+              <a:schemeClr val="phClr">
+                <a:tint val="50000"/>
+                <a:satMod val="300000"/>
+              </a:schemeClr>
+            </a:gs>
+            <a:gs pos="35000">
+              <a:schemeClr val="phClr">
+                <a:tint val="37000"/>
+                <a:satMod val="300000"/>
+              </a:schemeClr>
+            </a:gs>
+            <a:gs pos="100000">
+              <a:schemeClr val="phClr">
+                <a:tint val="15000"/>
+                <a:satMod val="350000"/>
+              </a:schemeClr>
+            </a:gs>
+          </a:gsLst>
+          <a:lin ang="16200000" scaled="1"/>
+        </a:gradFill>
+        <a:gradFill rotWithShape="1">
+          <a:gsLst>
+            <a:gs pos="0">
+              <a:schemeClr val="phClr">
+                <a:tint val="100000"/>
+                <a:shade val="100000"/>
+                <a:satMod val="130000"/>
+              </a:schemeClr>
+            </a:gs>
+            <a:gs pos="100000">
+              <a:schemeClr val="phClr">
+                <a:tint val="50000"/>
+                <a:shade val="100000"/>
+                <a:satMod val="350000"/>
+              </a:schemeClr>
+            </a:gs>
+          </a:gsLst>
+          <a:lin ang="16200000" scaled="0"/>
+        </a:gradFill>
+      </a:fillStyleLst>
+      <a:lnStyleLst>
+        <a:ln w="9525" cap="flat" cmpd="sng" algn="ctr">
+          <a:solidFill>
+            <a:schemeClr val="phClr">
+              <a:shade val="95000"/>
+              <a:satMod val="105000"/>
+            </a:schemeClr>
+          </a:solidFill>
+          <a:prstDash val="solid"/>
+        </a:ln>
+        <a:ln w="25400" cap="flat" cmpd="sng" algn="ctr">
+          <a:solidFill>
+            <a:schemeClr val="phClr"/>
+          </a:solidFill>
+          <a:prstDash val="solid"/>
+        </a:ln>
+        <a:ln w="38100" cap="flat" cmpd="sng" algn="ctr">
+          <a:solidFill>
+            <a:schemeClr val="phClr"/>
+          </a:solidFill>
+          <a:prstDash val="solid"/>
+        </a:ln>
+      </a:lnStyleLst>
+      <a:effectStyleLst>
+        <a:effectStyle>
+          <a:effectLst>
+            <a:outerShdw blurRad="40000" dist="20000" dir="5400000" rotWithShape="0">
+              <a:srgbClr val="000000">
+                <a:alpha val="38000"/>
+              </a:srgbClr>
+            </a:outerShdw>
+          </a:effectLst>
+        </a:effectStyle>
+        <a:effectStyle>
+          <a:effectLst>
+            <a:outerShdw blurRad="40000" dist="23000" dir="5400000" rotWithShape="0">
+              <a:srgbClr val="000000">
+                <a:alpha val="35000"/>
+              </a:srgbClr>
+            </a:outerShdw>
+          </a:effectLst>
+        </a:effectStyle>
+        <a:effectStyle>
+          <a:effectLst>
+            <a:outerShdw blurRad="40000" dist="23000" dir="5400000" rotWithShape="0">
+              <a:srgbClr val="000000">
+                <a:alpha val="35000"/>
+              </a:srgbClr>
+            </a:outerShdw>
+          </a:effectLst>
+          <a:scene3d>
+            <a:camera prst="orthographicFront">
+              <a:rot lat="0" lon="0" rev="0"/>
+            </a:camera>
+            <a:lightRig rig="threePt" dir="t">
+              <a:rot lat="0" lon="0" rev="1200000"/>
+            </a:lightRig>
+          </a:scene3d>
+          <a:sp3d>
+            <a:bevelT w="63500" h="25400"/>
+          </a:sp3d>
+        </a:effectStyle>
+      </a:effectStyleLst>
+      <a:bgFillStyleLst>
+        <a:solidFill>
+          <a:schemeClr val="phClr"/>
+        </a:solidFill>
+        <a:gradFill rotWithShape="1">
+          <a:gsLst>
+            <a:gs pos="0">
+              <a:schemeClr val="phClr">
+                <a:tint val="40000"/>
+                <a:satMod val="350000"/>
+              </a:schemeClr>
+            </a:gs>
+            <a:gs pos="40000">
+              <a:schemeClr val="phClr">
+                <a:tint val="45000"/>
+                <a:shade val="99000"/>
+                <a:satMod val="350000"/>
+              </a:schemeClr>
+            </a:gs>
+            <a:gs pos="100000">
+              <a:schemeClr val="phClr">
+                <a:shade val="20000"/>
+                <a:satMod val="255000"/>
+              </a:schemeClr>
+            </a:gs>
+          </a:gsLst>
+          <a:path path="circle">
+            <a:fillToRect l="50000" t="-80000" r="50000" b="180000"/>
+          </a:path>
+        </a:gradFill>
+        <a:gradFill rotWithShape="1">
+          <a:gsLst>
+            <a:gs pos="0">
+              <a:schemeClr val="phClr">
+                <a:tint val="80000"/>
+                <a:satMod val="300000"/>
+              </a:schemeClr>
+            </a:gs>
+            <a:gs pos="100000">
+              <a:schemeClr val="phClr">
+                <a:shade val="30000"/>
+                <a:satMod val="200000"/>
+              </a:schemeClr>
+            </a:gs>
+          </a:gsLst>
+          <a:path path="circle">
+            <a:fillToRect l="50000" t="50000" r="50000" b="50000"/>
+          </a:path>
+        </a:gradFill>
+      </a:bgFillStyleLst>
+    </a:fmtScheme>
+  </a:themeElements>
+</a:theme>
+</file>
+
+<file path=ppt/theme/theme2.xml><?xml version="1.0" encoding="utf-8"?>
 <a:theme xmlns:a="http://schemas.openxmlformats.org/drawingml/2006/main" xmlns:r="http://schemas.openxmlformats.org/officeDocument/2006/relationships">
   <a:themeElements>
     <a:clrScheme name="Default">
@@ -25283,283 +25562,4 @@
     </a:fmtScheme>
   </a:themeElements>
 </a:theme>
-</file>
-
-<file path=ppt/theme/theme2.xml><?xml version="1.0" encoding="utf-8"?>
-<a:theme xmlns:a="http://schemas.openxmlformats.org/drawingml/2006/main" xmlns:r="http://schemas.openxmlformats.org/officeDocument/2006/relationships" name="NYT Slides Template">
-  <a:themeElements>
-    <a:clrScheme name="Simple Light">
-      <a:dk1>
-        <a:srgbClr val="000000"/>
-      </a:dk1>
-      <a:lt1>
-        <a:srgbClr val="FFFFFF"/>
-      </a:lt1>
-      <a:dk2>
-        <a:srgbClr val="404040"/>
-      </a:dk2>
-      <a:lt2>
-        <a:srgbClr val="808080"/>
-      </a:lt2>
-      <a:accent1>
-        <a:srgbClr val="D0D0D0"/>
-      </a:accent1>
-      <a:accent2>
-        <a:srgbClr val="4169E1"/>
-      </a:accent2>
-      <a:accent3>
-        <a:srgbClr val="D50D01"/>
-      </a:accent3>
-      <a:accent4>
-        <a:srgbClr val="FEB612"/>
-      </a:accent4>
-      <a:accent5>
-        <a:srgbClr val="4CAF50"/>
-      </a:accent5>
-      <a:accent6>
-        <a:srgbClr val="8E44AD"/>
-      </a:accent6>
-      <a:hlink>
-        <a:srgbClr val="34A3C5"/>
-      </a:hlink>
-      <a:folHlink>
-        <a:srgbClr val="0097A7"/>
-      </a:folHlink>
-    </a:clrScheme>
-    <a:fontScheme name="Office">
-      <a:majorFont>
-        <a:latin typeface="Arial"/>
-        <a:ea typeface=""/>
-        <a:cs typeface=""/>
-        <a:font script="Jpan" typeface="ＭＳ Ｐゴシック"/>
-        <a:font script="Hang" typeface="맑은 고딕"/>
-        <a:font script="Hans" typeface="宋体"/>
-        <a:font script="Hant" typeface="新細明體"/>
-        <a:font script="Arab" typeface="Times New Roman"/>
-        <a:font script="Hebr" typeface="Times New Roman"/>
-        <a:font script="Thai" typeface="Angsana New"/>
-        <a:font script="Ethi" typeface="Nyala"/>
-        <a:font script="Beng" typeface="Vrinda"/>
-        <a:font script="Gujr" typeface="Shruti"/>
-        <a:font script="Khmr" typeface="MoolBoran"/>
-        <a:font script="Knda" typeface="Tunga"/>
-        <a:font script="Guru" typeface="Raavi"/>
-        <a:font script="Cans" typeface="Euphemia"/>
-        <a:font script="Cher" typeface="Plantagenet Cherokee"/>
-        <a:font script="Yiii" typeface="Microsoft Yi Baiti"/>
-        <a:font script="Tibt" typeface="Microsoft Himalaya"/>
-        <a:font script="Thaa" typeface="MV Boli"/>
-        <a:font script="Deva" typeface="Mangal"/>
-        <a:font script="Telu" typeface="Gautami"/>
-        <a:font script="Taml" typeface="Latha"/>
-        <a:font script="Syrc" typeface="Estrangelo Edessa"/>
-        <a:font script="Orya" typeface="Kalinga"/>
-        <a:font script="Mlym" typeface="Kartika"/>
-        <a:font script="Laoo" typeface="DokChampa"/>
-        <a:font script="Sinh" typeface="Iskoola Pota"/>
-        <a:font script="Mong" typeface="Mongolian Baiti"/>
-        <a:font script="Viet" typeface="Times New Roman"/>
-        <a:font script="Uigh" typeface="Microsoft Uighur"/>
-        <a:font script="Geor" typeface="Sylfaen"/>
-      </a:majorFont>
-      <a:minorFont>
-        <a:latin typeface="Arial"/>
-        <a:ea typeface=""/>
-        <a:cs typeface=""/>
-        <a:font script="Jpan" typeface="ＭＳ Ｐゴシック"/>
-        <a:font script="Hang" typeface="맑은 고딕"/>
-        <a:font script="Hans" typeface="宋体"/>
-        <a:font script="Hant" typeface="新細明體"/>
-        <a:font script="Arab" typeface="Arial"/>
-        <a:font script="Hebr" typeface="Arial"/>
-        <a:font script="Thai" typeface="Cordia New"/>
-        <a:font script="Ethi" typeface="Nyala"/>
-        <a:font script="Beng" typeface="Vrinda"/>
-        <a:font script="Gujr" typeface="Shruti"/>
-        <a:font script="Khmr" typeface="DaunPenh"/>
-        <a:font script="Knda" typeface="Tunga"/>
-        <a:font script="Guru" typeface="Raavi"/>
-        <a:font script="Cans" typeface="Euphemia"/>
-        <a:font script="Cher" typeface="Plantagenet Cherokee"/>
-        <a:font script="Yiii" typeface="Microsoft Yi Baiti"/>
-        <a:font script="Tibt" typeface="Microsoft Himalaya"/>
-        <a:font script="Thaa" typeface="MV Boli"/>
-        <a:font script="Deva" typeface="Mangal"/>
-        <a:font script="Telu" typeface="Gautami"/>
-        <a:font script="Taml" typeface="Latha"/>
-        <a:font script="Syrc" typeface="Estrangelo Edessa"/>
-        <a:font script="Orya" typeface="Kalinga"/>
-        <a:font script="Mlym" typeface="Kartika"/>
-        <a:font script="Laoo" typeface="DokChampa"/>
-        <a:font script="Sinh" typeface="Iskoola Pota"/>
-        <a:font script="Mong" typeface="Mongolian Baiti"/>
-        <a:font script="Viet" typeface="Arial"/>
-        <a:font script="Uigh" typeface="Microsoft Uighur"/>
-        <a:font script="Geor" typeface="Sylfaen"/>
-      </a:minorFont>
-    </a:fontScheme>
-    <a:fmtScheme name="Office">
-      <a:fillStyleLst>
-        <a:solidFill>
-          <a:schemeClr val="phClr"/>
-        </a:solidFill>
-        <a:gradFill rotWithShape="1">
-          <a:gsLst>
-            <a:gs pos="0">
-              <a:schemeClr val="phClr">
-                <a:tint val="50000"/>
-                <a:satMod val="300000"/>
-              </a:schemeClr>
-            </a:gs>
-            <a:gs pos="35000">
-              <a:schemeClr val="phClr">
-                <a:tint val="37000"/>
-                <a:satMod val="300000"/>
-              </a:schemeClr>
-            </a:gs>
-            <a:gs pos="100000">
-              <a:schemeClr val="phClr">
-                <a:tint val="15000"/>
-                <a:satMod val="350000"/>
-              </a:schemeClr>
-            </a:gs>
-          </a:gsLst>
-          <a:lin ang="16200000" scaled="1"/>
-        </a:gradFill>
-        <a:gradFill rotWithShape="1">
-          <a:gsLst>
-            <a:gs pos="0">
-              <a:schemeClr val="phClr">
-                <a:tint val="100000"/>
-                <a:shade val="100000"/>
-                <a:satMod val="130000"/>
-              </a:schemeClr>
-            </a:gs>
-            <a:gs pos="100000">
-              <a:schemeClr val="phClr">
-                <a:tint val="50000"/>
-                <a:shade val="100000"/>
-                <a:satMod val="350000"/>
-              </a:schemeClr>
-            </a:gs>
-          </a:gsLst>
-          <a:lin ang="16200000" scaled="0"/>
-        </a:gradFill>
-      </a:fillStyleLst>
-      <a:lnStyleLst>
-        <a:ln w="9525" cap="flat" cmpd="sng" algn="ctr">
-          <a:solidFill>
-            <a:schemeClr val="phClr">
-              <a:shade val="95000"/>
-              <a:satMod val="105000"/>
-            </a:schemeClr>
-          </a:solidFill>
-          <a:prstDash val="solid"/>
-        </a:ln>
-        <a:ln w="25400" cap="flat" cmpd="sng" algn="ctr">
-          <a:solidFill>
-            <a:schemeClr val="phClr"/>
-          </a:solidFill>
-          <a:prstDash val="solid"/>
-        </a:ln>
-        <a:ln w="38100" cap="flat" cmpd="sng" algn="ctr">
-          <a:solidFill>
-            <a:schemeClr val="phClr"/>
-          </a:solidFill>
-          <a:prstDash val="solid"/>
-        </a:ln>
-      </a:lnStyleLst>
-      <a:effectStyleLst>
-        <a:effectStyle>
-          <a:effectLst>
-            <a:outerShdw blurRad="40000" dist="20000" dir="5400000" rotWithShape="0">
-              <a:srgbClr val="000000">
-                <a:alpha val="38000"/>
-              </a:srgbClr>
-            </a:outerShdw>
-          </a:effectLst>
-        </a:effectStyle>
-        <a:effectStyle>
-          <a:effectLst>
-            <a:outerShdw blurRad="40000" dist="23000" dir="5400000" rotWithShape="0">
-              <a:srgbClr val="000000">
-                <a:alpha val="35000"/>
-              </a:srgbClr>
-            </a:outerShdw>
-          </a:effectLst>
-        </a:effectStyle>
-        <a:effectStyle>
-          <a:effectLst>
-            <a:outerShdw blurRad="40000" dist="23000" dir="5400000" rotWithShape="0">
-              <a:srgbClr val="000000">
-                <a:alpha val="35000"/>
-              </a:srgbClr>
-            </a:outerShdw>
-          </a:effectLst>
-          <a:scene3d>
-            <a:camera prst="orthographicFront">
-              <a:rot lat="0" lon="0" rev="0"/>
-            </a:camera>
-            <a:lightRig rig="threePt" dir="t">
-              <a:rot lat="0" lon="0" rev="1200000"/>
-            </a:lightRig>
-          </a:scene3d>
-          <a:sp3d>
-            <a:bevelT w="63500" h="25400"/>
-          </a:sp3d>
-        </a:effectStyle>
-      </a:effectStyleLst>
-      <a:bgFillStyleLst>
-        <a:solidFill>
-          <a:schemeClr val="phClr"/>
-        </a:solidFill>
-        <a:gradFill rotWithShape="1">
-          <a:gsLst>
-            <a:gs pos="0">
-              <a:schemeClr val="phClr">
-                <a:tint val="40000"/>
-                <a:satMod val="350000"/>
-              </a:schemeClr>
-            </a:gs>
-            <a:gs pos="40000">
-              <a:schemeClr val="phClr">
-                <a:tint val="45000"/>
-                <a:shade val="99000"/>
-                <a:satMod val="350000"/>
-              </a:schemeClr>
-            </a:gs>
-            <a:gs pos="100000">
-              <a:schemeClr val="phClr">
-                <a:shade val="20000"/>
-                <a:satMod val="255000"/>
-              </a:schemeClr>
-            </a:gs>
-          </a:gsLst>
-          <a:path path="circle">
-            <a:fillToRect l="50000" t="-80000" r="50000" b="180000"/>
-          </a:path>
-        </a:gradFill>
-        <a:gradFill rotWithShape="1">
-          <a:gsLst>
-            <a:gs pos="0">
-              <a:schemeClr val="phClr">
-                <a:tint val="80000"/>
-                <a:satMod val="300000"/>
-              </a:schemeClr>
-            </a:gs>
-            <a:gs pos="100000">
-              <a:schemeClr val="phClr">
-                <a:shade val="30000"/>
-                <a:satMod val="200000"/>
-              </a:schemeClr>
-            </a:gs>
-          </a:gsLst>
-          <a:path path="circle">
-            <a:fillToRect l="50000" t="50000" r="50000" b="50000"/>
-          </a:path>
-        </a:gradFill>
-      </a:bgFillStyleLst>
-    </a:fmtScheme>
-  </a:themeElements>
-</a:theme>
 </file>
--- a/Lecture slides/NYT E01 - Scientific Writing.pptx
+++ b/Lecture slides/NYT E01 - Scientific Writing.pptx
@@ -65,6 +65,8 @@
     <p:sldId id="310" r:id="rId61"/>
     <p:sldId id="311" r:id="rId62"/>
     <p:sldId id="312" r:id="rId63"/>
+    <p:sldId id="313" r:id="rId64"/>
+    <p:sldId id="314" r:id="rId65"/>
   </p:sldIdLst>
   <p:sldSz cy="5143500" cx="9144000"/>
   <p:notesSz cx="6858000" cy="9144000"/>
@@ -747,7 +749,7 @@
   <p:cSld>
     <p:spTree>
       <p:nvGrpSpPr>
-        <p:cNvPr id="33" name="Shape 33"/>
+        <p:cNvPr id="32" name="Shape 32"/>
         <p:cNvGrpSpPr/>
         <p:nvPr/>
       </p:nvGrpSpPr>
@@ -761,7 +763,7 @@
       </p:grpSpPr>
       <p:sp>
         <p:nvSpPr>
-          <p:cNvPr id="34" name="Google Shape;34;g1f3ff092ddc_0_32:notes"/>
+          <p:cNvPr id="33" name="Google Shape;33;g1f3ff092ddc_0_32:notes"/>
           <p:cNvSpPr/>
           <p:nvPr>
             <p:ph idx="2" type="sldImg"/>
@@ -796,7 +798,7 @@
       </p:sp>
       <p:sp>
         <p:nvSpPr>
-          <p:cNvPr id="35" name="Google Shape;35;g1f3ff092ddc_0_32:notes"/>
+          <p:cNvPr id="34" name="Google Shape;34;g1f3ff092ddc_0_32:notes"/>
           <p:cNvSpPr txBox="1"/>
           <p:nvPr>
             <p:ph idx="1" type="body"/>
@@ -846,7 +848,7 @@
   <p:cSld>
     <p:spTree>
       <p:nvGrpSpPr>
-        <p:cNvPr id="91" name="Shape 91"/>
+        <p:cNvPr id="90" name="Shape 90"/>
         <p:cNvGrpSpPr/>
         <p:nvPr/>
       </p:nvGrpSpPr>
@@ -860,7 +862,7 @@
       </p:grpSpPr>
       <p:sp>
         <p:nvSpPr>
-          <p:cNvPr id="92" name="Google Shape;92;g136ac22f7bd_0_47:notes"/>
+          <p:cNvPr id="91" name="Google Shape;91;g136ac22f7bd_0_47:notes"/>
           <p:cNvSpPr/>
           <p:nvPr>
             <p:ph idx="2" type="sldImg"/>
@@ -895,7 +897,7 @@
       </p:sp>
       <p:sp>
         <p:nvSpPr>
-          <p:cNvPr id="93" name="Google Shape;93;g136ac22f7bd_0_47:notes"/>
+          <p:cNvPr id="92" name="Google Shape;92;g136ac22f7bd_0_47:notes"/>
           <p:cNvSpPr txBox="1"/>
           <p:nvPr>
             <p:ph idx="1" type="body"/>
@@ -945,7 +947,7 @@
   <p:cSld>
     <p:spTree>
       <p:nvGrpSpPr>
-        <p:cNvPr id="99" name="Shape 99"/>
+        <p:cNvPr id="98" name="Shape 98"/>
         <p:cNvGrpSpPr/>
         <p:nvPr/>
       </p:nvGrpSpPr>
@@ -959,7 +961,7 @@
       </p:grpSpPr>
       <p:sp>
         <p:nvSpPr>
-          <p:cNvPr id="100" name="Google Shape;100;g13d1cde2ff3_0_28:notes"/>
+          <p:cNvPr id="99" name="Google Shape;99;g13d1cde2ff3_0_28:notes"/>
           <p:cNvSpPr/>
           <p:nvPr>
             <p:ph idx="2" type="sldImg"/>
@@ -994,7 +996,7 @@
       </p:sp>
       <p:sp>
         <p:nvSpPr>
-          <p:cNvPr id="101" name="Google Shape;101;g13d1cde2ff3_0_28:notes"/>
+          <p:cNvPr id="100" name="Google Shape;100;g13d1cde2ff3_0_28:notes"/>
           <p:cNvSpPr txBox="1"/>
           <p:nvPr>
             <p:ph idx="1" type="body"/>
@@ -1044,7 +1046,7 @@
   <p:cSld>
     <p:spTree>
       <p:nvGrpSpPr>
-        <p:cNvPr id="106" name="Shape 106"/>
+        <p:cNvPr id="105" name="Shape 105"/>
         <p:cNvGrpSpPr/>
         <p:nvPr/>
       </p:nvGrpSpPr>
@@ -1058,7 +1060,7 @@
       </p:grpSpPr>
       <p:sp>
         <p:nvSpPr>
-          <p:cNvPr id="107" name="Google Shape;107;g136ac22f7bd_0_59:notes"/>
+          <p:cNvPr id="106" name="Google Shape;106;g136ac22f7bd_0_59:notes"/>
           <p:cNvSpPr/>
           <p:nvPr>
             <p:ph idx="2" type="sldImg"/>
@@ -1093,7 +1095,7 @@
       </p:sp>
       <p:sp>
         <p:nvSpPr>
-          <p:cNvPr id="108" name="Google Shape;108;g136ac22f7bd_0_59:notes"/>
+          <p:cNvPr id="107" name="Google Shape;107;g136ac22f7bd_0_59:notes"/>
           <p:cNvSpPr txBox="1"/>
           <p:nvPr>
             <p:ph idx="1" type="body"/>
@@ -1143,7 +1145,7 @@
   <p:cSld>
     <p:spTree>
       <p:nvGrpSpPr>
-        <p:cNvPr id="113" name="Shape 113"/>
+        <p:cNvPr id="112" name="Shape 112"/>
         <p:cNvGrpSpPr/>
         <p:nvPr/>
       </p:nvGrpSpPr>
@@ -1157,7 +1159,7 @@
       </p:grpSpPr>
       <p:sp>
         <p:nvSpPr>
-          <p:cNvPr id="114" name="Google Shape;114;g257e89dbbb7_0_1:notes"/>
+          <p:cNvPr id="113" name="Google Shape;113;g257e89dbbb7_0_1:notes"/>
           <p:cNvSpPr/>
           <p:nvPr>
             <p:ph idx="2" type="sldImg"/>
@@ -1192,7 +1194,7 @@
       </p:sp>
       <p:sp>
         <p:nvSpPr>
-          <p:cNvPr id="115" name="Google Shape;115;g257e89dbbb7_0_1:notes"/>
+          <p:cNvPr id="114" name="Google Shape;114;g257e89dbbb7_0_1:notes"/>
           <p:cNvSpPr txBox="1"/>
           <p:nvPr>
             <p:ph idx="1" type="body"/>
@@ -1242,7 +1244,7 @@
   <p:cSld>
     <p:spTree>
       <p:nvGrpSpPr>
-        <p:cNvPr id="120" name="Shape 120"/>
+        <p:cNvPr id="119" name="Shape 119"/>
         <p:cNvGrpSpPr/>
         <p:nvPr/>
       </p:nvGrpSpPr>
@@ -1256,7 +1258,7 @@
       </p:grpSpPr>
       <p:sp>
         <p:nvSpPr>
-          <p:cNvPr id="121" name="Google Shape;121;g136ac22f7bd_0_65:notes"/>
+          <p:cNvPr id="120" name="Google Shape;120;g136ac22f7bd_0_65:notes"/>
           <p:cNvSpPr/>
           <p:nvPr>
             <p:ph idx="2" type="sldImg"/>
@@ -1291,7 +1293,7 @@
       </p:sp>
       <p:sp>
         <p:nvSpPr>
-          <p:cNvPr id="122" name="Google Shape;122;g136ac22f7bd_0_65:notes"/>
+          <p:cNvPr id="121" name="Google Shape;121;g136ac22f7bd_0_65:notes"/>
           <p:cNvSpPr txBox="1"/>
           <p:nvPr>
             <p:ph idx="1" type="body"/>
@@ -1341,7 +1343,7 @@
   <p:cSld>
     <p:spTree>
       <p:nvGrpSpPr>
-        <p:cNvPr id="129" name="Shape 129"/>
+        <p:cNvPr id="128" name="Shape 128"/>
         <p:cNvGrpSpPr/>
         <p:nvPr/>
       </p:nvGrpSpPr>
@@ -1355,7 +1357,7 @@
       </p:grpSpPr>
       <p:sp>
         <p:nvSpPr>
-          <p:cNvPr id="130" name="Google Shape;130;g13d1cde2ff3_0_34:notes"/>
+          <p:cNvPr id="129" name="Google Shape;129;g13d1cde2ff3_0_34:notes"/>
           <p:cNvSpPr/>
           <p:nvPr>
             <p:ph idx="2" type="sldImg"/>
@@ -1390,7 +1392,7 @@
       </p:sp>
       <p:sp>
         <p:nvSpPr>
-          <p:cNvPr id="131" name="Google Shape;131;g13d1cde2ff3_0_34:notes"/>
+          <p:cNvPr id="130" name="Google Shape;130;g13d1cde2ff3_0_34:notes"/>
           <p:cNvSpPr txBox="1"/>
           <p:nvPr>
             <p:ph idx="1" type="body"/>
@@ -1440,7 +1442,7 @@
   <p:cSld>
     <p:spTree>
       <p:nvGrpSpPr>
-        <p:cNvPr id="136" name="Shape 136"/>
+        <p:cNvPr id="135" name="Shape 135"/>
         <p:cNvGrpSpPr/>
         <p:nvPr/>
       </p:nvGrpSpPr>
@@ -1454,7 +1456,7 @@
       </p:grpSpPr>
       <p:sp>
         <p:nvSpPr>
-          <p:cNvPr id="137" name="Google Shape;137;g136ac22f7bd_0_72:notes"/>
+          <p:cNvPr id="136" name="Google Shape;136;g136ac22f7bd_0_72:notes"/>
           <p:cNvSpPr/>
           <p:nvPr>
             <p:ph idx="2" type="sldImg"/>
@@ -1489,7 +1491,7 @@
       </p:sp>
       <p:sp>
         <p:nvSpPr>
-          <p:cNvPr id="138" name="Google Shape;138;g136ac22f7bd_0_72:notes"/>
+          <p:cNvPr id="137" name="Google Shape;137;g136ac22f7bd_0_72:notes"/>
           <p:cNvSpPr txBox="1"/>
           <p:nvPr>
             <p:ph idx="1" type="body"/>
@@ -1539,7 +1541,7 @@
   <p:cSld>
     <p:spTree>
       <p:nvGrpSpPr>
-        <p:cNvPr id="144" name="Shape 144"/>
+        <p:cNvPr id="143" name="Shape 143"/>
         <p:cNvGrpSpPr/>
         <p:nvPr/>
       </p:nvGrpSpPr>
@@ -1553,7 +1555,7 @@
       </p:grpSpPr>
       <p:sp>
         <p:nvSpPr>
-          <p:cNvPr id="145" name="Google Shape;145;g257e89dbbb7_0_25:notes"/>
+          <p:cNvPr id="144" name="Google Shape;144;g257e89dbbb7_0_25:notes"/>
           <p:cNvSpPr/>
           <p:nvPr>
             <p:ph idx="2" type="sldImg"/>
@@ -1588,7 +1590,7 @@
       </p:sp>
       <p:sp>
         <p:nvSpPr>
-          <p:cNvPr id="146" name="Google Shape;146;g257e89dbbb7_0_25:notes"/>
+          <p:cNvPr id="145" name="Google Shape;145;g257e89dbbb7_0_25:notes"/>
           <p:cNvSpPr txBox="1"/>
           <p:nvPr>
             <p:ph idx="1" type="body"/>
@@ -1638,7 +1640,7 @@
   <p:cSld>
     <p:spTree>
       <p:nvGrpSpPr>
-        <p:cNvPr id="153" name="Shape 153"/>
+        <p:cNvPr id="152" name="Shape 152"/>
         <p:cNvGrpSpPr/>
         <p:nvPr/>
       </p:nvGrpSpPr>
@@ -1652,7 +1654,7 @@
       </p:grpSpPr>
       <p:sp>
         <p:nvSpPr>
-          <p:cNvPr id="154" name="Google Shape;154;g13d1cde2ff3_0_40:notes"/>
+          <p:cNvPr id="153" name="Google Shape;153;g13d1cde2ff3_0_40:notes"/>
           <p:cNvSpPr/>
           <p:nvPr>
             <p:ph idx="2" type="sldImg"/>
@@ -1687,7 +1689,7 @@
       </p:sp>
       <p:sp>
         <p:nvSpPr>
-          <p:cNvPr id="155" name="Google Shape;155;g13d1cde2ff3_0_40:notes"/>
+          <p:cNvPr id="154" name="Google Shape;154;g13d1cde2ff3_0_40:notes"/>
           <p:cNvSpPr txBox="1"/>
           <p:nvPr>
             <p:ph idx="1" type="body"/>
@@ -1737,7 +1739,7 @@
   <p:cSld>
     <p:spTree>
       <p:nvGrpSpPr>
-        <p:cNvPr id="160" name="Shape 160"/>
+        <p:cNvPr id="159" name="Shape 159"/>
         <p:cNvGrpSpPr/>
         <p:nvPr/>
       </p:nvGrpSpPr>
@@ -1751,7 +1753,7 @@
       </p:grpSpPr>
       <p:sp>
         <p:nvSpPr>
-          <p:cNvPr id="161" name="Google Shape;161;g136ac22f7bd_0_83:notes"/>
+          <p:cNvPr id="160" name="Google Shape;160;g136ac22f7bd_0_83:notes"/>
           <p:cNvSpPr/>
           <p:nvPr>
             <p:ph idx="2" type="sldImg"/>
@@ -1786,7 +1788,7 @@
       </p:sp>
       <p:sp>
         <p:nvSpPr>
-          <p:cNvPr id="162" name="Google Shape;162;g136ac22f7bd_0_83:notes"/>
+          <p:cNvPr id="161" name="Google Shape;161;g136ac22f7bd_0_83:notes"/>
           <p:cNvSpPr txBox="1"/>
           <p:nvPr>
             <p:ph idx="1" type="body"/>
@@ -1836,7 +1838,7 @@
   <p:cSld>
     <p:spTree>
       <p:nvGrpSpPr>
-        <p:cNvPr id="39" name="Shape 39"/>
+        <p:cNvPr id="38" name="Shape 38"/>
         <p:cNvGrpSpPr/>
         <p:nvPr/>
       </p:nvGrpSpPr>
@@ -1850,7 +1852,7 @@
       </p:grpSpPr>
       <p:sp>
         <p:nvSpPr>
-          <p:cNvPr id="40" name="Google Shape;40;g13d1cde2ff3_0_0:notes"/>
+          <p:cNvPr id="39" name="Google Shape;39;g13d1cde2ff3_0_0:notes"/>
           <p:cNvSpPr/>
           <p:nvPr>
             <p:ph idx="2" type="sldImg"/>
@@ -1885,7 +1887,7 @@
       </p:sp>
       <p:sp>
         <p:nvSpPr>
-          <p:cNvPr id="41" name="Google Shape;41;g13d1cde2ff3_0_0:notes"/>
+          <p:cNvPr id="40" name="Google Shape;40;g13d1cde2ff3_0_0:notes"/>
           <p:cNvSpPr txBox="1"/>
           <p:nvPr>
             <p:ph idx="1" type="body"/>
@@ -1935,7 +1937,7 @@
   <p:cSld>
     <p:spTree>
       <p:nvGrpSpPr>
-        <p:cNvPr id="167" name="Shape 167"/>
+        <p:cNvPr id="166" name="Shape 166"/>
         <p:cNvGrpSpPr/>
         <p:nvPr/>
       </p:nvGrpSpPr>
@@ -1949,7 +1951,7 @@
       </p:grpSpPr>
       <p:sp>
         <p:nvSpPr>
-          <p:cNvPr id="168" name="Google Shape;168;g136ac22f7bd_0_90:notes"/>
+          <p:cNvPr id="167" name="Google Shape;167;g136ac22f7bd_0_90:notes"/>
           <p:cNvSpPr/>
           <p:nvPr>
             <p:ph idx="2" type="sldImg"/>
@@ -1984,7 +1986,7 @@
       </p:sp>
       <p:sp>
         <p:nvSpPr>
-          <p:cNvPr id="169" name="Google Shape;169;g136ac22f7bd_0_90:notes"/>
+          <p:cNvPr id="168" name="Google Shape;168;g136ac22f7bd_0_90:notes"/>
           <p:cNvSpPr txBox="1"/>
           <p:nvPr>
             <p:ph idx="1" type="body"/>
@@ -2034,7 +2036,7 @@
   <p:cSld>
     <p:spTree>
       <p:nvGrpSpPr>
-        <p:cNvPr id="175" name="Shape 175"/>
+        <p:cNvPr id="174" name="Shape 174"/>
         <p:cNvGrpSpPr/>
         <p:nvPr/>
       </p:nvGrpSpPr>
@@ -2048,7 +2050,7 @@
       </p:grpSpPr>
       <p:sp>
         <p:nvSpPr>
-          <p:cNvPr id="176" name="Google Shape;176;g13d1cde2ff3_0_46:notes"/>
+          <p:cNvPr id="175" name="Google Shape;175;g13d1cde2ff3_0_46:notes"/>
           <p:cNvSpPr/>
           <p:nvPr>
             <p:ph idx="2" type="sldImg"/>
@@ -2083,7 +2085,7 @@
       </p:sp>
       <p:sp>
         <p:nvSpPr>
-          <p:cNvPr id="177" name="Google Shape;177;g13d1cde2ff3_0_46:notes"/>
+          <p:cNvPr id="176" name="Google Shape;176;g13d1cde2ff3_0_46:notes"/>
           <p:cNvSpPr txBox="1"/>
           <p:nvPr>
             <p:ph idx="1" type="body"/>
@@ -2133,7 +2135,7 @@
   <p:cSld>
     <p:spTree>
       <p:nvGrpSpPr>
-        <p:cNvPr id="182" name="Shape 182"/>
+        <p:cNvPr id="181" name="Shape 181"/>
         <p:cNvGrpSpPr/>
         <p:nvPr/>
       </p:nvGrpSpPr>
@@ -2147,7 +2149,7 @@
       </p:grpSpPr>
       <p:sp>
         <p:nvSpPr>
-          <p:cNvPr id="183" name="Google Shape;183;g136ab2b6419_0_6:notes"/>
+          <p:cNvPr id="182" name="Google Shape;182;g136ab2b6419_0_6:notes"/>
           <p:cNvSpPr/>
           <p:nvPr>
             <p:ph idx="2" type="sldImg"/>
@@ -2182,7 +2184,7 @@
       </p:sp>
       <p:sp>
         <p:nvSpPr>
-          <p:cNvPr id="184" name="Google Shape;184;g136ab2b6419_0_6:notes"/>
+          <p:cNvPr id="183" name="Google Shape;183;g136ab2b6419_0_6:notes"/>
           <p:cNvSpPr txBox="1"/>
           <p:nvPr>
             <p:ph idx="1" type="body"/>
@@ -2232,7 +2234,7 @@
   <p:cSld>
     <p:spTree>
       <p:nvGrpSpPr>
-        <p:cNvPr id="189" name="Shape 189"/>
+        <p:cNvPr id="188" name="Shape 188"/>
         <p:cNvGrpSpPr/>
         <p:nvPr/>
       </p:nvGrpSpPr>
@@ -2246,7 +2248,7 @@
       </p:grpSpPr>
       <p:sp>
         <p:nvSpPr>
-          <p:cNvPr id="190" name="Google Shape;190;g136ab2b6419_0_0:notes"/>
+          <p:cNvPr id="189" name="Google Shape;189;g136ab2b6419_0_0:notes"/>
           <p:cNvSpPr/>
           <p:nvPr>
             <p:ph idx="2" type="sldImg"/>
@@ -2281,7 +2283,7 @@
       </p:sp>
       <p:sp>
         <p:nvSpPr>
-          <p:cNvPr id="191" name="Google Shape;191;g136ab2b6419_0_0:notes"/>
+          <p:cNvPr id="190" name="Google Shape;190;g136ab2b6419_0_0:notes"/>
           <p:cNvSpPr txBox="1"/>
           <p:nvPr>
             <p:ph idx="1" type="body"/>
@@ -2331,7 +2333,7 @@
   <p:cSld>
     <p:spTree>
       <p:nvGrpSpPr>
-        <p:cNvPr id="196" name="Shape 196"/>
+        <p:cNvPr id="195" name="Shape 195"/>
         <p:cNvGrpSpPr/>
         <p:nvPr/>
       </p:nvGrpSpPr>
@@ -2345,7 +2347,7 @@
       </p:grpSpPr>
       <p:sp>
         <p:nvSpPr>
-          <p:cNvPr id="197" name="Google Shape;197;g13d2397785c_0_0:notes"/>
+          <p:cNvPr id="196" name="Google Shape;196;g13d2397785c_0_0:notes"/>
           <p:cNvSpPr/>
           <p:nvPr>
             <p:ph idx="2" type="sldImg"/>
@@ -2380,7 +2382,7 @@
       </p:sp>
       <p:sp>
         <p:nvSpPr>
-          <p:cNvPr id="198" name="Google Shape;198;g13d2397785c_0_0:notes"/>
+          <p:cNvPr id="197" name="Google Shape;197;g13d2397785c_0_0:notes"/>
           <p:cNvSpPr txBox="1"/>
           <p:nvPr>
             <p:ph idx="1" type="body"/>
@@ -2430,7 +2432,7 @@
   <p:cSld>
     <p:spTree>
       <p:nvGrpSpPr>
-        <p:cNvPr id="203" name="Shape 203"/>
+        <p:cNvPr id="202" name="Shape 202"/>
         <p:cNvGrpSpPr/>
         <p:nvPr/>
       </p:nvGrpSpPr>
@@ -2444,7 +2446,7 @@
       </p:grpSpPr>
       <p:sp>
         <p:nvSpPr>
-          <p:cNvPr id="204" name="Google Shape;204;g13d1cde2ff3_0_52:notes"/>
+          <p:cNvPr id="203" name="Google Shape;203;g13d1cde2ff3_0_52:notes"/>
           <p:cNvSpPr/>
           <p:nvPr>
             <p:ph idx="2" type="sldImg"/>
@@ -2479,7 +2481,7 @@
       </p:sp>
       <p:sp>
         <p:nvSpPr>
-          <p:cNvPr id="205" name="Google Shape;205;g13d1cde2ff3_0_52:notes"/>
+          <p:cNvPr id="204" name="Google Shape;204;g13d1cde2ff3_0_52:notes"/>
           <p:cNvSpPr txBox="1"/>
           <p:nvPr>
             <p:ph idx="1" type="body"/>
@@ -2529,7 +2531,7 @@
   <p:cSld>
     <p:spTree>
       <p:nvGrpSpPr>
-        <p:cNvPr id="210" name="Shape 210"/>
+        <p:cNvPr id="209" name="Shape 209"/>
         <p:cNvGrpSpPr/>
         <p:nvPr/>
       </p:nvGrpSpPr>
@@ -2543,7 +2545,7 @@
       </p:grpSpPr>
       <p:sp>
         <p:nvSpPr>
-          <p:cNvPr id="211" name="Google Shape;211;g257e89dbbb7_0_42:notes"/>
+          <p:cNvPr id="210" name="Google Shape;210;g257e89dbbb7_0_42:notes"/>
           <p:cNvSpPr/>
           <p:nvPr>
             <p:ph idx="2" type="sldImg"/>
@@ -2578,7 +2580,7 @@
       </p:sp>
       <p:sp>
         <p:nvSpPr>
-          <p:cNvPr id="212" name="Google Shape;212;g257e89dbbb7_0_42:notes"/>
+          <p:cNvPr id="211" name="Google Shape;211;g257e89dbbb7_0_42:notes"/>
           <p:cNvSpPr txBox="1"/>
           <p:nvPr>
             <p:ph idx="1" type="body"/>
@@ -2628,7 +2630,7 @@
   <p:cSld>
     <p:spTree>
       <p:nvGrpSpPr>
-        <p:cNvPr id="217" name="Shape 217"/>
+        <p:cNvPr id="216" name="Shape 216"/>
         <p:cNvGrpSpPr/>
         <p:nvPr/>
       </p:nvGrpSpPr>
@@ -2642,7 +2644,7 @@
       </p:grpSpPr>
       <p:sp>
         <p:nvSpPr>
-          <p:cNvPr id="218" name="Google Shape;218;g2581d1345f8_0_1:notes"/>
+          <p:cNvPr id="217" name="Google Shape;217;g2581d1345f8_0_1:notes"/>
           <p:cNvSpPr/>
           <p:nvPr>
             <p:ph idx="2" type="sldImg"/>
@@ -2677,7 +2679,7 @@
       </p:sp>
       <p:sp>
         <p:nvSpPr>
-          <p:cNvPr id="219" name="Google Shape;219;g2581d1345f8_0_1:notes"/>
+          <p:cNvPr id="218" name="Google Shape;218;g2581d1345f8_0_1:notes"/>
           <p:cNvSpPr txBox="1"/>
           <p:nvPr>
             <p:ph idx="1" type="body"/>
@@ -2727,7 +2729,7 @@
   <p:cSld>
     <p:spTree>
       <p:nvGrpSpPr>
-        <p:cNvPr id="224" name="Shape 224"/>
+        <p:cNvPr id="223" name="Shape 223"/>
         <p:cNvGrpSpPr/>
         <p:nvPr/>
       </p:nvGrpSpPr>
@@ -2741,7 +2743,7 @@
       </p:grpSpPr>
       <p:sp>
         <p:nvSpPr>
-          <p:cNvPr id="225" name="Google Shape;225;g13d1cde2ff3_0_58:notes"/>
+          <p:cNvPr id="224" name="Google Shape;224;g13d1cde2ff3_0_58:notes"/>
           <p:cNvSpPr/>
           <p:nvPr>
             <p:ph idx="2" type="sldImg"/>
@@ -2776,7 +2778,7 @@
       </p:sp>
       <p:sp>
         <p:nvSpPr>
-          <p:cNvPr id="226" name="Google Shape;226;g13d1cde2ff3_0_58:notes"/>
+          <p:cNvPr id="225" name="Google Shape;225;g13d1cde2ff3_0_58:notes"/>
           <p:cNvSpPr txBox="1"/>
           <p:nvPr>
             <p:ph idx="1" type="body"/>
@@ -2826,7 +2828,7 @@
   <p:cSld>
     <p:spTree>
       <p:nvGrpSpPr>
-        <p:cNvPr id="231" name="Shape 231"/>
+        <p:cNvPr id="230" name="Shape 230"/>
         <p:cNvGrpSpPr/>
         <p:nvPr/>
       </p:nvGrpSpPr>
@@ -2840,7 +2842,7 @@
       </p:grpSpPr>
       <p:sp>
         <p:nvSpPr>
-          <p:cNvPr id="232" name="Google Shape;232;g257e89dbbb7_0_55:notes"/>
+          <p:cNvPr id="231" name="Google Shape;231;g257e89dbbb7_0_55:notes"/>
           <p:cNvSpPr/>
           <p:nvPr>
             <p:ph idx="2" type="sldImg"/>
@@ -2875,7 +2877,7 @@
       </p:sp>
       <p:sp>
         <p:nvSpPr>
-          <p:cNvPr id="233" name="Google Shape;233;g257e89dbbb7_0_55:notes"/>
+          <p:cNvPr id="232" name="Google Shape;232;g257e89dbbb7_0_55:notes"/>
           <p:cNvSpPr txBox="1"/>
           <p:nvPr>
             <p:ph idx="1" type="body"/>
@@ -2925,7 +2927,7 @@
   <p:cSld>
     <p:spTree>
       <p:nvGrpSpPr>
-        <p:cNvPr id="46" name="Shape 46"/>
+        <p:cNvPr id="45" name="Shape 45"/>
         <p:cNvGrpSpPr/>
         <p:nvPr/>
       </p:nvGrpSpPr>
@@ -2939,7 +2941,7 @@
       </p:grpSpPr>
       <p:sp>
         <p:nvSpPr>
-          <p:cNvPr id="47" name="Google Shape;47;gf9bad1e87a_0_0:notes"/>
+          <p:cNvPr id="46" name="Google Shape;46;gf9bad1e87a_0_0:notes"/>
           <p:cNvSpPr/>
           <p:nvPr>
             <p:ph idx="2" type="sldImg"/>
@@ -2974,7 +2976,7 @@
       </p:sp>
       <p:sp>
         <p:nvSpPr>
-          <p:cNvPr id="48" name="Google Shape;48;gf9bad1e87a_0_0:notes"/>
+          <p:cNvPr id="47" name="Google Shape;47;gf9bad1e87a_0_0:notes"/>
           <p:cNvSpPr txBox="1"/>
           <p:nvPr>
             <p:ph idx="1" type="body"/>
@@ -3024,7 +3026,7 @@
   <p:cSld>
     <p:spTree>
       <p:nvGrpSpPr>
-        <p:cNvPr id="238" name="Shape 238"/>
+        <p:cNvPr id="237" name="Shape 237"/>
         <p:cNvGrpSpPr/>
         <p:nvPr/>
       </p:nvGrpSpPr>
@@ -3038,7 +3040,7 @@
       </p:grpSpPr>
       <p:sp>
         <p:nvSpPr>
-          <p:cNvPr id="239" name="Google Shape;239;g13d1cde2ff3_0_64:notes"/>
+          <p:cNvPr id="238" name="Google Shape;238;g13d1cde2ff3_0_64:notes"/>
           <p:cNvSpPr/>
           <p:nvPr>
             <p:ph idx="2" type="sldImg"/>
@@ -3073,7 +3075,7 @@
       </p:sp>
       <p:sp>
         <p:nvSpPr>
-          <p:cNvPr id="240" name="Google Shape;240;g13d1cde2ff3_0_64:notes"/>
+          <p:cNvPr id="239" name="Google Shape;239;g13d1cde2ff3_0_64:notes"/>
           <p:cNvSpPr txBox="1"/>
           <p:nvPr>
             <p:ph idx="1" type="body"/>
@@ -3123,7 +3125,7 @@
   <p:cSld>
     <p:spTree>
       <p:nvGrpSpPr>
-        <p:cNvPr id="245" name="Shape 245"/>
+        <p:cNvPr id="244" name="Shape 244"/>
         <p:cNvGrpSpPr/>
         <p:nvPr/>
       </p:nvGrpSpPr>
@@ -3137,7 +3139,7 @@
       </p:grpSpPr>
       <p:sp>
         <p:nvSpPr>
-          <p:cNvPr id="246" name="Google Shape;246;g257e89dbbb7_0_49:notes"/>
+          <p:cNvPr id="245" name="Google Shape;245;g257e89dbbb7_0_49:notes"/>
           <p:cNvSpPr/>
           <p:nvPr>
             <p:ph idx="2" type="sldImg"/>
@@ -3172,7 +3174,7 @@
       </p:sp>
       <p:sp>
         <p:nvSpPr>
-          <p:cNvPr id="247" name="Google Shape;247;g257e89dbbb7_0_49:notes"/>
+          <p:cNvPr id="246" name="Google Shape;246;g257e89dbbb7_0_49:notes"/>
           <p:cNvSpPr txBox="1"/>
           <p:nvPr>
             <p:ph idx="1" type="body"/>
@@ -3222,7 +3224,7 @@
   <p:cSld>
     <p:spTree>
       <p:nvGrpSpPr>
-        <p:cNvPr id="252" name="Shape 252"/>
+        <p:cNvPr id="251" name="Shape 251"/>
         <p:cNvGrpSpPr/>
         <p:nvPr/>
       </p:nvGrpSpPr>
@@ -3236,7 +3238,7 @@
       </p:grpSpPr>
       <p:sp>
         <p:nvSpPr>
-          <p:cNvPr id="253" name="Google Shape;253;g13d2397785c_0_6:notes"/>
+          <p:cNvPr id="252" name="Google Shape;252;g13d2397785c_0_6:notes"/>
           <p:cNvSpPr/>
           <p:nvPr>
             <p:ph idx="2" type="sldImg"/>
@@ -3271,7 +3273,7 @@
       </p:sp>
       <p:sp>
         <p:nvSpPr>
-          <p:cNvPr id="254" name="Google Shape;254;g13d2397785c_0_6:notes"/>
+          <p:cNvPr id="253" name="Google Shape;253;g13d2397785c_0_6:notes"/>
           <p:cNvSpPr txBox="1"/>
           <p:nvPr>
             <p:ph idx="1" type="body"/>
@@ -3321,7 +3323,7 @@
   <p:cSld>
     <p:spTree>
       <p:nvGrpSpPr>
-        <p:cNvPr id="259" name="Shape 259"/>
+        <p:cNvPr id="258" name="Shape 258"/>
         <p:cNvGrpSpPr/>
         <p:nvPr/>
       </p:nvGrpSpPr>
@@ -3335,7 +3337,7 @@
       </p:grpSpPr>
       <p:sp>
         <p:nvSpPr>
-          <p:cNvPr id="260" name="Google Shape;260;g13d1cde2ff3_0_70:notes"/>
+          <p:cNvPr id="259" name="Google Shape;259;g13d1cde2ff3_0_70:notes"/>
           <p:cNvSpPr/>
           <p:nvPr>
             <p:ph idx="2" type="sldImg"/>
@@ -3370,7 +3372,7 @@
       </p:sp>
       <p:sp>
         <p:nvSpPr>
-          <p:cNvPr id="261" name="Google Shape;261;g13d1cde2ff3_0_70:notes"/>
+          <p:cNvPr id="260" name="Google Shape;260;g13d1cde2ff3_0_70:notes"/>
           <p:cNvSpPr txBox="1"/>
           <p:nvPr>
             <p:ph idx="1" type="body"/>
@@ -3420,7 +3422,7 @@
   <p:cSld>
     <p:spTree>
       <p:nvGrpSpPr>
-        <p:cNvPr id="266" name="Shape 266"/>
+        <p:cNvPr id="265" name="Shape 265"/>
         <p:cNvGrpSpPr/>
         <p:nvPr/>
       </p:nvGrpSpPr>
@@ -3434,7 +3436,7 @@
       </p:grpSpPr>
       <p:sp>
         <p:nvSpPr>
-          <p:cNvPr id="267" name="Google Shape;267;g13d1cde2ff3_0_76:notes"/>
+          <p:cNvPr id="266" name="Google Shape;266;g13d1cde2ff3_0_76:notes"/>
           <p:cNvSpPr/>
           <p:nvPr>
             <p:ph idx="2" type="sldImg"/>
@@ -3469,7 +3471,7 @@
       </p:sp>
       <p:sp>
         <p:nvSpPr>
-          <p:cNvPr id="268" name="Google Shape;268;g13d1cde2ff3_0_76:notes"/>
+          <p:cNvPr id="267" name="Google Shape;267;g13d1cde2ff3_0_76:notes"/>
           <p:cNvSpPr txBox="1"/>
           <p:nvPr>
             <p:ph idx="1" type="body"/>
@@ -3519,7 +3521,7 @@
   <p:cSld>
     <p:spTree>
       <p:nvGrpSpPr>
-        <p:cNvPr id="273" name="Shape 273"/>
+        <p:cNvPr id="272" name="Shape 272"/>
         <p:cNvGrpSpPr/>
         <p:nvPr/>
       </p:nvGrpSpPr>
@@ -3533,7 +3535,7 @@
       </p:grpSpPr>
       <p:sp>
         <p:nvSpPr>
-          <p:cNvPr id="274" name="Google Shape;274;gdb5ccdfa64_0_0:notes"/>
+          <p:cNvPr id="273" name="Google Shape;273;gdb5ccdfa64_0_0:notes"/>
           <p:cNvSpPr/>
           <p:nvPr>
             <p:ph idx="2" type="sldImg"/>
@@ -3568,7 +3570,7 @@
       </p:sp>
       <p:sp>
         <p:nvSpPr>
-          <p:cNvPr id="275" name="Google Shape;275;gdb5ccdfa64_0_0:notes"/>
+          <p:cNvPr id="274" name="Google Shape;274;gdb5ccdfa64_0_0:notes"/>
           <p:cNvSpPr txBox="1"/>
           <p:nvPr>
             <p:ph idx="1" type="body"/>
@@ -3618,7 +3620,7 @@
   <p:cSld>
     <p:spTree>
       <p:nvGrpSpPr>
-        <p:cNvPr id="280" name="Shape 280"/>
+        <p:cNvPr id="279" name="Shape 279"/>
         <p:cNvGrpSpPr/>
         <p:nvPr/>
       </p:nvGrpSpPr>
@@ -3632,7 +3634,7 @@
       </p:grpSpPr>
       <p:sp>
         <p:nvSpPr>
-          <p:cNvPr id="281" name="Google Shape;281;g257e89dbbb7_0_67:notes"/>
+          <p:cNvPr id="280" name="Google Shape;280;g257e89dbbb7_0_67:notes"/>
           <p:cNvSpPr/>
           <p:nvPr>
             <p:ph idx="2" type="sldImg"/>
@@ -3667,7 +3669,7 @@
       </p:sp>
       <p:sp>
         <p:nvSpPr>
-          <p:cNvPr id="282" name="Google Shape;282;g257e89dbbb7_0_67:notes"/>
+          <p:cNvPr id="281" name="Google Shape;281;g257e89dbbb7_0_67:notes"/>
           <p:cNvSpPr txBox="1"/>
           <p:nvPr>
             <p:ph idx="1" type="body"/>
@@ -3717,7 +3719,7 @@
   <p:cSld>
     <p:spTree>
       <p:nvGrpSpPr>
-        <p:cNvPr id="287" name="Shape 287"/>
+        <p:cNvPr id="286" name="Shape 286"/>
         <p:cNvGrpSpPr/>
         <p:nvPr/>
       </p:nvGrpSpPr>
@@ -3731,7 +3733,7 @@
       </p:grpSpPr>
       <p:sp>
         <p:nvSpPr>
-          <p:cNvPr id="288" name="Google Shape;288;g136ab2b6419_0_12:notes"/>
+          <p:cNvPr id="287" name="Google Shape;287;g136ab2b6419_0_12:notes"/>
           <p:cNvSpPr/>
           <p:nvPr>
             <p:ph idx="2" type="sldImg"/>
@@ -3766,7 +3768,7 @@
       </p:sp>
       <p:sp>
         <p:nvSpPr>
-          <p:cNvPr id="289" name="Google Shape;289;g136ab2b6419_0_12:notes"/>
+          <p:cNvPr id="288" name="Google Shape;288;g136ab2b6419_0_12:notes"/>
           <p:cNvSpPr txBox="1"/>
           <p:nvPr>
             <p:ph idx="1" type="body"/>
@@ -3816,7 +3818,7 @@
   <p:cSld>
     <p:spTree>
       <p:nvGrpSpPr>
-        <p:cNvPr id="294" name="Shape 294"/>
+        <p:cNvPr id="293" name="Shape 293"/>
         <p:cNvGrpSpPr/>
         <p:nvPr/>
       </p:nvGrpSpPr>
@@ -3830,7 +3832,7 @@
       </p:grpSpPr>
       <p:sp>
         <p:nvSpPr>
-          <p:cNvPr id="295" name="Google Shape;295;g1251da7d4ce_0_0:notes"/>
+          <p:cNvPr id="294" name="Google Shape;294;g1251da7d4ce_0_0:notes"/>
           <p:cNvSpPr/>
           <p:nvPr>
             <p:ph idx="2" type="sldImg"/>
@@ -3865,7 +3867,7 @@
       </p:sp>
       <p:sp>
         <p:nvSpPr>
-          <p:cNvPr id="296" name="Google Shape;296;g1251da7d4ce_0_0:notes"/>
+          <p:cNvPr id="295" name="Google Shape;295;g1251da7d4ce_0_0:notes"/>
           <p:cNvSpPr txBox="1"/>
           <p:nvPr>
             <p:ph idx="1" type="body"/>
@@ -3915,7 +3917,7 @@
   <p:cSld>
     <p:spTree>
       <p:nvGrpSpPr>
-        <p:cNvPr id="301" name="Shape 301"/>
+        <p:cNvPr id="300" name="Shape 300"/>
         <p:cNvGrpSpPr/>
         <p:nvPr/>
       </p:nvGrpSpPr>
@@ -3929,7 +3931,7 @@
       </p:grpSpPr>
       <p:sp>
         <p:nvSpPr>
-          <p:cNvPr id="302" name="Google Shape;302;g257e89dbbb7_0_36:notes"/>
+          <p:cNvPr id="301" name="Google Shape;301;g257e89dbbb7_0_36:notes"/>
           <p:cNvSpPr/>
           <p:nvPr>
             <p:ph idx="2" type="sldImg"/>
@@ -3964,7 +3966,7 @@
       </p:sp>
       <p:sp>
         <p:nvSpPr>
-          <p:cNvPr id="303" name="Google Shape;303;g257e89dbbb7_0_36:notes"/>
+          <p:cNvPr id="302" name="Google Shape;302;g257e89dbbb7_0_36:notes"/>
           <p:cNvSpPr txBox="1"/>
           <p:nvPr>
             <p:ph idx="1" type="body"/>
@@ -4014,7 +4016,7 @@
   <p:cSld>
     <p:spTree>
       <p:nvGrpSpPr>
-        <p:cNvPr id="51" name="Shape 51"/>
+        <p:cNvPr id="50" name="Shape 50"/>
         <p:cNvGrpSpPr/>
         <p:nvPr/>
       </p:nvGrpSpPr>
@@ -4028,7 +4030,7 @@
       </p:grpSpPr>
       <p:sp>
         <p:nvSpPr>
-          <p:cNvPr id="52" name="Google Shape;52;g121ddc51813_0_5:notes"/>
+          <p:cNvPr id="51" name="Google Shape;51;g121ddc51813_0_5:notes"/>
           <p:cNvSpPr/>
           <p:nvPr>
             <p:ph idx="2" type="sldImg"/>
@@ -4063,7 +4065,7 @@
       </p:sp>
       <p:sp>
         <p:nvSpPr>
-          <p:cNvPr id="53" name="Google Shape;53;g121ddc51813_0_5:notes"/>
+          <p:cNvPr id="52" name="Google Shape;52;g121ddc51813_0_5:notes"/>
           <p:cNvSpPr txBox="1"/>
           <p:nvPr>
             <p:ph idx="1" type="body"/>
@@ -4113,7 +4115,7 @@
   <p:cSld>
     <p:spTree>
       <p:nvGrpSpPr>
-        <p:cNvPr id="306" name="Shape 306"/>
+        <p:cNvPr id="305" name="Shape 305"/>
         <p:cNvGrpSpPr/>
         <p:nvPr/>
       </p:nvGrpSpPr>
@@ -4127,7 +4129,7 @@
       </p:grpSpPr>
       <p:sp>
         <p:nvSpPr>
-          <p:cNvPr id="307" name="Google Shape;307;g13d2397785c_0_14:notes"/>
+          <p:cNvPr id="306" name="Google Shape;306;g13d2397785c_0_14:notes"/>
           <p:cNvSpPr/>
           <p:nvPr>
             <p:ph idx="2" type="sldImg"/>
@@ -4162,7 +4164,7 @@
       </p:sp>
       <p:sp>
         <p:nvSpPr>
-          <p:cNvPr id="308" name="Google Shape;308;g13d2397785c_0_14:notes"/>
+          <p:cNvPr id="307" name="Google Shape;307;g13d2397785c_0_14:notes"/>
           <p:cNvSpPr txBox="1"/>
           <p:nvPr>
             <p:ph idx="1" type="body"/>
@@ -4212,7 +4214,7 @@
   <p:cSld>
     <p:spTree>
       <p:nvGrpSpPr>
-        <p:cNvPr id="313" name="Shape 313"/>
+        <p:cNvPr id="312" name="Shape 312"/>
         <p:cNvGrpSpPr/>
         <p:nvPr/>
       </p:nvGrpSpPr>
@@ -4226,7 +4228,7 @@
       </p:grpSpPr>
       <p:sp>
         <p:nvSpPr>
-          <p:cNvPr id="314" name="Google Shape;314;g257e89dbbb7_0_73:notes"/>
+          <p:cNvPr id="313" name="Google Shape;313;g257e89dbbb7_0_73:notes"/>
           <p:cNvSpPr/>
           <p:nvPr>
             <p:ph idx="2" type="sldImg"/>
@@ -4261,7 +4263,7 @@
       </p:sp>
       <p:sp>
         <p:nvSpPr>
-          <p:cNvPr id="315" name="Google Shape;315;g257e89dbbb7_0_73:notes"/>
+          <p:cNvPr id="314" name="Google Shape;314;g257e89dbbb7_0_73:notes"/>
           <p:cNvSpPr txBox="1"/>
           <p:nvPr>
             <p:ph idx="1" type="body"/>
@@ -4311,7 +4313,7 @@
   <p:cSld>
     <p:spTree>
       <p:nvGrpSpPr>
-        <p:cNvPr id="320" name="Shape 320"/>
+        <p:cNvPr id="319" name="Shape 319"/>
         <p:cNvGrpSpPr/>
         <p:nvPr/>
       </p:nvGrpSpPr>
@@ -4325,7 +4327,7 @@
       </p:grpSpPr>
       <p:sp>
         <p:nvSpPr>
-          <p:cNvPr id="321" name="Google Shape;321;g257e89dbbb7_0_79:notes"/>
+          <p:cNvPr id="320" name="Google Shape;320;g257e89dbbb7_0_79:notes"/>
           <p:cNvSpPr/>
           <p:nvPr>
             <p:ph idx="2" type="sldImg"/>
@@ -4360,7 +4362,7 @@
       </p:sp>
       <p:sp>
         <p:nvSpPr>
-          <p:cNvPr id="322" name="Google Shape;322;g257e89dbbb7_0_79:notes"/>
+          <p:cNvPr id="321" name="Google Shape;321;g257e89dbbb7_0_79:notes"/>
           <p:cNvSpPr txBox="1"/>
           <p:nvPr>
             <p:ph idx="1" type="body"/>
@@ -4410,7 +4412,7 @@
   <p:cSld>
     <p:spTree>
       <p:nvGrpSpPr>
-        <p:cNvPr id="327" name="Shape 327"/>
+        <p:cNvPr id="326" name="Shape 326"/>
         <p:cNvGrpSpPr/>
         <p:nvPr/>
       </p:nvGrpSpPr>
@@ -4424,7 +4426,7 @@
       </p:grpSpPr>
       <p:sp>
         <p:nvSpPr>
-          <p:cNvPr id="328" name="Google Shape;328;g257e89dbbb7_0_85:notes"/>
+          <p:cNvPr id="327" name="Google Shape;327;g257e89dbbb7_0_85:notes"/>
           <p:cNvSpPr/>
           <p:nvPr>
             <p:ph idx="2" type="sldImg"/>
@@ -4459,7 +4461,7 @@
       </p:sp>
       <p:sp>
         <p:nvSpPr>
-          <p:cNvPr id="329" name="Google Shape;329;g257e89dbbb7_0_85:notes"/>
+          <p:cNvPr id="328" name="Google Shape;328;g257e89dbbb7_0_85:notes"/>
           <p:cNvSpPr txBox="1"/>
           <p:nvPr>
             <p:ph idx="1" type="body"/>
@@ -4509,7 +4511,7 @@
   <p:cSld>
     <p:spTree>
       <p:nvGrpSpPr>
-        <p:cNvPr id="334" name="Shape 334"/>
+        <p:cNvPr id="333" name="Shape 333"/>
         <p:cNvGrpSpPr/>
         <p:nvPr/>
       </p:nvGrpSpPr>
@@ -4523,7 +4525,7 @@
       </p:grpSpPr>
       <p:sp>
         <p:nvSpPr>
-          <p:cNvPr id="335" name="Google Shape;335;g257e89dbbb7_0_91:notes"/>
+          <p:cNvPr id="334" name="Google Shape;334;g257e89dbbb7_0_91:notes"/>
           <p:cNvSpPr/>
           <p:nvPr>
             <p:ph idx="2" type="sldImg"/>
@@ -4558,7 +4560,7 @@
       </p:sp>
       <p:sp>
         <p:nvSpPr>
-          <p:cNvPr id="336" name="Google Shape;336;g257e89dbbb7_0_91:notes"/>
+          <p:cNvPr id="335" name="Google Shape;335;g257e89dbbb7_0_91:notes"/>
           <p:cNvSpPr txBox="1"/>
           <p:nvPr>
             <p:ph idx="1" type="body"/>
@@ -4608,7 +4610,7 @@
   <p:cSld>
     <p:spTree>
       <p:nvGrpSpPr>
-        <p:cNvPr id="341" name="Shape 341"/>
+        <p:cNvPr id="340" name="Shape 340"/>
         <p:cNvGrpSpPr/>
         <p:nvPr/>
       </p:nvGrpSpPr>
@@ -4622,7 +4624,7 @@
       </p:grpSpPr>
       <p:sp>
         <p:nvSpPr>
-          <p:cNvPr id="342" name="Google Shape;342;g136ab2b6419_0_26:notes"/>
+          <p:cNvPr id="341" name="Google Shape;341;g136ab2b6419_0_26:notes"/>
           <p:cNvSpPr/>
           <p:nvPr>
             <p:ph idx="2" type="sldImg"/>
@@ -4657,7 +4659,7 @@
       </p:sp>
       <p:sp>
         <p:nvSpPr>
-          <p:cNvPr id="343" name="Google Shape;343;g136ab2b6419_0_26:notes"/>
+          <p:cNvPr id="342" name="Google Shape;342;g136ab2b6419_0_26:notes"/>
           <p:cNvSpPr txBox="1"/>
           <p:nvPr>
             <p:ph idx="1" type="body"/>
@@ -4707,7 +4709,7 @@
   <p:cSld>
     <p:spTree>
       <p:nvGrpSpPr>
-        <p:cNvPr id="346" name="Shape 346"/>
+        <p:cNvPr id="345" name="Shape 345"/>
         <p:cNvGrpSpPr/>
         <p:nvPr/>
       </p:nvGrpSpPr>
@@ -4721,7 +4723,7 @@
       </p:grpSpPr>
       <p:sp>
         <p:nvSpPr>
-          <p:cNvPr id="347" name="Google Shape;347;g136ab2b6419_0_30:notes"/>
+          <p:cNvPr id="346" name="Google Shape;346;g136ab2b6419_0_30:notes"/>
           <p:cNvSpPr/>
           <p:nvPr>
             <p:ph idx="2" type="sldImg"/>
@@ -4756,7 +4758,7 @@
       </p:sp>
       <p:sp>
         <p:nvSpPr>
-          <p:cNvPr id="348" name="Google Shape;348;g136ab2b6419_0_30:notes"/>
+          <p:cNvPr id="347" name="Google Shape;347;g136ab2b6419_0_30:notes"/>
           <p:cNvSpPr txBox="1"/>
           <p:nvPr>
             <p:ph idx="1" type="body"/>
@@ -4806,7 +4808,7 @@
   <p:cSld>
     <p:spTree>
       <p:nvGrpSpPr>
-        <p:cNvPr id="353" name="Shape 353"/>
+        <p:cNvPr id="352" name="Shape 352"/>
         <p:cNvGrpSpPr/>
         <p:nvPr/>
       </p:nvGrpSpPr>
@@ -4820,7 +4822,7 @@
       </p:grpSpPr>
       <p:sp>
         <p:nvSpPr>
-          <p:cNvPr id="354" name="Google Shape;354;g257e89dbbb7_0_103:notes"/>
+          <p:cNvPr id="353" name="Google Shape;353;g257e89dbbb7_0_103:notes"/>
           <p:cNvSpPr/>
           <p:nvPr>
             <p:ph idx="2" type="sldImg"/>
@@ -4855,7 +4857,7 @@
       </p:sp>
       <p:sp>
         <p:nvSpPr>
-          <p:cNvPr id="355" name="Google Shape;355;g257e89dbbb7_0_103:notes"/>
+          <p:cNvPr id="354" name="Google Shape;354;g257e89dbbb7_0_103:notes"/>
           <p:cNvSpPr txBox="1"/>
           <p:nvPr>
             <p:ph idx="1" type="body"/>
@@ -4905,7 +4907,7 @@
   <p:cSld>
     <p:spTree>
       <p:nvGrpSpPr>
-        <p:cNvPr id="361" name="Shape 361"/>
+        <p:cNvPr id="360" name="Shape 360"/>
         <p:cNvGrpSpPr/>
         <p:nvPr/>
       </p:nvGrpSpPr>
@@ -4919,7 +4921,7 @@
       </p:grpSpPr>
       <p:sp>
         <p:nvSpPr>
-          <p:cNvPr id="362" name="Google Shape;362;g257e89dbbb7_0_97:notes"/>
+          <p:cNvPr id="361" name="Google Shape;361;g257e89dbbb7_0_97:notes"/>
           <p:cNvSpPr/>
           <p:nvPr>
             <p:ph idx="2" type="sldImg"/>
@@ -4954,7 +4956,7 @@
       </p:sp>
       <p:sp>
         <p:nvSpPr>
-          <p:cNvPr id="363" name="Google Shape;363;g257e89dbbb7_0_97:notes"/>
+          <p:cNvPr id="362" name="Google Shape;362;g257e89dbbb7_0_97:notes"/>
           <p:cNvSpPr txBox="1"/>
           <p:nvPr>
             <p:ph idx="1" type="body"/>
@@ -5004,7 +5006,7 @@
   <p:cSld>
     <p:spTree>
       <p:nvGrpSpPr>
-        <p:cNvPr id="368" name="Shape 368"/>
+        <p:cNvPr id="367" name="Shape 367"/>
         <p:cNvGrpSpPr/>
         <p:nvPr/>
       </p:nvGrpSpPr>
@@ -5018,7 +5020,7 @@
       </p:grpSpPr>
       <p:sp>
         <p:nvSpPr>
-          <p:cNvPr id="369" name="Google Shape;369;g136ac22f7bd_0_17:notes"/>
+          <p:cNvPr id="368" name="Google Shape;368;g136ac22f7bd_0_17:notes"/>
           <p:cNvSpPr/>
           <p:nvPr>
             <p:ph idx="2" type="sldImg"/>
@@ -5053,7 +5055,7 @@
       </p:sp>
       <p:sp>
         <p:nvSpPr>
-          <p:cNvPr id="370" name="Google Shape;370;g136ac22f7bd_0_17:notes"/>
+          <p:cNvPr id="369" name="Google Shape;369;g136ac22f7bd_0_17:notes"/>
           <p:cNvSpPr txBox="1"/>
           <p:nvPr>
             <p:ph idx="1" type="body"/>
@@ -5103,7 +5105,7 @@
   <p:cSld>
     <p:spTree>
       <p:nvGrpSpPr>
-        <p:cNvPr id="58" name="Shape 58"/>
+        <p:cNvPr id="57" name="Shape 57"/>
         <p:cNvGrpSpPr/>
         <p:nvPr/>
       </p:nvGrpSpPr>
@@ -5117,7 +5119,7 @@
       </p:grpSpPr>
       <p:sp>
         <p:nvSpPr>
-          <p:cNvPr id="59" name="Google Shape;59;g13d1cde2ff3_0_6:notes"/>
+          <p:cNvPr id="58" name="Google Shape;58;g13d1cde2ff3_0_6:notes"/>
           <p:cNvSpPr/>
           <p:nvPr>
             <p:ph idx="2" type="sldImg"/>
@@ -5152,7 +5154,7 @@
       </p:sp>
       <p:sp>
         <p:nvSpPr>
-          <p:cNvPr id="60" name="Google Shape;60;g13d1cde2ff3_0_6:notes"/>
+          <p:cNvPr id="59" name="Google Shape;59;g13d1cde2ff3_0_6:notes"/>
           <p:cNvSpPr txBox="1"/>
           <p:nvPr>
             <p:ph idx="1" type="body"/>
@@ -5202,7 +5204,7 @@
   <p:cSld>
     <p:spTree>
       <p:nvGrpSpPr>
-        <p:cNvPr id="375" name="Shape 375"/>
+        <p:cNvPr id="374" name="Shape 374"/>
         <p:cNvGrpSpPr/>
         <p:nvPr/>
       </p:nvGrpSpPr>
@@ -5216,7 +5218,7 @@
       </p:grpSpPr>
       <p:sp>
         <p:nvSpPr>
-          <p:cNvPr id="376" name="Google Shape;376;g136ac22f7bd_0_23:notes"/>
+          <p:cNvPr id="375" name="Google Shape;375;g136ac22f7bd_0_23:notes"/>
           <p:cNvSpPr/>
           <p:nvPr>
             <p:ph idx="2" type="sldImg"/>
@@ -5251,7 +5253,7 @@
       </p:sp>
       <p:sp>
         <p:nvSpPr>
-          <p:cNvPr id="377" name="Google Shape;377;g136ac22f7bd_0_23:notes"/>
+          <p:cNvPr id="376" name="Google Shape;376;g136ac22f7bd_0_23:notes"/>
           <p:cNvSpPr txBox="1"/>
           <p:nvPr>
             <p:ph idx="1" type="body"/>
@@ -5301,7 +5303,7 @@
   <p:cSld>
     <p:spTree>
       <p:nvGrpSpPr>
-        <p:cNvPr id="382" name="Shape 382"/>
+        <p:cNvPr id="381" name="Shape 381"/>
         <p:cNvGrpSpPr/>
         <p:nvPr/>
       </p:nvGrpSpPr>
@@ -5315,7 +5317,7 @@
       </p:grpSpPr>
       <p:sp>
         <p:nvSpPr>
-          <p:cNvPr id="383" name="Google Shape;383;g136ac22f7bd_0_29:notes"/>
+          <p:cNvPr id="382" name="Google Shape;382;g136ac22f7bd_0_29:notes"/>
           <p:cNvSpPr/>
           <p:nvPr>
             <p:ph idx="2" type="sldImg"/>
@@ -5350,7 +5352,7 @@
       </p:sp>
       <p:sp>
         <p:nvSpPr>
-          <p:cNvPr id="384" name="Google Shape;384;g136ac22f7bd_0_29:notes"/>
+          <p:cNvPr id="383" name="Google Shape;383;g136ac22f7bd_0_29:notes"/>
           <p:cNvSpPr txBox="1"/>
           <p:nvPr>
             <p:ph idx="1" type="body"/>
@@ -5400,7 +5402,7 @@
   <p:cSld>
     <p:spTree>
       <p:nvGrpSpPr>
-        <p:cNvPr id="389" name="Shape 389"/>
+        <p:cNvPr id="388" name="Shape 388"/>
         <p:cNvGrpSpPr/>
         <p:nvPr/>
       </p:nvGrpSpPr>
@@ -5414,7 +5416,7 @@
       </p:grpSpPr>
       <p:sp>
         <p:nvSpPr>
-          <p:cNvPr id="390" name="Google Shape;390;g136ac22f7bd_0_35:notes"/>
+          <p:cNvPr id="389" name="Google Shape;389;g370c68942cf_0_1:notes"/>
           <p:cNvSpPr/>
           <p:nvPr>
             <p:ph idx="2" type="sldImg"/>
@@ -5449,7 +5451,7 @@
       </p:sp>
       <p:sp>
         <p:nvSpPr>
-          <p:cNvPr id="391" name="Google Shape;391;g136ac22f7bd_0_35:notes"/>
+          <p:cNvPr id="390" name="Google Shape;390;g370c68942cf_0_1:notes"/>
           <p:cNvSpPr txBox="1"/>
           <p:nvPr>
             <p:ph idx="1" type="body"/>
@@ -5499,7 +5501,7 @@
   <p:cSld>
     <p:spTree>
       <p:nvGrpSpPr>
-        <p:cNvPr id="396" name="Shape 396"/>
+        <p:cNvPr id="395" name="Shape 395"/>
         <p:cNvGrpSpPr/>
         <p:nvPr/>
       </p:nvGrpSpPr>
@@ -5513,7 +5515,7 @@
       </p:grpSpPr>
       <p:sp>
         <p:nvSpPr>
-          <p:cNvPr id="397" name="Google Shape;397;g136ac22f7bd_0_41:notes"/>
+          <p:cNvPr id="396" name="Google Shape;396;g370c68942cf_0_8:notes"/>
           <p:cNvSpPr/>
           <p:nvPr>
             <p:ph idx="2" type="sldImg"/>
@@ -5548,7 +5550,7 @@
       </p:sp>
       <p:sp>
         <p:nvSpPr>
-          <p:cNvPr id="398" name="Google Shape;398;g136ac22f7bd_0_41:notes"/>
+          <p:cNvPr id="397" name="Google Shape;397;g370c68942cf_0_8:notes"/>
           <p:cNvSpPr txBox="1"/>
           <p:nvPr>
             <p:ph idx="1" type="body"/>
@@ -5598,7 +5600,7 @@
   <p:cSld>
     <p:spTree>
       <p:nvGrpSpPr>
-        <p:cNvPr id="403" name="Shape 403"/>
+        <p:cNvPr id="402" name="Shape 402"/>
         <p:cNvGrpSpPr/>
         <p:nvPr/>
       </p:nvGrpSpPr>
@@ -5612,7 +5614,7 @@
       </p:grpSpPr>
       <p:sp>
         <p:nvSpPr>
-          <p:cNvPr id="404" name="Google Shape;404;g121ddc51813_0_12:notes"/>
+          <p:cNvPr id="403" name="Google Shape;403;g136ac22f7bd_0_35:notes"/>
           <p:cNvSpPr/>
           <p:nvPr>
             <p:ph idx="2" type="sldImg"/>
@@ -5647,7 +5649,7 @@
       </p:sp>
       <p:sp>
         <p:nvSpPr>
-          <p:cNvPr id="405" name="Google Shape;405;g121ddc51813_0_12:notes"/>
+          <p:cNvPr id="404" name="Google Shape;404;g136ac22f7bd_0_35:notes"/>
           <p:cNvSpPr txBox="1"/>
           <p:nvPr>
             <p:ph idx="1" type="body"/>
@@ -5697,7 +5699,7 @@
   <p:cSld>
     <p:spTree>
       <p:nvGrpSpPr>
-        <p:cNvPr id="411" name="Shape 411"/>
+        <p:cNvPr id="409" name="Shape 409"/>
         <p:cNvGrpSpPr/>
         <p:nvPr/>
       </p:nvGrpSpPr>
@@ -5711,7 +5713,7 @@
       </p:grpSpPr>
       <p:sp>
         <p:nvSpPr>
-          <p:cNvPr id="412" name="Google Shape;412;g13d2397785c_0_20:notes"/>
+          <p:cNvPr id="410" name="Google Shape;410;g136ac22f7bd_0_41:notes"/>
           <p:cNvSpPr/>
           <p:nvPr>
             <p:ph idx="2" type="sldImg"/>
@@ -5746,7 +5748,7 @@
       </p:sp>
       <p:sp>
         <p:nvSpPr>
-          <p:cNvPr id="413" name="Google Shape;413;g13d2397785c_0_20:notes"/>
+          <p:cNvPr id="411" name="Google Shape;411;g136ac22f7bd_0_41:notes"/>
           <p:cNvSpPr txBox="1"/>
           <p:nvPr>
             <p:ph idx="1" type="body"/>
@@ -5796,7 +5798,7 @@
   <p:cSld>
     <p:spTree>
       <p:nvGrpSpPr>
-        <p:cNvPr id="418" name="Shape 418"/>
+        <p:cNvPr id="416" name="Shape 416"/>
         <p:cNvGrpSpPr/>
         <p:nvPr/>
       </p:nvGrpSpPr>
@@ -5810,7 +5812,7 @@
       </p:grpSpPr>
       <p:sp>
         <p:nvSpPr>
-          <p:cNvPr id="419" name="Google Shape;419;g239615a810d_0_38:notes"/>
+          <p:cNvPr id="417" name="Google Shape;417;g121ddc51813_0_12:notes"/>
           <p:cNvSpPr/>
           <p:nvPr>
             <p:ph idx="2" type="sldImg"/>
@@ -5845,7 +5847,7 @@
       </p:sp>
       <p:sp>
         <p:nvSpPr>
-          <p:cNvPr id="420" name="Google Shape;420;g239615a810d_0_38:notes"/>
+          <p:cNvPr id="418" name="Google Shape;418;g121ddc51813_0_12:notes"/>
           <p:cNvSpPr txBox="1"/>
           <p:nvPr>
             <p:ph idx="1" type="body"/>
@@ -5909,7 +5911,7 @@
       </p:grpSpPr>
       <p:sp>
         <p:nvSpPr>
-          <p:cNvPr id="425" name="Google Shape;425;g239615a810d_0_43:notes"/>
+          <p:cNvPr id="425" name="Google Shape;425;g13d2397785c_0_20:notes"/>
           <p:cNvSpPr/>
           <p:nvPr>
             <p:ph idx="2" type="sldImg"/>
@@ -5944,7 +5946,7 @@
       </p:sp>
       <p:sp>
         <p:nvSpPr>
-          <p:cNvPr id="426" name="Google Shape;426;g239615a810d_0_43:notes"/>
+          <p:cNvPr id="426" name="Google Shape;426;g13d2397785c_0_20:notes"/>
           <p:cNvSpPr txBox="1"/>
           <p:nvPr>
             <p:ph idx="1" type="body"/>
@@ -5989,12 +5991,12 @@
 </p:notes>
 </file>
 
-<file path=ppt/notesSlides/notesSlide6.xml><?xml version="1.0" encoding="utf-8"?>
+<file path=ppt/notesSlides/notesSlide58.xml><?xml version="1.0" encoding="utf-8"?>
 <p:notes xmlns:a="http://schemas.openxmlformats.org/drawingml/2006/main" xmlns:r="http://schemas.openxmlformats.org/officeDocument/2006/relationships" xmlns:mc="http://schemas.openxmlformats.org/markup-compatibility/2006" xmlns:mv="urn:schemas-microsoft-com:mac:vml" xmlns:p="http://schemas.openxmlformats.org/presentationml/2006/main" xmlns:c="http://schemas.openxmlformats.org/drawingml/2006/chart" xmlns:dgm="http://schemas.openxmlformats.org/drawingml/2006/diagram" xmlns:o="urn:schemas-microsoft-com:office:office" xmlns:v="urn:schemas-microsoft-com:vml" xmlns:pvml="urn:schemas-microsoft-com:office:powerpoint" xmlns:com="http://schemas.openxmlformats.org/drawingml/2006/compatibility" xmlns:p14="http://schemas.microsoft.com/office/powerpoint/2010/main" xmlns:p15="http://schemas.microsoft.com/office/powerpoint/2012/main" xmlns:ahyp="http://schemas.microsoft.com/office/drawing/2018/hyperlinkcolor" showMasterPhAnim="0" showMasterSp="0">
   <p:cSld>
     <p:spTree>
       <p:nvGrpSpPr>
-        <p:cNvPr id="65" name="Shape 65"/>
+        <p:cNvPr id="431" name="Shape 431"/>
         <p:cNvGrpSpPr/>
         <p:nvPr/>
       </p:nvGrpSpPr>
@@ -6008,7 +6010,7 @@
       </p:grpSpPr>
       <p:sp>
         <p:nvSpPr>
-          <p:cNvPr id="66" name="Google Shape;66;g13d1cde2ff3_0_14:notes"/>
+          <p:cNvPr id="432" name="Google Shape;432;g239615a810d_0_38:notes"/>
           <p:cNvSpPr/>
           <p:nvPr>
             <p:ph idx="2" type="sldImg"/>
@@ -6043,7 +6045,7 @@
       </p:sp>
       <p:sp>
         <p:nvSpPr>
-          <p:cNvPr id="67" name="Google Shape;67;g13d1cde2ff3_0_14:notes"/>
+          <p:cNvPr id="433" name="Google Shape;433;g239615a810d_0_38:notes"/>
           <p:cNvSpPr txBox="1"/>
           <p:nvPr>
             <p:ph idx="1" type="body"/>
@@ -6088,12 +6090,12 @@
 </p:notes>
 </file>
 
-<file path=ppt/notesSlides/notesSlide7.xml><?xml version="1.0" encoding="utf-8"?>
+<file path=ppt/notesSlides/notesSlide59.xml><?xml version="1.0" encoding="utf-8"?>
 <p:notes xmlns:a="http://schemas.openxmlformats.org/drawingml/2006/main" xmlns:r="http://schemas.openxmlformats.org/officeDocument/2006/relationships" xmlns:mc="http://schemas.openxmlformats.org/markup-compatibility/2006" xmlns:mv="urn:schemas-microsoft-com:mac:vml" xmlns:p="http://schemas.openxmlformats.org/presentationml/2006/main" xmlns:c="http://schemas.openxmlformats.org/drawingml/2006/chart" xmlns:dgm="http://schemas.openxmlformats.org/drawingml/2006/diagram" xmlns:o="urn:schemas-microsoft-com:office:office" xmlns:v="urn:schemas-microsoft-com:vml" xmlns:pvml="urn:schemas-microsoft-com:office:powerpoint" xmlns:com="http://schemas.openxmlformats.org/drawingml/2006/compatibility" xmlns:p14="http://schemas.microsoft.com/office/powerpoint/2010/main" xmlns:p15="http://schemas.microsoft.com/office/powerpoint/2012/main" xmlns:ahyp="http://schemas.microsoft.com/office/drawing/2018/hyperlinkcolor" showMasterPhAnim="0" showMasterSp="0">
   <p:cSld>
     <p:spTree>
       <p:nvGrpSpPr>
-        <p:cNvPr id="70" name="Shape 70"/>
+        <p:cNvPr id="437" name="Shape 437"/>
         <p:cNvGrpSpPr/>
         <p:nvPr/>
       </p:nvGrpSpPr>
@@ -6107,7 +6109,7 @@
       </p:grpSpPr>
       <p:sp>
         <p:nvSpPr>
-          <p:cNvPr id="71" name="Google Shape;71;g121ddc51813_0_0:notes"/>
+          <p:cNvPr id="438" name="Google Shape;438;g239615a810d_0_43:notes"/>
           <p:cNvSpPr/>
           <p:nvPr>
             <p:ph idx="2" type="sldImg"/>
@@ -6142,7 +6144,7 @@
       </p:sp>
       <p:sp>
         <p:nvSpPr>
-          <p:cNvPr id="72" name="Google Shape;72;g121ddc51813_0_0:notes"/>
+          <p:cNvPr id="439" name="Google Shape;439;g239615a810d_0_43:notes"/>
           <p:cNvSpPr txBox="1"/>
           <p:nvPr>
             <p:ph idx="1" type="body"/>
@@ -6187,12 +6189,12 @@
 </p:notes>
 </file>
 
-<file path=ppt/notesSlides/notesSlide8.xml><?xml version="1.0" encoding="utf-8"?>
+<file path=ppt/notesSlides/notesSlide6.xml><?xml version="1.0" encoding="utf-8"?>
 <p:notes xmlns:a="http://schemas.openxmlformats.org/drawingml/2006/main" xmlns:r="http://schemas.openxmlformats.org/officeDocument/2006/relationships" xmlns:mc="http://schemas.openxmlformats.org/markup-compatibility/2006" xmlns:mv="urn:schemas-microsoft-com:mac:vml" xmlns:p="http://schemas.openxmlformats.org/presentationml/2006/main" xmlns:c="http://schemas.openxmlformats.org/drawingml/2006/chart" xmlns:dgm="http://schemas.openxmlformats.org/drawingml/2006/diagram" xmlns:o="urn:schemas-microsoft-com:office:office" xmlns:v="urn:schemas-microsoft-com:vml" xmlns:pvml="urn:schemas-microsoft-com:office:powerpoint" xmlns:com="http://schemas.openxmlformats.org/drawingml/2006/compatibility" xmlns:p14="http://schemas.microsoft.com/office/powerpoint/2010/main" xmlns:p15="http://schemas.microsoft.com/office/powerpoint/2012/main" xmlns:ahyp="http://schemas.microsoft.com/office/drawing/2018/hyperlinkcolor" showMasterPhAnim="0" showMasterSp="0">
   <p:cSld>
     <p:spTree>
       <p:nvGrpSpPr>
-        <p:cNvPr id="77" name="Shape 77"/>
+        <p:cNvPr id="64" name="Shape 64"/>
         <p:cNvGrpSpPr/>
         <p:nvPr/>
       </p:nvGrpSpPr>
@@ -6206,7 +6208,7 @@
       </p:grpSpPr>
       <p:sp>
         <p:nvSpPr>
-          <p:cNvPr id="78" name="Google Shape;78;g13d1cde2ff3_0_22:notes"/>
+          <p:cNvPr id="65" name="Google Shape;65;g13d1cde2ff3_0_14:notes"/>
           <p:cNvSpPr/>
           <p:nvPr>
             <p:ph idx="2" type="sldImg"/>
@@ -6241,7 +6243,7 @@
       </p:sp>
       <p:sp>
         <p:nvSpPr>
-          <p:cNvPr id="79" name="Google Shape;79;g13d1cde2ff3_0_22:notes"/>
+          <p:cNvPr id="66" name="Google Shape;66;g13d1cde2ff3_0_14:notes"/>
           <p:cNvSpPr txBox="1"/>
           <p:nvPr>
             <p:ph idx="1" type="body"/>
@@ -6286,12 +6288,12 @@
 </p:notes>
 </file>
 
-<file path=ppt/notesSlides/notesSlide9.xml><?xml version="1.0" encoding="utf-8"?>
+<file path=ppt/notesSlides/notesSlide7.xml><?xml version="1.0" encoding="utf-8"?>
 <p:notes xmlns:a="http://schemas.openxmlformats.org/drawingml/2006/main" xmlns:r="http://schemas.openxmlformats.org/officeDocument/2006/relationships" xmlns:mc="http://schemas.openxmlformats.org/markup-compatibility/2006" xmlns:mv="urn:schemas-microsoft-com:mac:vml" xmlns:p="http://schemas.openxmlformats.org/presentationml/2006/main" xmlns:c="http://schemas.openxmlformats.org/drawingml/2006/chart" xmlns:dgm="http://schemas.openxmlformats.org/drawingml/2006/diagram" xmlns:o="urn:schemas-microsoft-com:office:office" xmlns:v="urn:schemas-microsoft-com:vml" xmlns:pvml="urn:schemas-microsoft-com:office:powerpoint" xmlns:com="http://schemas.openxmlformats.org/drawingml/2006/compatibility" xmlns:p14="http://schemas.microsoft.com/office/powerpoint/2010/main" xmlns:p15="http://schemas.microsoft.com/office/powerpoint/2012/main" xmlns:ahyp="http://schemas.microsoft.com/office/drawing/2018/hyperlinkcolor" showMasterPhAnim="0" showMasterSp="0">
   <p:cSld>
     <p:spTree>
       <p:nvGrpSpPr>
-        <p:cNvPr id="84" name="Shape 84"/>
+        <p:cNvPr id="69" name="Shape 69"/>
         <p:cNvGrpSpPr/>
         <p:nvPr/>
       </p:nvGrpSpPr>
@@ -6305,7 +6307,7 @@
       </p:grpSpPr>
       <p:sp>
         <p:nvSpPr>
-          <p:cNvPr id="85" name="Google Shape;85;g136ac22f7bd_0_53:notes"/>
+          <p:cNvPr id="70" name="Google Shape;70;g121ddc51813_0_0:notes"/>
           <p:cNvSpPr/>
           <p:nvPr>
             <p:ph idx="2" type="sldImg"/>
@@ -6340,7 +6342,205 @@
       </p:sp>
       <p:sp>
         <p:nvSpPr>
-          <p:cNvPr id="86" name="Google Shape;86;g136ac22f7bd_0_53:notes"/>
+          <p:cNvPr id="71" name="Google Shape;71;g121ddc51813_0_0:notes"/>
+          <p:cNvSpPr txBox="1"/>
+          <p:nvPr>
+            <p:ph idx="1" type="body"/>
+          </p:nvPr>
+        </p:nvSpPr>
+        <p:spPr>
+          <a:xfrm>
+            <a:off x="685800" y="4343400"/>
+            <a:ext cx="5486400" cy="4114800"/>
+          </a:xfrm>
+          <a:prstGeom prst="rect">
+            <a:avLst/>
+          </a:prstGeom>
+        </p:spPr>
+        <p:txBody>
+          <a:bodyPr anchorCtr="0" anchor="t" bIns="91425" lIns="91425" spcFirstLastPara="1" rIns="91425" wrap="square" tIns="91425">
+            <a:noAutofit/>
+          </a:bodyPr>
+          <a:lstStyle/>
+          <a:p>
+            <a:pPr indent="0" lvl="0" marL="0" rtl="0" algn="l">
+              <a:spcBef>
+                <a:spcPts val="0"/>
+              </a:spcBef>
+              <a:spcAft>
+                <a:spcPts val="0"/>
+              </a:spcAft>
+              <a:buNone/>
+            </a:pPr>
+            <a:r>
+              <a:t/>
+            </a:r>
+            <a:endParaRPr/>
+          </a:p>
+        </p:txBody>
+      </p:sp>
+    </p:spTree>
+  </p:cSld>
+  <p:clrMapOvr>
+    <a:masterClrMapping/>
+  </p:clrMapOvr>
+</p:notes>
+</file>
+
+<file path=ppt/notesSlides/notesSlide8.xml><?xml version="1.0" encoding="utf-8"?>
+<p:notes xmlns:a="http://schemas.openxmlformats.org/drawingml/2006/main" xmlns:r="http://schemas.openxmlformats.org/officeDocument/2006/relationships" xmlns:mc="http://schemas.openxmlformats.org/markup-compatibility/2006" xmlns:mv="urn:schemas-microsoft-com:mac:vml" xmlns:p="http://schemas.openxmlformats.org/presentationml/2006/main" xmlns:c="http://schemas.openxmlformats.org/drawingml/2006/chart" xmlns:dgm="http://schemas.openxmlformats.org/drawingml/2006/diagram" xmlns:o="urn:schemas-microsoft-com:office:office" xmlns:v="urn:schemas-microsoft-com:vml" xmlns:pvml="urn:schemas-microsoft-com:office:powerpoint" xmlns:com="http://schemas.openxmlformats.org/drawingml/2006/compatibility" xmlns:p14="http://schemas.microsoft.com/office/powerpoint/2010/main" xmlns:p15="http://schemas.microsoft.com/office/powerpoint/2012/main" xmlns:ahyp="http://schemas.microsoft.com/office/drawing/2018/hyperlinkcolor" showMasterPhAnim="0" showMasterSp="0">
+  <p:cSld>
+    <p:spTree>
+      <p:nvGrpSpPr>
+        <p:cNvPr id="76" name="Shape 76"/>
+        <p:cNvGrpSpPr/>
+        <p:nvPr/>
+      </p:nvGrpSpPr>
+      <p:grpSpPr>
+        <a:xfrm>
+          <a:off x="0" y="0"/>
+          <a:ext cx="0" cy="0"/>
+          <a:chOff x="0" y="0"/>
+          <a:chExt cx="0" cy="0"/>
+        </a:xfrm>
+      </p:grpSpPr>
+      <p:sp>
+        <p:nvSpPr>
+          <p:cNvPr id="77" name="Google Shape;77;g13d1cde2ff3_0_22:notes"/>
+          <p:cNvSpPr/>
+          <p:nvPr>
+            <p:ph idx="2" type="sldImg"/>
+          </p:nvPr>
+        </p:nvSpPr>
+        <p:spPr>
+          <a:xfrm>
+            <a:off x="381300" y="685800"/>
+            <a:ext cx="6096000" cy="3429000"/>
+          </a:xfrm>
+          <a:custGeom>
+            <a:rect b="b" l="l" r="r" t="t"/>
+            <a:pathLst>
+              <a:path extrusionOk="0" h="120000" w="120000">
+                <a:moveTo>
+                  <a:pt x="0" y="0"/>
+                </a:moveTo>
+                <a:lnTo>
+                  <a:pt x="120000" y="0"/>
+                </a:lnTo>
+                <a:lnTo>
+                  <a:pt x="120000" y="120000"/>
+                </a:lnTo>
+                <a:lnTo>
+                  <a:pt x="0" y="120000"/>
+                </a:lnTo>
+                <a:close/>
+              </a:path>
+            </a:pathLst>
+          </a:custGeom>
+        </p:spPr>
+      </p:sp>
+      <p:sp>
+        <p:nvSpPr>
+          <p:cNvPr id="78" name="Google Shape;78;g13d1cde2ff3_0_22:notes"/>
+          <p:cNvSpPr txBox="1"/>
+          <p:nvPr>
+            <p:ph idx="1" type="body"/>
+          </p:nvPr>
+        </p:nvSpPr>
+        <p:spPr>
+          <a:xfrm>
+            <a:off x="685800" y="4343400"/>
+            <a:ext cx="5486400" cy="4114800"/>
+          </a:xfrm>
+          <a:prstGeom prst="rect">
+            <a:avLst/>
+          </a:prstGeom>
+        </p:spPr>
+        <p:txBody>
+          <a:bodyPr anchorCtr="0" anchor="t" bIns="91425" lIns="91425" spcFirstLastPara="1" rIns="91425" wrap="square" tIns="91425">
+            <a:noAutofit/>
+          </a:bodyPr>
+          <a:lstStyle/>
+          <a:p>
+            <a:pPr indent="0" lvl="0" marL="0" rtl="0" algn="l">
+              <a:spcBef>
+                <a:spcPts val="0"/>
+              </a:spcBef>
+              <a:spcAft>
+                <a:spcPts val="0"/>
+              </a:spcAft>
+              <a:buNone/>
+            </a:pPr>
+            <a:r>
+              <a:t/>
+            </a:r>
+            <a:endParaRPr/>
+          </a:p>
+        </p:txBody>
+      </p:sp>
+    </p:spTree>
+  </p:cSld>
+  <p:clrMapOvr>
+    <a:masterClrMapping/>
+  </p:clrMapOvr>
+</p:notes>
+</file>
+
+<file path=ppt/notesSlides/notesSlide9.xml><?xml version="1.0" encoding="utf-8"?>
+<p:notes xmlns:a="http://schemas.openxmlformats.org/drawingml/2006/main" xmlns:r="http://schemas.openxmlformats.org/officeDocument/2006/relationships" xmlns:mc="http://schemas.openxmlformats.org/markup-compatibility/2006" xmlns:mv="urn:schemas-microsoft-com:mac:vml" xmlns:p="http://schemas.openxmlformats.org/presentationml/2006/main" xmlns:c="http://schemas.openxmlformats.org/drawingml/2006/chart" xmlns:dgm="http://schemas.openxmlformats.org/drawingml/2006/diagram" xmlns:o="urn:schemas-microsoft-com:office:office" xmlns:v="urn:schemas-microsoft-com:vml" xmlns:pvml="urn:schemas-microsoft-com:office:powerpoint" xmlns:com="http://schemas.openxmlformats.org/drawingml/2006/compatibility" xmlns:p14="http://schemas.microsoft.com/office/powerpoint/2010/main" xmlns:p15="http://schemas.microsoft.com/office/powerpoint/2012/main" xmlns:ahyp="http://schemas.microsoft.com/office/drawing/2018/hyperlinkcolor" showMasterPhAnim="0" showMasterSp="0">
+  <p:cSld>
+    <p:spTree>
+      <p:nvGrpSpPr>
+        <p:cNvPr id="83" name="Shape 83"/>
+        <p:cNvGrpSpPr/>
+        <p:nvPr/>
+      </p:nvGrpSpPr>
+      <p:grpSpPr>
+        <a:xfrm>
+          <a:off x="0" y="0"/>
+          <a:ext cx="0" cy="0"/>
+          <a:chOff x="0" y="0"/>
+          <a:chExt cx="0" cy="0"/>
+        </a:xfrm>
+      </p:grpSpPr>
+      <p:sp>
+        <p:nvSpPr>
+          <p:cNvPr id="84" name="Google Shape;84;g136ac22f7bd_0_53:notes"/>
+          <p:cNvSpPr/>
+          <p:nvPr>
+            <p:ph idx="2" type="sldImg"/>
+          </p:nvPr>
+        </p:nvSpPr>
+        <p:spPr>
+          <a:xfrm>
+            <a:off x="381300" y="685800"/>
+            <a:ext cx="6096000" cy="3429000"/>
+          </a:xfrm>
+          <a:custGeom>
+            <a:rect b="b" l="l" r="r" t="t"/>
+            <a:pathLst>
+              <a:path extrusionOk="0" h="120000" w="120000">
+                <a:moveTo>
+                  <a:pt x="0" y="0"/>
+                </a:moveTo>
+                <a:lnTo>
+                  <a:pt x="120000" y="0"/>
+                </a:lnTo>
+                <a:lnTo>
+                  <a:pt x="120000" y="120000"/>
+                </a:lnTo>
+                <a:lnTo>
+                  <a:pt x="0" y="120000"/>
+                </a:lnTo>
+                <a:close/>
+              </a:path>
+            </a:pathLst>
+          </a:custGeom>
+        </p:spPr>
+      </p:sp>
+      <p:sp>
+        <p:nvSpPr>
+          <p:cNvPr id="85" name="Google Shape;85;g136ac22f7bd_0_53:notes"/>
           <p:cNvSpPr txBox="1"/>
           <p:nvPr>
             <p:ph idx="1" type="body"/>
@@ -6923,144 +7123,6 @@
           </a:p>
         </p:txBody>
       </p:sp>
-      <p:sp>
-        <p:nvSpPr>
-          <p:cNvPr id="16" name="Google Shape;16;p3"/>
-          <p:cNvSpPr txBox="1"/>
-          <p:nvPr>
-            <p:ph idx="12" type="sldNum"/>
-          </p:nvPr>
-        </p:nvSpPr>
-        <p:spPr>
-          <a:xfrm>
-            <a:off x="7315209" y="4229101"/>
-            <a:ext cx="1828800" cy="914400"/>
-          </a:xfrm>
-          <a:prstGeom prst="rect">
-            <a:avLst/>
-          </a:prstGeom>
-        </p:spPr>
-        <p:txBody>
-          <a:bodyPr anchorCtr="0" anchor="b" bIns="91425" lIns="91425" spcFirstLastPara="1" rIns="91425" wrap="square" tIns="91425">
-            <a:noAutofit/>
-          </a:bodyPr>
-          <a:lstStyle>
-            <a:lvl1pPr lvl="0" rtl="0" algn="r">
-              <a:buNone/>
-              <a:defRPr b="1" sz="2400">
-                <a:solidFill>
-                  <a:schemeClr val="dk1"/>
-                </a:solidFill>
-              </a:defRPr>
-            </a:lvl1pPr>
-            <a:lvl2pPr lvl="1" rtl="0" algn="r">
-              <a:buNone/>
-              <a:defRPr b="1" sz="2400">
-                <a:solidFill>
-                  <a:schemeClr val="dk1"/>
-                </a:solidFill>
-              </a:defRPr>
-            </a:lvl2pPr>
-            <a:lvl3pPr lvl="2" rtl="0" algn="r">
-              <a:buNone/>
-              <a:defRPr b="1" sz="2400">
-                <a:solidFill>
-                  <a:schemeClr val="dk1"/>
-                </a:solidFill>
-              </a:defRPr>
-            </a:lvl3pPr>
-            <a:lvl4pPr lvl="3" rtl="0" algn="r">
-              <a:buNone/>
-              <a:defRPr b="1" sz="2400">
-                <a:solidFill>
-                  <a:schemeClr val="dk1"/>
-                </a:solidFill>
-              </a:defRPr>
-            </a:lvl4pPr>
-            <a:lvl5pPr lvl="4" rtl="0" algn="r">
-              <a:buNone/>
-              <a:defRPr b="1" sz="2400">
-                <a:solidFill>
-                  <a:schemeClr val="dk1"/>
-                </a:solidFill>
-              </a:defRPr>
-            </a:lvl5pPr>
-            <a:lvl6pPr lvl="5" rtl="0" algn="r">
-              <a:buNone/>
-              <a:defRPr b="1" sz="2400">
-                <a:solidFill>
-                  <a:schemeClr val="dk1"/>
-                </a:solidFill>
-              </a:defRPr>
-            </a:lvl6pPr>
-            <a:lvl7pPr lvl="6" rtl="0" algn="r">
-              <a:buNone/>
-              <a:defRPr b="1" sz="2400">
-                <a:solidFill>
-                  <a:schemeClr val="dk1"/>
-                </a:solidFill>
-              </a:defRPr>
-            </a:lvl7pPr>
-            <a:lvl8pPr lvl="7" rtl="0" algn="r">
-              <a:buNone/>
-              <a:defRPr b="1" sz="2400">
-                <a:solidFill>
-                  <a:schemeClr val="dk1"/>
-                </a:solidFill>
-              </a:defRPr>
-            </a:lvl8pPr>
-            <a:lvl9pPr lvl="8" rtl="0" algn="r">
-              <a:buNone/>
-              <a:defRPr b="1" sz="2400">
-                <a:solidFill>
-                  <a:schemeClr val="dk1"/>
-                </a:solidFill>
-              </a:defRPr>
-            </a:lvl9pPr>
-          </a:lstStyle>
-          <a:p>
-            <a:pPr indent="0" lvl="0" marL="0" rtl="0" algn="r">
-              <a:spcBef>
-                <a:spcPts val="0"/>
-              </a:spcBef>
-              <a:spcAft>
-                <a:spcPts val="0"/>
-              </a:spcAft>
-              <a:buNone/>
-            </a:pPr>
-            <a:fld id="{00000000-1234-1234-1234-123412341234}" type="slidenum">
-              <a:rPr lang="en"/>
-              <a:t>‹#›</a:t>
-            </a:fld>
-            <a:endParaRPr/>
-          </a:p>
-          <a:p>
-            <a:pPr indent="0" lvl="0" marL="0" rtl="0" algn="r">
-              <a:spcBef>
-                <a:spcPts val="0"/>
-              </a:spcBef>
-              <a:spcAft>
-                <a:spcPts val="0"/>
-              </a:spcAft>
-              <a:buNone/>
-            </a:pPr>
-            <a:r>
-              <a:rPr b="0" lang="en" sz="1000" u="sng">
-                <a:solidFill>
-                  <a:schemeClr val="hlink"/>
-                </a:solidFill>
-                <a:hlinkClick r:id="rId2"/>
-              </a:rPr>
-              <a:t>uni1.de/nyt</a:t>
-            </a:r>
-            <a:r>
-              <a:rPr b="0" lang="en" sz="1000"/>
-              <a:t> </a:t>
-            </a:r>
-            <a:endParaRPr b="0" sz="1000"/>
-          </a:p>
-        </p:txBody>
-      </p:sp>
     </p:spTree>
   </p:cSld>
   <p:clrMapOvr>
@@ -7074,7 +7136,7 @@
   <p:cSld name="TITLE_AND_BODY">
     <p:spTree>
       <p:nvGrpSpPr>
-        <p:cNvPr id="17" name="Shape 17"/>
+        <p:cNvPr id="16" name="Shape 16"/>
         <p:cNvGrpSpPr/>
         <p:nvPr/>
       </p:nvGrpSpPr>
@@ -7088,7 +7150,7 @@
       </p:grpSpPr>
       <p:sp>
         <p:nvSpPr>
-          <p:cNvPr id="18" name="Google Shape;18;p4"/>
+          <p:cNvPr id="17" name="Google Shape;17;p4"/>
           <p:cNvSpPr txBox="1"/>
           <p:nvPr>
             <p:ph type="title"/>
@@ -7213,7 +7275,7 @@
       </p:sp>
       <p:sp>
         <p:nvSpPr>
-          <p:cNvPr id="19" name="Google Shape;19;p4"/>
+          <p:cNvPr id="18" name="Google Shape;18;p4"/>
           <p:cNvSpPr txBox="1"/>
           <p:nvPr>
             <p:ph idx="1" type="body"/>
@@ -7338,7 +7400,7 @@
       </p:sp>
       <p:sp>
         <p:nvSpPr>
-          <p:cNvPr id="20" name="Google Shape;20;p4"/>
+          <p:cNvPr id="19" name="Google Shape;19;p4"/>
           <p:cNvSpPr/>
           <p:nvPr/>
         </p:nvSpPr>
@@ -7381,7 +7443,7 @@
       </p:sp>
       <p:sp>
         <p:nvSpPr>
-          <p:cNvPr id="21" name="Google Shape;21;p4"/>
+          <p:cNvPr id="20" name="Google Shape;20;p4"/>
           <p:cNvSpPr txBox="1"/>
           <p:nvPr>
             <p:ph idx="12" type="sldNum"/>
@@ -7530,7 +7592,7 @@
   <p:cSld name="TITLE_AND_TWO_COLUMNS">
     <p:spTree>
       <p:nvGrpSpPr>
-        <p:cNvPr id="22" name="Shape 22"/>
+        <p:cNvPr id="21" name="Shape 21"/>
         <p:cNvGrpSpPr/>
         <p:nvPr/>
       </p:nvGrpSpPr>
@@ -7544,7 +7606,7 @@
       </p:grpSpPr>
       <p:sp>
         <p:nvSpPr>
-          <p:cNvPr id="23" name="Google Shape;23;p5"/>
+          <p:cNvPr id="22" name="Google Shape;22;p5"/>
           <p:cNvSpPr txBox="1"/>
           <p:nvPr>
             <p:ph type="title"/>
@@ -7672,7 +7734,7 @@
       </p:sp>
       <p:sp>
         <p:nvSpPr>
-          <p:cNvPr id="24" name="Google Shape;24;p5"/>
+          <p:cNvPr id="23" name="Google Shape;23;p5"/>
           <p:cNvSpPr txBox="1"/>
           <p:nvPr>
             <p:ph idx="1" type="body"/>
@@ -7797,7 +7859,7 @@
       </p:sp>
       <p:sp>
         <p:nvSpPr>
-          <p:cNvPr id="25" name="Google Shape;25;p5"/>
+          <p:cNvPr id="24" name="Google Shape;24;p5"/>
           <p:cNvSpPr txBox="1"/>
           <p:nvPr>
             <p:ph idx="2" type="body"/>
@@ -7922,7 +7984,7 @@
       </p:sp>
       <p:sp>
         <p:nvSpPr>
-          <p:cNvPr id="26" name="Google Shape;26;p5"/>
+          <p:cNvPr id="25" name="Google Shape;25;p5"/>
           <p:cNvSpPr/>
           <p:nvPr/>
         </p:nvSpPr>
@@ -7965,7 +8027,7 @@
       </p:sp>
       <p:sp>
         <p:nvSpPr>
-          <p:cNvPr id="27" name="Google Shape;27;p5"/>
+          <p:cNvPr id="26" name="Google Shape;26;p5"/>
           <p:cNvSpPr txBox="1"/>
           <p:nvPr>
             <p:ph idx="12" type="sldNum"/>
@@ -8114,7 +8176,7 @@
   <p:cSld name="TITLE_ONLY">
     <p:spTree>
       <p:nvGrpSpPr>
-        <p:cNvPr id="28" name="Shape 28"/>
+        <p:cNvPr id="27" name="Shape 27"/>
         <p:cNvGrpSpPr/>
         <p:nvPr/>
       </p:nvGrpSpPr>
@@ -8128,7 +8190,7 @@
       </p:grpSpPr>
       <p:sp>
         <p:nvSpPr>
-          <p:cNvPr id="29" name="Google Shape;29;p6"/>
+          <p:cNvPr id="28" name="Google Shape;28;p6"/>
           <p:cNvSpPr txBox="1"/>
           <p:nvPr>
             <p:ph type="title"/>
@@ -8253,7 +8315,7 @@
       </p:sp>
       <p:sp>
         <p:nvSpPr>
-          <p:cNvPr id="30" name="Google Shape;30;p6"/>
+          <p:cNvPr id="29" name="Google Shape;29;p6"/>
           <p:cNvSpPr/>
           <p:nvPr/>
         </p:nvSpPr>
@@ -8296,7 +8358,7 @@
       </p:sp>
       <p:sp>
         <p:nvSpPr>
-          <p:cNvPr id="31" name="Google Shape;31;p6"/>
+          <p:cNvPr id="30" name="Google Shape;30;p6"/>
           <p:cNvSpPr txBox="1"/>
           <p:nvPr>
             <p:ph idx="12" type="sldNum"/>
@@ -8445,7 +8507,7 @@
   <p:cSld name="BLANK">
     <p:spTree>
       <p:nvGrpSpPr>
-        <p:cNvPr id="32" name="Shape 32"/>
+        <p:cNvPr id="31" name="Shape 31"/>
         <p:cNvGrpSpPr/>
         <p:nvPr/>
       </p:nvGrpSpPr>
@@ -9751,7 +9813,7 @@
   <p:cSld>
     <p:spTree>
       <p:nvGrpSpPr>
-        <p:cNvPr id="36" name="Shape 36"/>
+        <p:cNvPr id="35" name="Shape 35"/>
         <p:cNvGrpSpPr/>
         <p:nvPr/>
       </p:nvGrpSpPr>
@@ -9765,7 +9827,7 @@
       </p:grpSpPr>
       <p:sp>
         <p:nvSpPr>
-          <p:cNvPr id="37" name="Google Shape;37;p8"/>
+          <p:cNvPr id="36" name="Google Shape;36;p8"/>
           <p:cNvSpPr txBox="1"/>
           <p:nvPr>
             <p:ph type="ctrTitle"/>
@@ -9805,7 +9867,7 @@
       </p:sp>
       <p:sp>
         <p:nvSpPr>
-          <p:cNvPr id="38" name="Google Shape;38;p8"/>
+          <p:cNvPr id="37" name="Google Shape;37;p8"/>
           <p:cNvSpPr txBox="1"/>
           <p:nvPr>
             <p:ph idx="1" type="subTitle"/>
@@ -9912,7 +9974,7 @@
   <p:cSld>
     <p:spTree>
       <p:nvGrpSpPr>
-        <p:cNvPr id="94" name="Shape 94"/>
+        <p:cNvPr id="93" name="Shape 93"/>
         <p:cNvGrpSpPr/>
         <p:nvPr/>
       </p:nvGrpSpPr>
@@ -9926,7 +9988,7 @@
       </p:grpSpPr>
       <p:sp>
         <p:nvSpPr>
-          <p:cNvPr id="95" name="Google Shape;95;p17"/>
+          <p:cNvPr id="94" name="Google Shape;94;p17"/>
           <p:cNvSpPr txBox="1"/>
           <p:nvPr>
             <p:ph type="title"/>
@@ -9966,7 +10028,7 @@
       </p:sp>
       <p:sp>
         <p:nvSpPr>
-          <p:cNvPr id="96" name="Google Shape;96;p17"/>
+          <p:cNvPr id="95" name="Google Shape;95;p17"/>
           <p:cNvSpPr txBox="1"/>
           <p:nvPr>
             <p:ph idx="1" type="body"/>
@@ -10089,7 +10151,7 @@
       </p:sp>
       <p:sp>
         <p:nvSpPr>
-          <p:cNvPr id="97" name="Google Shape;97;p17"/>
+          <p:cNvPr id="96" name="Google Shape;96;p17"/>
           <p:cNvSpPr txBox="1"/>
           <p:nvPr>
             <p:ph idx="12" type="sldNum"/>
@@ -10154,7 +10216,7 @@
       </p:sp>
       <p:sp>
         <p:nvSpPr>
-          <p:cNvPr id="98" name="Google Shape;98;p17"/>
+          <p:cNvPr id="97" name="Google Shape;97;p17"/>
           <p:cNvSpPr txBox="1"/>
           <p:nvPr>
             <p:ph idx="2" type="body"/>
@@ -10276,7 +10338,7 @@
   <p:cSld>
     <p:spTree>
       <p:nvGrpSpPr>
-        <p:cNvPr id="102" name="Shape 102"/>
+        <p:cNvPr id="101" name="Shape 101"/>
         <p:cNvGrpSpPr/>
         <p:nvPr/>
       </p:nvGrpSpPr>
@@ -10290,7 +10352,7 @@
       </p:grpSpPr>
       <p:sp>
         <p:nvSpPr>
-          <p:cNvPr id="103" name="Google Shape;103;p18"/>
+          <p:cNvPr id="102" name="Google Shape;102;p18"/>
           <p:cNvSpPr txBox="1"/>
           <p:nvPr>
             <p:ph type="title"/>
@@ -10330,7 +10392,7 @@
       </p:sp>
       <p:sp>
         <p:nvSpPr>
-          <p:cNvPr id="104" name="Google Shape;104;p18"/>
+          <p:cNvPr id="103" name="Google Shape;103;p18"/>
           <p:cNvSpPr txBox="1"/>
           <p:nvPr>
             <p:ph idx="1" type="body"/>
@@ -10420,7 +10482,7 @@
       </p:sp>
       <p:sp>
         <p:nvSpPr>
-          <p:cNvPr id="105" name="Google Shape;105;p18"/>
+          <p:cNvPr id="104" name="Google Shape;104;p18"/>
           <p:cNvSpPr txBox="1"/>
           <p:nvPr>
             <p:ph idx="12" type="sldNum"/>
@@ -10496,7 +10558,7 @@
   <p:cSld>
     <p:spTree>
       <p:nvGrpSpPr>
-        <p:cNvPr id="109" name="Shape 109"/>
+        <p:cNvPr id="108" name="Shape 108"/>
         <p:cNvGrpSpPr/>
         <p:nvPr/>
       </p:nvGrpSpPr>
@@ -10510,7 +10572,7 @@
       </p:grpSpPr>
       <p:sp>
         <p:nvSpPr>
-          <p:cNvPr id="110" name="Google Shape;110;p19"/>
+          <p:cNvPr id="109" name="Google Shape;109;p19"/>
           <p:cNvSpPr txBox="1"/>
           <p:nvPr>
             <p:ph type="title"/>
@@ -10550,7 +10612,7 @@
       </p:sp>
       <p:sp>
         <p:nvSpPr>
-          <p:cNvPr id="111" name="Google Shape;111;p19"/>
+          <p:cNvPr id="110" name="Google Shape;110;p19"/>
           <p:cNvSpPr txBox="1"/>
           <p:nvPr>
             <p:ph idx="1" type="body"/>
@@ -10647,7 +10709,7 @@
       </p:sp>
       <p:sp>
         <p:nvSpPr>
-          <p:cNvPr id="112" name="Google Shape;112;p19"/>
+          <p:cNvPr id="111" name="Google Shape;111;p19"/>
           <p:cNvSpPr txBox="1"/>
           <p:nvPr>
             <p:ph idx="12" type="sldNum"/>
@@ -10723,7 +10785,7 @@
   <p:cSld>
     <p:spTree>
       <p:nvGrpSpPr>
-        <p:cNvPr id="116" name="Shape 116"/>
+        <p:cNvPr id="115" name="Shape 115"/>
         <p:cNvGrpSpPr/>
         <p:nvPr/>
       </p:nvGrpSpPr>
@@ -10737,7 +10799,7 @@
       </p:grpSpPr>
       <p:sp>
         <p:nvSpPr>
-          <p:cNvPr id="117" name="Google Shape;117;p20"/>
+          <p:cNvPr id="116" name="Google Shape;116;p20"/>
           <p:cNvSpPr txBox="1"/>
           <p:nvPr>
             <p:ph type="title"/>
@@ -10777,7 +10839,7 @@
       </p:sp>
       <p:sp>
         <p:nvSpPr>
-          <p:cNvPr id="118" name="Google Shape;118;p20"/>
+          <p:cNvPr id="117" name="Google Shape;117;p20"/>
           <p:cNvSpPr txBox="1"/>
           <p:nvPr>
             <p:ph idx="1" type="body"/>
@@ -10965,7 +11027,7 @@
       </p:sp>
       <p:sp>
         <p:nvSpPr>
-          <p:cNvPr id="119" name="Google Shape;119;p20"/>
+          <p:cNvPr id="118" name="Google Shape;118;p20"/>
           <p:cNvSpPr txBox="1"/>
           <p:nvPr>
             <p:ph idx="12" type="sldNum"/>
@@ -11041,7 +11103,7 @@
   <p:cSld>
     <p:spTree>
       <p:nvGrpSpPr>
-        <p:cNvPr id="123" name="Shape 123"/>
+        <p:cNvPr id="122" name="Shape 122"/>
         <p:cNvGrpSpPr/>
         <p:nvPr/>
       </p:nvGrpSpPr>
@@ -11055,7 +11117,7 @@
       </p:grpSpPr>
       <p:sp>
         <p:nvSpPr>
-          <p:cNvPr id="124" name="Google Shape;124;p21"/>
+          <p:cNvPr id="123" name="Google Shape;123;p21"/>
           <p:cNvSpPr txBox="1"/>
           <p:nvPr>
             <p:ph type="title"/>
@@ -11095,7 +11157,7 @@
       </p:sp>
       <p:sp>
         <p:nvSpPr>
-          <p:cNvPr id="125" name="Google Shape;125;p21"/>
+          <p:cNvPr id="124" name="Google Shape;124;p21"/>
           <p:cNvSpPr txBox="1"/>
           <p:nvPr>
             <p:ph idx="12" type="sldNum"/>
@@ -11160,7 +11222,7 @@
       </p:sp>
       <p:sp>
         <p:nvSpPr>
-          <p:cNvPr id="126" name="Google Shape;126;p21"/>
+          <p:cNvPr id="125" name="Google Shape;125;p21"/>
           <p:cNvSpPr txBox="1"/>
           <p:nvPr>
             <p:ph idx="1" type="body"/>
@@ -11231,7 +11293,7 @@
       </p:sp>
       <p:sp>
         <p:nvSpPr>
-          <p:cNvPr id="127" name="Google Shape;127;p21"/>
+          <p:cNvPr id="126" name="Google Shape;126;p21"/>
           <p:cNvSpPr txBox="1"/>
           <p:nvPr/>
         </p:nvSpPr>
@@ -11286,7 +11348,7 @@
       </p:sp>
       <p:graphicFrame>
         <p:nvGraphicFramePr>
-          <p:cNvPr id="128" name="Google Shape;128;p21"/>
+          <p:cNvPr id="127" name="Google Shape;127;p21"/>
           <p:cNvGraphicFramePr/>
           <p:nvPr/>
         </p:nvGraphicFramePr>
@@ -11299,7 +11361,7 @@
             <a:tbl>
               <a:tblPr>
                 <a:noFill/>
-                <a:tableStyleId>{B8B1287B-0280-4061-81DC-422D31685EAB}</a:tableStyleId>
+                <a:tableStyleId>{2C234A13-EC2A-4985-809F-EDEE62B1C0D6}</a:tableStyleId>
               </a:tblPr>
               <a:tblGrid>
                 <a:gridCol w="2865125"/>
@@ -12277,7 +12339,7 @@
   <p:cSld>
     <p:spTree>
       <p:nvGrpSpPr>
-        <p:cNvPr id="132" name="Shape 132"/>
+        <p:cNvPr id="131" name="Shape 131"/>
         <p:cNvGrpSpPr/>
         <p:nvPr/>
       </p:nvGrpSpPr>
@@ -12291,7 +12353,7 @@
       </p:grpSpPr>
       <p:sp>
         <p:nvSpPr>
-          <p:cNvPr id="133" name="Google Shape;133;p22"/>
+          <p:cNvPr id="132" name="Google Shape;132;p22"/>
           <p:cNvSpPr txBox="1"/>
           <p:nvPr>
             <p:ph type="title"/>
@@ -12331,7 +12393,7 @@
       </p:sp>
       <p:sp>
         <p:nvSpPr>
-          <p:cNvPr id="134" name="Google Shape;134;p22"/>
+          <p:cNvPr id="133" name="Google Shape;133;p22"/>
           <p:cNvSpPr txBox="1"/>
           <p:nvPr>
             <p:ph idx="1" type="body"/>
@@ -12421,7 +12483,7 @@
       </p:sp>
       <p:sp>
         <p:nvSpPr>
-          <p:cNvPr id="135" name="Google Shape;135;p22"/>
+          <p:cNvPr id="134" name="Google Shape;134;p22"/>
           <p:cNvSpPr txBox="1"/>
           <p:nvPr>
             <p:ph idx="12" type="sldNum"/>
@@ -12497,7 +12559,7 @@
   <p:cSld>
     <p:spTree>
       <p:nvGrpSpPr>
-        <p:cNvPr id="139" name="Shape 139"/>
+        <p:cNvPr id="138" name="Shape 138"/>
         <p:cNvGrpSpPr/>
         <p:nvPr/>
       </p:nvGrpSpPr>
@@ -12511,7 +12573,7 @@
       </p:grpSpPr>
       <p:sp>
         <p:nvSpPr>
-          <p:cNvPr id="140" name="Google Shape;140;p23"/>
+          <p:cNvPr id="139" name="Google Shape;139;p23"/>
           <p:cNvSpPr txBox="1"/>
           <p:nvPr>
             <p:ph type="title"/>
@@ -12551,7 +12613,7 @@
       </p:sp>
       <p:sp>
         <p:nvSpPr>
-          <p:cNvPr id="141" name="Google Shape;141;p23"/>
+          <p:cNvPr id="140" name="Google Shape;140;p23"/>
           <p:cNvSpPr txBox="1"/>
           <p:nvPr>
             <p:ph idx="1" type="body"/>
@@ -12676,7 +12738,7 @@
       </p:sp>
       <p:sp>
         <p:nvSpPr>
-          <p:cNvPr id="142" name="Google Shape;142;p23"/>
+          <p:cNvPr id="141" name="Google Shape;141;p23"/>
           <p:cNvSpPr txBox="1"/>
           <p:nvPr>
             <p:ph idx="12" type="sldNum"/>
@@ -12741,7 +12803,7 @@
       </p:sp>
       <p:sp>
         <p:nvSpPr>
-          <p:cNvPr id="143" name="Google Shape;143;p23"/>
+          <p:cNvPr id="142" name="Google Shape;142;p23"/>
           <p:cNvSpPr txBox="1"/>
           <p:nvPr>
             <p:ph idx="2" type="body"/>
@@ -12969,7 +13031,7 @@
   <p:cSld>
     <p:spTree>
       <p:nvGrpSpPr>
-        <p:cNvPr id="147" name="Shape 147"/>
+        <p:cNvPr id="146" name="Shape 146"/>
         <p:cNvGrpSpPr/>
         <p:nvPr/>
       </p:nvGrpSpPr>
@@ -12983,7 +13045,7 @@
       </p:grpSpPr>
       <p:sp>
         <p:nvSpPr>
-          <p:cNvPr id="148" name="Google Shape;148;p24"/>
+          <p:cNvPr id="147" name="Google Shape;147;p24"/>
           <p:cNvSpPr txBox="1"/>
           <p:nvPr>
             <p:ph type="title"/>
@@ -13023,7 +13085,7 @@
       </p:sp>
       <p:sp>
         <p:nvSpPr>
-          <p:cNvPr id="149" name="Google Shape;149;p24"/>
+          <p:cNvPr id="148" name="Google Shape;148;p24"/>
           <p:cNvSpPr txBox="1"/>
           <p:nvPr>
             <p:ph idx="1" type="body"/>
@@ -13131,7 +13193,7 @@
       </p:sp>
       <p:sp>
         <p:nvSpPr>
-          <p:cNvPr id="150" name="Google Shape;150;p24"/>
+          <p:cNvPr id="149" name="Google Shape;149;p24"/>
           <p:cNvSpPr txBox="1"/>
           <p:nvPr>
             <p:ph idx="12" type="sldNum"/>
@@ -13196,7 +13258,7 @@
       </p:sp>
       <p:sp>
         <p:nvSpPr>
-          <p:cNvPr id="151" name="Google Shape;151;p24"/>
+          <p:cNvPr id="150" name="Google Shape;150;p24"/>
           <p:cNvSpPr txBox="1"/>
           <p:nvPr>
             <p:ph idx="2" type="body"/>
@@ -13339,7 +13401,7 @@
       </p:sp>
       <p:sp>
         <p:nvSpPr>
-          <p:cNvPr id="152" name="Google Shape;152;p24"/>
+          <p:cNvPr id="151" name="Google Shape;151;p24"/>
           <p:cNvSpPr txBox="1"/>
           <p:nvPr/>
         </p:nvSpPr>
@@ -13392,7 +13454,7 @@
   <p:cSld>
     <p:spTree>
       <p:nvGrpSpPr>
-        <p:cNvPr id="156" name="Shape 156"/>
+        <p:cNvPr id="155" name="Shape 155"/>
         <p:cNvGrpSpPr/>
         <p:nvPr/>
       </p:nvGrpSpPr>
@@ -13406,7 +13468,7 @@
       </p:grpSpPr>
       <p:sp>
         <p:nvSpPr>
-          <p:cNvPr id="157" name="Google Shape;157;p25"/>
+          <p:cNvPr id="156" name="Google Shape;156;p25"/>
           <p:cNvSpPr txBox="1"/>
           <p:nvPr>
             <p:ph type="title"/>
@@ -13446,7 +13508,7 @@
       </p:sp>
       <p:sp>
         <p:nvSpPr>
-          <p:cNvPr id="158" name="Google Shape;158;p25"/>
+          <p:cNvPr id="157" name="Google Shape;157;p25"/>
           <p:cNvSpPr txBox="1"/>
           <p:nvPr>
             <p:ph idx="1" type="body"/>
@@ -13561,7 +13623,7 @@
       </p:sp>
       <p:sp>
         <p:nvSpPr>
-          <p:cNvPr id="159" name="Google Shape;159;p25"/>
+          <p:cNvPr id="158" name="Google Shape;158;p25"/>
           <p:cNvSpPr txBox="1"/>
           <p:nvPr>
             <p:ph idx="12" type="sldNum"/>
@@ -13637,7 +13699,7 @@
   <p:cSld>
     <p:spTree>
       <p:nvGrpSpPr>
-        <p:cNvPr id="163" name="Shape 163"/>
+        <p:cNvPr id="162" name="Shape 162"/>
         <p:cNvGrpSpPr/>
         <p:nvPr/>
       </p:nvGrpSpPr>
@@ -13651,7 +13713,7 @@
       </p:grpSpPr>
       <p:sp>
         <p:nvSpPr>
-          <p:cNvPr id="164" name="Google Shape;164;p26"/>
+          <p:cNvPr id="163" name="Google Shape;163;p26"/>
           <p:cNvSpPr txBox="1"/>
           <p:nvPr>
             <p:ph type="title"/>
@@ -13691,7 +13753,7 @@
       </p:sp>
       <p:sp>
         <p:nvSpPr>
-          <p:cNvPr id="165" name="Google Shape;165;p26"/>
+          <p:cNvPr id="164" name="Google Shape;164;p26"/>
           <p:cNvSpPr txBox="1"/>
           <p:nvPr>
             <p:ph idx="1" type="body"/>
@@ -13799,7 +13861,7 @@
       </p:sp>
       <p:sp>
         <p:nvSpPr>
-          <p:cNvPr id="166" name="Google Shape;166;p26"/>
+          <p:cNvPr id="165" name="Google Shape;165;p26"/>
           <p:cNvSpPr txBox="1"/>
           <p:nvPr>
             <p:ph idx="12" type="sldNum"/>
@@ -13875,7 +13937,7 @@
   <p:cSld>
     <p:spTree>
       <p:nvGrpSpPr>
-        <p:cNvPr id="42" name="Shape 42"/>
+        <p:cNvPr id="41" name="Shape 41"/>
         <p:cNvGrpSpPr/>
         <p:nvPr/>
       </p:nvGrpSpPr>
@@ -13889,7 +13951,7 @@
       </p:grpSpPr>
       <p:sp>
         <p:nvSpPr>
-          <p:cNvPr id="43" name="Google Shape;43;p9"/>
+          <p:cNvPr id="42" name="Google Shape;42;p9"/>
           <p:cNvSpPr txBox="1"/>
           <p:nvPr>
             <p:ph type="title"/>
@@ -13929,7 +13991,7 @@
       </p:sp>
       <p:sp>
         <p:nvSpPr>
-          <p:cNvPr id="44" name="Google Shape;44;p9"/>
+          <p:cNvPr id="43" name="Google Shape;43;p9"/>
           <p:cNvSpPr txBox="1"/>
           <p:nvPr>
             <p:ph idx="1" type="body"/>
@@ -14013,7 +14075,7 @@
             </a:pPr>
             <a:r>
               <a:rPr lang="en"/>
-              <a:t>Academic writing</a:t>
+              <a:t>Successful writing</a:t>
             </a:r>
             <a:endParaRPr/>
           </a:p>
@@ -14021,7 +14083,7 @@
       </p:sp>
       <p:sp>
         <p:nvSpPr>
-          <p:cNvPr id="45" name="Google Shape;45;p9"/>
+          <p:cNvPr id="44" name="Google Shape;44;p9"/>
           <p:cNvSpPr txBox="1"/>
           <p:nvPr>
             <p:ph idx="12" type="sldNum"/>
@@ -14097,7 +14159,7 @@
   <p:cSld>
     <p:spTree>
       <p:nvGrpSpPr>
-        <p:cNvPr id="170" name="Shape 170"/>
+        <p:cNvPr id="169" name="Shape 169"/>
         <p:cNvGrpSpPr/>
         <p:nvPr/>
       </p:nvGrpSpPr>
@@ -14111,7 +14173,7 @@
       </p:grpSpPr>
       <p:sp>
         <p:nvSpPr>
-          <p:cNvPr id="171" name="Google Shape;171;p27"/>
+          <p:cNvPr id="170" name="Google Shape;170;p27"/>
           <p:cNvSpPr txBox="1"/>
           <p:nvPr>
             <p:ph type="title"/>
@@ -14151,7 +14213,7 @@
       </p:sp>
       <p:sp>
         <p:nvSpPr>
-          <p:cNvPr id="172" name="Google Shape;172;p27"/>
+          <p:cNvPr id="171" name="Google Shape;171;p27"/>
           <p:cNvSpPr txBox="1"/>
           <p:nvPr>
             <p:ph idx="1" type="body"/>
@@ -14225,7 +14287,7 @@
       </p:sp>
       <p:sp>
         <p:nvSpPr>
-          <p:cNvPr id="173" name="Google Shape;173;p27"/>
+          <p:cNvPr id="172" name="Google Shape;172;p27"/>
           <p:cNvSpPr txBox="1"/>
           <p:nvPr>
             <p:ph idx="12" type="sldNum"/>
@@ -14290,7 +14352,7 @@
       </p:sp>
       <p:sp>
         <p:nvSpPr>
-          <p:cNvPr id="174" name="Google Shape;174;p27"/>
+          <p:cNvPr id="173" name="Google Shape;173;p27"/>
           <p:cNvSpPr txBox="1"/>
           <p:nvPr>
             <p:ph idx="2" type="body"/>
@@ -14443,7 +14505,7 @@
   <p:cSld>
     <p:spTree>
       <p:nvGrpSpPr>
-        <p:cNvPr id="178" name="Shape 178"/>
+        <p:cNvPr id="177" name="Shape 177"/>
         <p:cNvGrpSpPr/>
         <p:nvPr/>
       </p:nvGrpSpPr>
@@ -14457,7 +14519,7 @@
       </p:grpSpPr>
       <p:sp>
         <p:nvSpPr>
-          <p:cNvPr id="179" name="Google Shape;179;p28"/>
+          <p:cNvPr id="178" name="Google Shape;178;p28"/>
           <p:cNvSpPr txBox="1"/>
           <p:nvPr>
             <p:ph type="title"/>
@@ -14501,7 +14563,7 @@
       </p:sp>
       <p:sp>
         <p:nvSpPr>
-          <p:cNvPr id="180" name="Google Shape;180;p28"/>
+          <p:cNvPr id="179" name="Google Shape;179;p28"/>
           <p:cNvSpPr txBox="1"/>
           <p:nvPr>
             <p:ph idx="1" type="body"/>
@@ -14627,7 +14689,7 @@
       </p:sp>
       <p:sp>
         <p:nvSpPr>
-          <p:cNvPr id="181" name="Google Shape;181;p28"/>
+          <p:cNvPr id="180" name="Google Shape;180;p28"/>
           <p:cNvSpPr txBox="1"/>
           <p:nvPr>
             <p:ph idx="12" type="sldNum"/>
@@ -14703,7 +14765,7 @@
   <p:cSld>
     <p:spTree>
       <p:nvGrpSpPr>
-        <p:cNvPr id="185" name="Shape 185"/>
+        <p:cNvPr id="184" name="Shape 184"/>
         <p:cNvGrpSpPr/>
         <p:nvPr/>
       </p:nvGrpSpPr>
@@ -14717,7 +14779,7 @@
       </p:grpSpPr>
       <p:sp>
         <p:nvSpPr>
-          <p:cNvPr id="186" name="Google Shape;186;p29"/>
+          <p:cNvPr id="185" name="Google Shape;185;p29"/>
           <p:cNvSpPr txBox="1"/>
           <p:nvPr>
             <p:ph type="title"/>
@@ -14757,7 +14819,7 @@
       </p:sp>
       <p:sp>
         <p:nvSpPr>
-          <p:cNvPr id="187" name="Google Shape;187;p29"/>
+          <p:cNvPr id="186" name="Google Shape;186;p29"/>
           <p:cNvSpPr txBox="1"/>
           <p:nvPr>
             <p:ph idx="1" type="body"/>
@@ -14847,7 +14909,7 @@
       </p:sp>
       <p:sp>
         <p:nvSpPr>
-          <p:cNvPr id="188" name="Google Shape;188;p29"/>
+          <p:cNvPr id="187" name="Google Shape;187;p29"/>
           <p:cNvSpPr txBox="1"/>
           <p:nvPr>
             <p:ph idx="12" type="sldNum"/>
@@ -14923,7 +14985,7 @@
   <p:cSld>
     <p:spTree>
       <p:nvGrpSpPr>
-        <p:cNvPr id="192" name="Shape 192"/>
+        <p:cNvPr id="191" name="Shape 191"/>
         <p:cNvGrpSpPr/>
         <p:nvPr/>
       </p:nvGrpSpPr>
@@ -14937,7 +14999,7 @@
       </p:grpSpPr>
       <p:sp>
         <p:nvSpPr>
-          <p:cNvPr id="193" name="Google Shape;193;p30"/>
+          <p:cNvPr id="192" name="Google Shape;192;p30"/>
           <p:cNvSpPr txBox="1"/>
           <p:nvPr>
             <p:ph type="title"/>
@@ -14977,7 +15039,7 @@
       </p:sp>
       <p:sp>
         <p:nvSpPr>
-          <p:cNvPr id="194" name="Google Shape;194;p30"/>
+          <p:cNvPr id="193" name="Google Shape;193;p30"/>
           <p:cNvSpPr txBox="1"/>
           <p:nvPr>
             <p:ph idx="1" type="body"/>
@@ -15198,7 +15260,7 @@
       </p:sp>
       <p:sp>
         <p:nvSpPr>
-          <p:cNvPr id="195" name="Google Shape;195;p30"/>
+          <p:cNvPr id="194" name="Google Shape;194;p30"/>
           <p:cNvSpPr txBox="1"/>
           <p:nvPr>
             <p:ph idx="12" type="sldNum"/>
@@ -15274,7 +15336,7 @@
   <p:cSld>
     <p:spTree>
       <p:nvGrpSpPr>
-        <p:cNvPr id="199" name="Shape 199"/>
+        <p:cNvPr id="198" name="Shape 198"/>
         <p:cNvGrpSpPr/>
         <p:nvPr/>
       </p:nvGrpSpPr>
@@ -15288,7 +15350,7 @@
       </p:grpSpPr>
       <p:sp>
         <p:nvSpPr>
-          <p:cNvPr id="200" name="Google Shape;200;p31"/>
+          <p:cNvPr id="199" name="Google Shape;199;p31"/>
           <p:cNvSpPr txBox="1"/>
           <p:nvPr>
             <p:ph type="title"/>
@@ -15328,7 +15390,7 @@
       </p:sp>
       <p:sp>
         <p:nvSpPr>
-          <p:cNvPr id="201" name="Google Shape;201;p31"/>
+          <p:cNvPr id="200" name="Google Shape;200;p31"/>
           <p:cNvSpPr txBox="1"/>
           <p:nvPr>
             <p:ph idx="1" type="body"/>
@@ -15436,7 +15498,7 @@
       </p:sp>
       <p:sp>
         <p:nvSpPr>
-          <p:cNvPr id="202" name="Google Shape;202;p31"/>
+          <p:cNvPr id="201" name="Google Shape;201;p31"/>
           <p:cNvSpPr txBox="1"/>
           <p:nvPr>
             <p:ph idx="12" type="sldNum"/>
@@ -15512,7 +15574,7 @@
   <p:cSld>
     <p:spTree>
       <p:nvGrpSpPr>
-        <p:cNvPr id="206" name="Shape 206"/>
+        <p:cNvPr id="205" name="Shape 205"/>
         <p:cNvGrpSpPr/>
         <p:nvPr/>
       </p:nvGrpSpPr>
@@ -15526,7 +15588,7 @@
       </p:grpSpPr>
       <p:sp>
         <p:nvSpPr>
-          <p:cNvPr id="207" name="Google Shape;207;p32"/>
+          <p:cNvPr id="206" name="Google Shape;206;p32"/>
           <p:cNvSpPr txBox="1"/>
           <p:nvPr>
             <p:ph type="title"/>
@@ -15566,7 +15628,7 @@
       </p:sp>
       <p:sp>
         <p:nvSpPr>
-          <p:cNvPr id="208" name="Google Shape;208;p32"/>
+          <p:cNvPr id="207" name="Google Shape;207;p32"/>
           <p:cNvSpPr txBox="1"/>
           <p:nvPr>
             <p:ph idx="1" type="body"/>
@@ -15706,7 +15768,7 @@
       </p:sp>
       <p:sp>
         <p:nvSpPr>
-          <p:cNvPr id="209" name="Google Shape;209;p32"/>
+          <p:cNvPr id="208" name="Google Shape;208;p32"/>
           <p:cNvSpPr txBox="1"/>
           <p:nvPr>
             <p:ph idx="12" type="sldNum"/>
@@ -15782,7 +15844,7 @@
   <p:cSld>
     <p:spTree>
       <p:nvGrpSpPr>
-        <p:cNvPr id="213" name="Shape 213"/>
+        <p:cNvPr id="212" name="Shape 212"/>
         <p:cNvGrpSpPr/>
         <p:nvPr/>
       </p:nvGrpSpPr>
@@ -15796,7 +15858,7 @@
       </p:grpSpPr>
       <p:sp>
         <p:nvSpPr>
-          <p:cNvPr id="214" name="Google Shape;214;p33"/>
+          <p:cNvPr id="213" name="Google Shape;213;p33"/>
           <p:cNvSpPr txBox="1"/>
           <p:nvPr>
             <p:ph type="title"/>
@@ -15836,7 +15898,7 @@
       </p:sp>
       <p:sp>
         <p:nvSpPr>
-          <p:cNvPr id="215" name="Google Shape;215;p33"/>
+          <p:cNvPr id="214" name="Google Shape;214;p33"/>
           <p:cNvSpPr txBox="1"/>
           <p:nvPr>
             <p:ph idx="1" type="body"/>
@@ -15927,7 +15989,7 @@
       </p:sp>
       <p:sp>
         <p:nvSpPr>
-          <p:cNvPr id="216" name="Google Shape;216;p33"/>
+          <p:cNvPr id="215" name="Google Shape;215;p33"/>
           <p:cNvSpPr txBox="1"/>
           <p:nvPr>
             <p:ph idx="12" type="sldNum"/>
@@ -16003,7 +16065,7 @@
   <p:cSld>
     <p:spTree>
       <p:nvGrpSpPr>
-        <p:cNvPr id="220" name="Shape 220"/>
+        <p:cNvPr id="219" name="Shape 219"/>
         <p:cNvGrpSpPr/>
         <p:nvPr/>
       </p:nvGrpSpPr>
@@ -16017,7 +16079,7 @@
       </p:grpSpPr>
       <p:sp>
         <p:nvSpPr>
-          <p:cNvPr id="221" name="Google Shape;221;p34"/>
+          <p:cNvPr id="220" name="Google Shape;220;p34"/>
           <p:cNvSpPr txBox="1"/>
           <p:nvPr>
             <p:ph type="title"/>
@@ -16057,7 +16119,7 @@
       </p:sp>
       <p:sp>
         <p:nvSpPr>
-          <p:cNvPr id="222" name="Google Shape;222;p34"/>
+          <p:cNvPr id="221" name="Google Shape;221;p34"/>
           <p:cNvSpPr txBox="1"/>
           <p:nvPr>
             <p:ph idx="12" type="sldNum"/>
@@ -16122,7 +16184,7 @@
       </p:sp>
       <p:sp>
         <p:nvSpPr>
-          <p:cNvPr id="223" name="Google Shape;223;p34"/>
+          <p:cNvPr id="222" name="Google Shape;222;p34"/>
           <p:cNvSpPr txBox="1"/>
           <p:nvPr>
             <p:ph idx="1" type="body"/>
@@ -16348,7 +16410,7 @@
   <p:cSld>
     <p:spTree>
       <p:nvGrpSpPr>
-        <p:cNvPr id="227" name="Shape 227"/>
+        <p:cNvPr id="226" name="Shape 226"/>
         <p:cNvGrpSpPr/>
         <p:nvPr/>
       </p:nvGrpSpPr>
@@ -16362,7 +16424,7 @@
       </p:grpSpPr>
       <p:sp>
         <p:nvSpPr>
-          <p:cNvPr id="228" name="Google Shape;228;p35"/>
+          <p:cNvPr id="227" name="Google Shape;227;p35"/>
           <p:cNvSpPr txBox="1"/>
           <p:nvPr>
             <p:ph type="title"/>
@@ -16402,7 +16464,7 @@
       </p:sp>
       <p:sp>
         <p:nvSpPr>
-          <p:cNvPr id="229" name="Google Shape;229;p35"/>
+          <p:cNvPr id="228" name="Google Shape;228;p35"/>
           <p:cNvSpPr txBox="1"/>
           <p:nvPr>
             <p:ph idx="1" type="body"/>
@@ -16513,7 +16575,7 @@
       </p:sp>
       <p:sp>
         <p:nvSpPr>
-          <p:cNvPr id="230" name="Google Shape;230;p35"/>
+          <p:cNvPr id="229" name="Google Shape;229;p35"/>
           <p:cNvSpPr txBox="1"/>
           <p:nvPr>
             <p:ph idx="12" type="sldNum"/>
@@ -16589,7 +16651,7 @@
   <p:cSld>
     <p:spTree>
       <p:nvGrpSpPr>
-        <p:cNvPr id="234" name="Shape 234"/>
+        <p:cNvPr id="233" name="Shape 233"/>
         <p:cNvGrpSpPr/>
         <p:nvPr/>
       </p:nvGrpSpPr>
@@ -16603,7 +16665,7 @@
       </p:grpSpPr>
       <p:sp>
         <p:nvSpPr>
-          <p:cNvPr id="235" name="Google Shape;235;p36"/>
+          <p:cNvPr id="234" name="Google Shape;234;p36"/>
           <p:cNvSpPr txBox="1"/>
           <p:nvPr>
             <p:ph type="title"/>
@@ -16643,7 +16705,7 @@
       </p:sp>
       <p:sp>
         <p:nvSpPr>
-          <p:cNvPr id="236" name="Google Shape;236;p36"/>
+          <p:cNvPr id="235" name="Google Shape;235;p36"/>
           <p:cNvSpPr txBox="1"/>
           <p:nvPr>
             <p:ph idx="1" type="body"/>
@@ -16748,7 +16810,7 @@
       </p:sp>
       <p:sp>
         <p:nvSpPr>
-          <p:cNvPr id="237" name="Google Shape;237;p36"/>
+          <p:cNvPr id="236" name="Google Shape;236;p36"/>
           <p:cNvSpPr txBox="1"/>
           <p:nvPr>
             <p:ph idx="12" type="sldNum"/>
@@ -16824,7 +16886,7 @@
   <p:cSld>
     <p:spTree>
       <p:nvGrpSpPr>
-        <p:cNvPr id="49" name="Shape 49"/>
+        <p:cNvPr id="48" name="Shape 48"/>
         <p:cNvGrpSpPr/>
         <p:nvPr/>
       </p:nvGrpSpPr>
@@ -16838,7 +16900,7 @@
       </p:grpSpPr>
       <p:sp>
         <p:nvSpPr>
-          <p:cNvPr id="50" name="Google Shape;50;p10"/>
+          <p:cNvPr id="49" name="Google Shape;49;p10"/>
           <p:cNvSpPr txBox="1"/>
           <p:nvPr>
             <p:ph type="title"/>
@@ -16889,7 +16951,7 @@
   <p:cSld>
     <p:spTree>
       <p:nvGrpSpPr>
-        <p:cNvPr id="241" name="Shape 241"/>
+        <p:cNvPr id="240" name="Shape 240"/>
         <p:cNvGrpSpPr/>
         <p:nvPr/>
       </p:nvGrpSpPr>
@@ -16903,7 +16965,7 @@
       </p:grpSpPr>
       <p:sp>
         <p:nvSpPr>
-          <p:cNvPr id="242" name="Google Shape;242;p37"/>
+          <p:cNvPr id="241" name="Google Shape;241;p37"/>
           <p:cNvSpPr txBox="1"/>
           <p:nvPr>
             <p:ph idx="1" type="body"/>
@@ -17013,7 +17075,7 @@
       </p:sp>
       <p:sp>
         <p:nvSpPr>
-          <p:cNvPr id="243" name="Google Shape;243;p37"/>
+          <p:cNvPr id="242" name="Google Shape;242;p37"/>
           <p:cNvSpPr txBox="1"/>
           <p:nvPr>
             <p:ph type="title"/>
@@ -17053,7 +17115,7 @@
       </p:sp>
       <p:sp>
         <p:nvSpPr>
-          <p:cNvPr id="244" name="Google Shape;244;p37"/>
+          <p:cNvPr id="243" name="Google Shape;243;p37"/>
           <p:cNvSpPr txBox="1"/>
           <p:nvPr>
             <p:ph idx="12" type="sldNum"/>
@@ -17129,7 +17191,7 @@
   <p:cSld>
     <p:spTree>
       <p:nvGrpSpPr>
-        <p:cNvPr id="248" name="Shape 248"/>
+        <p:cNvPr id="247" name="Shape 247"/>
         <p:cNvGrpSpPr/>
         <p:nvPr/>
       </p:nvGrpSpPr>
@@ -17143,7 +17205,7 @@
       </p:grpSpPr>
       <p:sp>
         <p:nvSpPr>
-          <p:cNvPr id="249" name="Google Shape;249;p38"/>
+          <p:cNvPr id="248" name="Google Shape;248;p38"/>
           <p:cNvSpPr txBox="1"/>
           <p:nvPr>
             <p:ph type="title"/>
@@ -17183,7 +17245,7 @@
       </p:sp>
       <p:sp>
         <p:nvSpPr>
-          <p:cNvPr id="250" name="Google Shape;250;p38"/>
+          <p:cNvPr id="249" name="Google Shape;249;p38"/>
           <p:cNvSpPr txBox="1"/>
           <p:nvPr>
             <p:ph idx="1" type="body"/>
@@ -17278,7 +17340,7 @@
       </p:sp>
       <p:sp>
         <p:nvSpPr>
-          <p:cNvPr id="251" name="Google Shape;251;p38"/>
+          <p:cNvPr id="250" name="Google Shape;250;p38"/>
           <p:cNvSpPr txBox="1"/>
           <p:nvPr>
             <p:ph idx="12" type="sldNum"/>
@@ -17354,7 +17416,7 @@
   <p:cSld>
     <p:spTree>
       <p:nvGrpSpPr>
-        <p:cNvPr id="255" name="Shape 255"/>
+        <p:cNvPr id="254" name="Shape 254"/>
         <p:cNvGrpSpPr/>
         <p:nvPr/>
       </p:nvGrpSpPr>
@@ -17368,7 +17430,7 @@
       </p:grpSpPr>
       <p:sp>
         <p:nvSpPr>
-          <p:cNvPr id="256" name="Google Shape;256;p39"/>
+          <p:cNvPr id="255" name="Google Shape;255;p39"/>
           <p:cNvSpPr txBox="1"/>
           <p:nvPr>
             <p:ph type="title"/>
@@ -17408,7 +17470,7 @@
       </p:sp>
       <p:sp>
         <p:nvSpPr>
-          <p:cNvPr id="257" name="Google Shape;257;p39"/>
+          <p:cNvPr id="256" name="Google Shape;256;p39"/>
           <p:cNvSpPr txBox="1"/>
           <p:nvPr>
             <p:ph idx="1" type="body"/>
@@ -17498,7 +17560,7 @@
       </p:sp>
       <p:sp>
         <p:nvSpPr>
-          <p:cNvPr id="258" name="Google Shape;258;p39"/>
+          <p:cNvPr id="257" name="Google Shape;257;p39"/>
           <p:cNvSpPr txBox="1"/>
           <p:nvPr>
             <p:ph idx="12" type="sldNum"/>
@@ -17574,7 +17636,7 @@
   <p:cSld>
     <p:spTree>
       <p:nvGrpSpPr>
-        <p:cNvPr id="262" name="Shape 262"/>
+        <p:cNvPr id="261" name="Shape 261"/>
         <p:cNvGrpSpPr/>
         <p:nvPr/>
       </p:nvGrpSpPr>
@@ -17588,7 +17650,7 @@
       </p:grpSpPr>
       <p:sp>
         <p:nvSpPr>
-          <p:cNvPr id="263" name="Google Shape;263;p40"/>
+          <p:cNvPr id="262" name="Google Shape;262;p40"/>
           <p:cNvSpPr txBox="1"/>
           <p:nvPr>
             <p:ph type="title"/>
@@ -17628,7 +17690,7 @@
       </p:sp>
       <p:sp>
         <p:nvSpPr>
-          <p:cNvPr id="264" name="Google Shape;264;p40"/>
+          <p:cNvPr id="263" name="Google Shape;263;p40"/>
           <p:cNvSpPr txBox="1"/>
           <p:nvPr>
             <p:ph idx="1" type="body"/>
@@ -17721,7 +17783,7 @@
       </p:sp>
       <p:sp>
         <p:nvSpPr>
-          <p:cNvPr id="265" name="Google Shape;265;p40"/>
+          <p:cNvPr id="264" name="Google Shape;264;p40"/>
           <p:cNvSpPr txBox="1"/>
           <p:nvPr>
             <p:ph idx="12" type="sldNum"/>
@@ -17797,7 +17859,7 @@
   <p:cSld>
     <p:spTree>
       <p:nvGrpSpPr>
-        <p:cNvPr id="269" name="Shape 269"/>
+        <p:cNvPr id="268" name="Shape 268"/>
         <p:cNvGrpSpPr/>
         <p:nvPr/>
       </p:nvGrpSpPr>
@@ -17811,7 +17873,7 @@
       </p:grpSpPr>
       <p:sp>
         <p:nvSpPr>
-          <p:cNvPr id="270" name="Google Shape;270;p41"/>
+          <p:cNvPr id="269" name="Google Shape;269;p41"/>
           <p:cNvSpPr txBox="1"/>
           <p:nvPr>
             <p:ph type="title"/>
@@ -17851,7 +17913,7 @@
       </p:sp>
       <p:sp>
         <p:nvSpPr>
-          <p:cNvPr id="271" name="Google Shape;271;p41"/>
+          <p:cNvPr id="270" name="Google Shape;270;p41"/>
           <p:cNvSpPr txBox="1"/>
           <p:nvPr>
             <p:ph idx="1" type="body"/>
@@ -17975,7 +18037,7 @@
       </p:sp>
       <p:sp>
         <p:nvSpPr>
-          <p:cNvPr id="272" name="Google Shape;272;p41"/>
+          <p:cNvPr id="271" name="Google Shape;271;p41"/>
           <p:cNvSpPr txBox="1"/>
           <p:nvPr>
             <p:ph idx="12" type="sldNum"/>
@@ -18051,7 +18113,7 @@
   <p:cSld>
     <p:spTree>
       <p:nvGrpSpPr>
-        <p:cNvPr id="276" name="Shape 276"/>
+        <p:cNvPr id="275" name="Shape 275"/>
         <p:cNvGrpSpPr/>
         <p:nvPr/>
       </p:nvGrpSpPr>
@@ -18065,7 +18127,7 @@
       </p:grpSpPr>
       <p:sp>
         <p:nvSpPr>
-          <p:cNvPr id="277" name="Google Shape;277;p42"/>
+          <p:cNvPr id="276" name="Google Shape;276;p42"/>
           <p:cNvSpPr txBox="1"/>
           <p:nvPr>
             <p:ph type="title"/>
@@ -18105,7 +18167,7 @@
       </p:sp>
       <p:sp>
         <p:nvSpPr>
-          <p:cNvPr id="278" name="Google Shape;278;p42"/>
+          <p:cNvPr id="277" name="Google Shape;277;p42"/>
           <p:cNvSpPr txBox="1"/>
           <p:nvPr>
             <p:ph idx="1" type="body"/>
@@ -18243,7 +18305,7 @@
       </p:sp>
       <p:sp>
         <p:nvSpPr>
-          <p:cNvPr id="279" name="Google Shape;279;p42"/>
+          <p:cNvPr id="278" name="Google Shape;278;p42"/>
           <p:cNvSpPr txBox="1"/>
           <p:nvPr>
             <p:ph idx="12" type="sldNum"/>
@@ -18319,7 +18381,7 @@
   <p:cSld>
     <p:spTree>
       <p:nvGrpSpPr>
-        <p:cNvPr id="283" name="Shape 283"/>
+        <p:cNvPr id="282" name="Shape 282"/>
         <p:cNvGrpSpPr/>
         <p:nvPr/>
       </p:nvGrpSpPr>
@@ -18333,7 +18395,7 @@
       </p:grpSpPr>
       <p:sp>
         <p:nvSpPr>
-          <p:cNvPr id="284" name="Google Shape;284;p43"/>
+          <p:cNvPr id="283" name="Google Shape;283;p43"/>
           <p:cNvSpPr txBox="1"/>
           <p:nvPr>
             <p:ph type="title"/>
@@ -18373,7 +18435,7 @@
       </p:sp>
       <p:sp>
         <p:nvSpPr>
-          <p:cNvPr id="285" name="Google Shape;285;p43"/>
+          <p:cNvPr id="284" name="Google Shape;284;p43"/>
           <p:cNvSpPr txBox="1"/>
           <p:nvPr>
             <p:ph idx="1" type="body"/>
@@ -18512,7 +18574,7 @@
       </p:sp>
       <p:sp>
         <p:nvSpPr>
-          <p:cNvPr id="286" name="Google Shape;286;p43"/>
+          <p:cNvPr id="285" name="Google Shape;285;p43"/>
           <p:cNvSpPr txBox="1"/>
           <p:nvPr>
             <p:ph idx="12" type="sldNum"/>
@@ -18588,7 +18650,7 @@
   <p:cSld>
     <p:spTree>
       <p:nvGrpSpPr>
-        <p:cNvPr id="290" name="Shape 290"/>
+        <p:cNvPr id="289" name="Shape 289"/>
         <p:cNvGrpSpPr/>
         <p:nvPr/>
       </p:nvGrpSpPr>
@@ -18602,7 +18664,7 @@
       </p:grpSpPr>
       <p:sp>
         <p:nvSpPr>
-          <p:cNvPr id="291" name="Google Shape;291;p44"/>
+          <p:cNvPr id="290" name="Google Shape;290;p44"/>
           <p:cNvSpPr txBox="1"/>
           <p:nvPr>
             <p:ph type="title"/>
@@ -18642,7 +18704,7 @@
       </p:sp>
       <p:sp>
         <p:nvSpPr>
-          <p:cNvPr id="292" name="Google Shape;292;p44"/>
+          <p:cNvPr id="291" name="Google Shape;291;p44"/>
           <p:cNvSpPr txBox="1"/>
           <p:nvPr>
             <p:ph idx="12" type="sldNum"/>
@@ -18707,7 +18769,7 @@
       </p:sp>
       <p:graphicFrame>
         <p:nvGraphicFramePr>
-          <p:cNvPr id="293" name="Google Shape;293;p44"/>
+          <p:cNvPr id="292" name="Google Shape;292;p44"/>
           <p:cNvGraphicFramePr/>
           <p:nvPr/>
         </p:nvGraphicFramePr>
@@ -18720,7 +18782,7 @@
             <a:tbl>
               <a:tblPr>
                 <a:noFill/>
-                <a:tableStyleId>{B8B1287B-0280-4061-81DC-422D31685EAB}</a:tableStyleId>
+                <a:tableStyleId>{2C234A13-EC2A-4985-809F-EDEE62B1C0D6}</a:tableStyleId>
               </a:tblPr>
               <a:tblGrid>
                 <a:gridCol w="2022025"/>
@@ -18974,15 +19036,7 @@
                             <a:schemeClr val="dk1"/>
                           </a:solidFill>
                         </a:rPr>
-                        <a:t>[27]	</a:t>
-                      </a:r>
-                      <a:r>
-                        <a:rPr lang="en">
-                          <a:solidFill>
-                            <a:schemeClr val="dk1"/>
-                          </a:solidFill>
-                        </a:rPr>
-                        <a:t>Spector, A. Z. (1989). Achieving application requirements. In Distributed Systems, S. Mullender, Ed. ACM Press. ACM, New York, NY, 19-33. </a:t>
+                        <a:t>[27]	Spector, A. Z. (1989). Achieving application requirements. In Distributed Systems, S. Mullender, Ed. ACM Press. ACM, New York, NY, 19-33. </a:t>
                       </a:r>
                       <a:endParaRPr/>
                     </a:p>
@@ -19367,7 +19421,7 @@
   <p:cSld>
     <p:spTree>
       <p:nvGrpSpPr>
-        <p:cNvPr id="297" name="Shape 297"/>
+        <p:cNvPr id="296" name="Shape 296"/>
         <p:cNvGrpSpPr/>
         <p:nvPr/>
       </p:nvGrpSpPr>
@@ -19381,7 +19435,7 @@
       </p:grpSpPr>
       <p:sp>
         <p:nvSpPr>
-          <p:cNvPr id="298" name="Google Shape;298;p45"/>
+          <p:cNvPr id="297" name="Google Shape;297;p45"/>
           <p:cNvSpPr txBox="1"/>
           <p:nvPr>
             <p:ph type="title"/>
@@ -19421,7 +19475,7 @@
       </p:sp>
       <p:sp>
         <p:nvSpPr>
-          <p:cNvPr id="299" name="Google Shape;299;p45"/>
+          <p:cNvPr id="298" name="Google Shape;298;p45"/>
           <p:cNvSpPr txBox="1"/>
           <p:nvPr>
             <p:ph idx="12" type="sldNum"/>
@@ -19486,7 +19540,7 @@
       </p:sp>
       <p:pic>
         <p:nvPicPr>
-          <p:cNvPr id="300" name="Google Shape;300;p45"/>
+          <p:cNvPr id="299" name="Google Shape;299;p45"/>
           <p:cNvPicPr preferRelativeResize="0"/>
           <p:nvPr/>
         </p:nvPicPr>
@@ -19525,7 +19579,7 @@
   <p:cSld>
     <p:spTree>
       <p:nvGrpSpPr>
-        <p:cNvPr id="304" name="Shape 304"/>
+        <p:cNvPr id="303" name="Shape 303"/>
         <p:cNvGrpSpPr/>
         <p:nvPr/>
       </p:nvGrpSpPr>
@@ -19539,7 +19593,7 @@
       </p:grpSpPr>
       <p:sp>
         <p:nvSpPr>
-          <p:cNvPr id="305" name="Google Shape;305;p46"/>
+          <p:cNvPr id="304" name="Google Shape;304;p46"/>
           <p:cNvSpPr txBox="1"/>
           <p:nvPr>
             <p:ph type="title"/>
@@ -19594,7 +19648,7 @@
   <p:cSld>
     <p:spTree>
       <p:nvGrpSpPr>
-        <p:cNvPr id="54" name="Shape 54"/>
+        <p:cNvPr id="53" name="Shape 53"/>
         <p:cNvGrpSpPr/>
         <p:nvPr/>
       </p:nvGrpSpPr>
@@ -19608,7 +19662,7 @@
       </p:grpSpPr>
       <p:sp>
         <p:nvSpPr>
-          <p:cNvPr id="55" name="Google Shape;55;p11"/>
+          <p:cNvPr id="54" name="Google Shape;54;p11"/>
           <p:cNvSpPr txBox="1"/>
           <p:nvPr>
             <p:ph type="title"/>
@@ -19648,7 +19702,7 @@
       </p:sp>
       <p:sp>
         <p:nvSpPr>
-          <p:cNvPr id="56" name="Google Shape;56;p11"/>
+          <p:cNvPr id="55" name="Google Shape;55;p11"/>
           <p:cNvSpPr txBox="1"/>
           <p:nvPr>
             <p:ph idx="1" type="body"/>
@@ -19778,7 +19832,7 @@
       </p:sp>
       <p:sp>
         <p:nvSpPr>
-          <p:cNvPr id="57" name="Google Shape;57;p11"/>
+          <p:cNvPr id="56" name="Google Shape;56;p11"/>
           <p:cNvSpPr txBox="1"/>
           <p:nvPr>
             <p:ph idx="12" type="sldNum"/>
@@ -19854,7 +19908,7 @@
   <p:cSld>
     <p:spTree>
       <p:nvGrpSpPr>
-        <p:cNvPr id="309" name="Shape 309"/>
+        <p:cNvPr id="308" name="Shape 308"/>
         <p:cNvGrpSpPr/>
         <p:nvPr/>
       </p:nvGrpSpPr>
@@ -19868,7 +19922,7 @@
       </p:grpSpPr>
       <p:sp>
         <p:nvSpPr>
-          <p:cNvPr id="310" name="Google Shape;310;p47"/>
+          <p:cNvPr id="309" name="Google Shape;309;p47"/>
           <p:cNvSpPr txBox="1"/>
           <p:nvPr>
             <p:ph type="title"/>
@@ -19908,7 +19962,7 @@
       </p:sp>
       <p:sp>
         <p:nvSpPr>
-          <p:cNvPr id="311" name="Google Shape;311;p47"/>
+          <p:cNvPr id="310" name="Google Shape;310;p47"/>
           <p:cNvSpPr txBox="1"/>
           <p:nvPr>
             <p:ph idx="1" type="body"/>
@@ -20014,7 +20068,7 @@
       </p:sp>
       <p:sp>
         <p:nvSpPr>
-          <p:cNvPr id="312" name="Google Shape;312;p47"/>
+          <p:cNvPr id="311" name="Google Shape;311;p47"/>
           <p:cNvSpPr txBox="1"/>
           <p:nvPr>
             <p:ph idx="12" type="sldNum"/>
@@ -20090,7 +20144,7 @@
   <p:cSld>
     <p:spTree>
       <p:nvGrpSpPr>
-        <p:cNvPr id="316" name="Shape 316"/>
+        <p:cNvPr id="315" name="Shape 315"/>
         <p:cNvGrpSpPr/>
         <p:nvPr/>
       </p:nvGrpSpPr>
@@ -20104,7 +20158,7 @@
       </p:grpSpPr>
       <p:sp>
         <p:nvSpPr>
-          <p:cNvPr id="317" name="Google Shape;317;p48"/>
+          <p:cNvPr id="316" name="Google Shape;316;p48"/>
           <p:cNvSpPr txBox="1"/>
           <p:nvPr>
             <p:ph type="title"/>
@@ -20144,7 +20198,7 @@
       </p:sp>
       <p:sp>
         <p:nvSpPr>
-          <p:cNvPr id="318" name="Google Shape;318;p48"/>
+          <p:cNvPr id="317" name="Google Shape;317;p48"/>
           <p:cNvSpPr txBox="1"/>
           <p:nvPr>
             <p:ph idx="1" type="body"/>
@@ -20218,7 +20272,7 @@
       </p:sp>
       <p:sp>
         <p:nvSpPr>
-          <p:cNvPr id="319" name="Google Shape;319;p48"/>
+          <p:cNvPr id="318" name="Google Shape;318;p48"/>
           <p:cNvSpPr txBox="1"/>
           <p:nvPr>
             <p:ph idx="12" type="sldNum"/>
@@ -20294,7 +20348,7 @@
   <p:cSld>
     <p:spTree>
       <p:nvGrpSpPr>
-        <p:cNvPr id="323" name="Shape 323"/>
+        <p:cNvPr id="322" name="Shape 322"/>
         <p:cNvGrpSpPr/>
         <p:nvPr/>
       </p:nvGrpSpPr>
@@ -20308,7 +20362,7 @@
       </p:grpSpPr>
       <p:sp>
         <p:nvSpPr>
-          <p:cNvPr id="324" name="Google Shape;324;p49"/>
+          <p:cNvPr id="323" name="Google Shape;323;p49"/>
           <p:cNvSpPr txBox="1"/>
           <p:nvPr>
             <p:ph type="title"/>
@@ -20348,7 +20402,7 @@
       </p:sp>
       <p:sp>
         <p:nvSpPr>
-          <p:cNvPr id="325" name="Google Shape;325;p49"/>
+          <p:cNvPr id="324" name="Google Shape;324;p49"/>
           <p:cNvSpPr txBox="1"/>
           <p:nvPr>
             <p:ph idx="1" type="body"/>
@@ -20481,7 +20535,7 @@
       </p:sp>
       <p:sp>
         <p:nvSpPr>
-          <p:cNvPr id="326" name="Google Shape;326;p49"/>
+          <p:cNvPr id="325" name="Google Shape;325;p49"/>
           <p:cNvSpPr txBox="1"/>
           <p:nvPr>
             <p:ph idx="12" type="sldNum"/>
@@ -20557,7 +20611,7 @@
   <p:cSld>
     <p:spTree>
       <p:nvGrpSpPr>
-        <p:cNvPr id="330" name="Shape 330"/>
+        <p:cNvPr id="329" name="Shape 329"/>
         <p:cNvGrpSpPr/>
         <p:nvPr/>
       </p:nvGrpSpPr>
@@ -20571,7 +20625,7 @@
       </p:grpSpPr>
       <p:sp>
         <p:nvSpPr>
-          <p:cNvPr id="331" name="Google Shape;331;p50"/>
+          <p:cNvPr id="330" name="Google Shape;330;p50"/>
           <p:cNvSpPr txBox="1"/>
           <p:nvPr>
             <p:ph type="title"/>
@@ -20611,7 +20665,7 @@
       </p:sp>
       <p:sp>
         <p:nvSpPr>
-          <p:cNvPr id="332" name="Google Shape;332;p50"/>
+          <p:cNvPr id="331" name="Google Shape;331;p50"/>
           <p:cNvSpPr txBox="1"/>
           <p:nvPr>
             <p:ph idx="1" type="body"/>
@@ -20731,11 +20785,26 @@
             </a:r>
             <a:endParaRPr/>
           </a:p>
+          <a:p>
+            <a:pPr indent="0" lvl="0" marL="0" rtl="0" algn="l">
+              <a:spcBef>
+                <a:spcPts val="1200"/>
+              </a:spcBef>
+              <a:spcAft>
+                <a:spcPts val="1200"/>
+              </a:spcAft>
+              <a:buNone/>
+            </a:pPr>
+            <a:r>
+              <a:t/>
+            </a:r>
+            <a:endParaRPr/>
+          </a:p>
         </p:txBody>
       </p:sp>
       <p:sp>
         <p:nvSpPr>
-          <p:cNvPr id="333" name="Google Shape;333;p50"/>
+          <p:cNvPr id="332" name="Google Shape;332;p50"/>
           <p:cNvSpPr txBox="1"/>
           <p:nvPr>
             <p:ph idx="12" type="sldNum"/>
@@ -20811,7 +20880,7 @@
   <p:cSld>
     <p:spTree>
       <p:nvGrpSpPr>
-        <p:cNvPr id="337" name="Shape 337"/>
+        <p:cNvPr id="336" name="Shape 336"/>
         <p:cNvGrpSpPr/>
         <p:nvPr/>
       </p:nvGrpSpPr>
@@ -20825,7 +20894,7 @@
       </p:grpSpPr>
       <p:sp>
         <p:nvSpPr>
-          <p:cNvPr id="338" name="Google Shape;338;p51"/>
+          <p:cNvPr id="337" name="Google Shape;337;p51"/>
           <p:cNvSpPr txBox="1"/>
           <p:nvPr>
             <p:ph type="title"/>
@@ -20865,7 +20934,7 @@
       </p:sp>
       <p:sp>
         <p:nvSpPr>
-          <p:cNvPr id="339" name="Google Shape;339;p51"/>
+          <p:cNvPr id="338" name="Google Shape;338;p51"/>
           <p:cNvSpPr txBox="1"/>
           <p:nvPr>
             <p:ph idx="1" type="body"/>
@@ -20988,7 +21057,7 @@
       </p:sp>
       <p:sp>
         <p:nvSpPr>
-          <p:cNvPr id="340" name="Google Shape;340;p51"/>
+          <p:cNvPr id="339" name="Google Shape;339;p51"/>
           <p:cNvSpPr txBox="1"/>
           <p:nvPr>
             <p:ph idx="12" type="sldNum"/>
@@ -21064,7 +21133,7 @@
   <p:cSld>
     <p:spTree>
       <p:nvGrpSpPr>
-        <p:cNvPr id="344" name="Shape 344"/>
+        <p:cNvPr id="343" name="Shape 343"/>
         <p:cNvGrpSpPr/>
         <p:nvPr/>
       </p:nvGrpSpPr>
@@ -21078,7 +21147,7 @@
       </p:grpSpPr>
       <p:sp>
         <p:nvSpPr>
-          <p:cNvPr id="345" name="Google Shape;345;p52"/>
+          <p:cNvPr id="344" name="Google Shape;344;p52"/>
           <p:cNvSpPr txBox="1"/>
           <p:nvPr>
             <p:ph type="title"/>
@@ -21114,7 +21183,7 @@
             </a:r>
             <a:r>
               <a:rPr lang="en"/>
-              <a:t>. Academic Writing</a:t>
+              <a:t>. Successful Writing</a:t>
             </a:r>
             <a:endParaRPr/>
           </a:p>
@@ -21133,7 +21202,7 @@
   <p:cSld>
     <p:spTree>
       <p:nvGrpSpPr>
-        <p:cNvPr id="349" name="Shape 349"/>
+        <p:cNvPr id="348" name="Shape 348"/>
         <p:cNvGrpSpPr/>
         <p:nvPr/>
       </p:nvGrpSpPr>
@@ -21147,7 +21216,7 @@
       </p:grpSpPr>
       <p:sp>
         <p:nvSpPr>
-          <p:cNvPr id="350" name="Google Shape;350;p53"/>
+          <p:cNvPr id="349" name="Google Shape;349;p53"/>
           <p:cNvSpPr txBox="1"/>
           <p:nvPr>
             <p:ph idx="1" type="body"/>
@@ -21286,7 +21355,7 @@
       </p:sp>
       <p:sp>
         <p:nvSpPr>
-          <p:cNvPr id="351" name="Google Shape;351;p53"/>
+          <p:cNvPr id="350" name="Google Shape;350;p53"/>
           <p:cNvSpPr txBox="1"/>
           <p:nvPr>
             <p:ph type="title"/>
@@ -21326,7 +21395,7 @@
       </p:sp>
       <p:sp>
         <p:nvSpPr>
-          <p:cNvPr id="352" name="Google Shape;352;p53"/>
+          <p:cNvPr id="351" name="Google Shape;351;p53"/>
           <p:cNvSpPr txBox="1"/>
           <p:nvPr>
             <p:ph idx="12" type="sldNum"/>
@@ -21402,7 +21471,7 @@
   <p:cSld>
     <p:spTree>
       <p:nvGrpSpPr>
-        <p:cNvPr id="356" name="Shape 356"/>
+        <p:cNvPr id="355" name="Shape 355"/>
         <p:cNvGrpSpPr/>
         <p:nvPr/>
       </p:nvGrpSpPr>
@@ -21416,7 +21485,7 @@
       </p:grpSpPr>
       <p:sp>
         <p:nvSpPr>
-          <p:cNvPr id="357" name="Google Shape;357;p54"/>
+          <p:cNvPr id="356" name="Google Shape;356;p54"/>
           <p:cNvSpPr txBox="1"/>
           <p:nvPr>
             <p:ph type="title"/>
@@ -21456,7 +21525,7 @@
       </p:sp>
       <p:sp>
         <p:nvSpPr>
-          <p:cNvPr id="358" name="Google Shape;358;p54"/>
+          <p:cNvPr id="357" name="Google Shape;357;p54"/>
           <p:cNvSpPr txBox="1"/>
           <p:nvPr>
             <p:ph idx="1" type="body"/>
@@ -21597,7 +21666,7 @@
       </p:sp>
       <p:sp>
         <p:nvSpPr>
-          <p:cNvPr id="359" name="Google Shape;359;p54"/>
+          <p:cNvPr id="358" name="Google Shape;358;p54"/>
           <p:cNvSpPr txBox="1"/>
           <p:nvPr>
             <p:ph idx="12" type="sldNum"/>
@@ -21662,7 +21731,7 @@
       </p:sp>
       <p:sp>
         <p:nvSpPr>
-          <p:cNvPr id="360" name="Google Shape;360;p54"/>
+          <p:cNvPr id="359" name="Google Shape;359;p54"/>
           <p:cNvSpPr txBox="1"/>
           <p:nvPr/>
         </p:nvSpPr>
@@ -21715,7 +21784,7 @@
   <p:cSld>
     <p:spTree>
       <p:nvGrpSpPr>
-        <p:cNvPr id="364" name="Shape 364"/>
+        <p:cNvPr id="363" name="Shape 363"/>
         <p:cNvGrpSpPr/>
         <p:nvPr/>
       </p:nvGrpSpPr>
@@ -21729,7 +21798,7 @@
       </p:grpSpPr>
       <p:sp>
         <p:nvSpPr>
-          <p:cNvPr id="365" name="Google Shape;365;p55"/>
+          <p:cNvPr id="364" name="Google Shape;364;p55"/>
           <p:cNvSpPr txBox="1"/>
           <p:nvPr>
             <p:ph type="title"/>
@@ -21769,7 +21838,7 @@
       </p:sp>
       <p:sp>
         <p:nvSpPr>
-          <p:cNvPr id="366" name="Google Shape;366;p55"/>
+          <p:cNvPr id="365" name="Google Shape;365;p55"/>
           <p:cNvSpPr txBox="1"/>
           <p:nvPr>
             <p:ph idx="1" type="body"/>
@@ -21859,7 +21928,7 @@
       </p:sp>
       <p:sp>
         <p:nvSpPr>
-          <p:cNvPr id="367" name="Google Shape;367;p55"/>
+          <p:cNvPr id="366" name="Google Shape;366;p55"/>
           <p:cNvSpPr txBox="1"/>
           <p:nvPr>
             <p:ph idx="12" type="sldNum"/>
@@ -21935,7 +22004,7 @@
   <p:cSld>
     <p:spTree>
       <p:nvGrpSpPr>
-        <p:cNvPr id="371" name="Shape 371"/>
+        <p:cNvPr id="370" name="Shape 370"/>
         <p:cNvGrpSpPr/>
         <p:nvPr/>
       </p:nvGrpSpPr>
@@ -21949,7 +22018,7 @@
       </p:grpSpPr>
       <p:sp>
         <p:nvSpPr>
-          <p:cNvPr id="372" name="Google Shape;372;p56"/>
+          <p:cNvPr id="371" name="Google Shape;371;p56"/>
           <p:cNvSpPr txBox="1"/>
           <p:nvPr>
             <p:ph type="title"/>
@@ -21989,7 +22058,7 @@
       </p:sp>
       <p:sp>
         <p:nvSpPr>
-          <p:cNvPr id="373" name="Google Shape;373;p56"/>
+          <p:cNvPr id="372" name="Google Shape;372;p56"/>
           <p:cNvSpPr txBox="1"/>
           <p:nvPr>
             <p:ph idx="1" type="body"/>
@@ -22038,15 +22107,7 @@
             </a:pPr>
             <a:r>
               <a:rPr lang="en"/>
-              <a:t>“It is suggested to remove any dependency on </a:t>
-            </a:r>
-            <a:r>
-              <a:rPr lang="en"/>
-              <a:t>prerequisite</a:t>
-            </a:r>
-            <a:r>
-              <a:rPr lang="en"/>
-              <a:t> 3 in this experiment</a:t>
+              <a:t>“It is suggested to remove any dependency on prerequisite 3 in this experiment</a:t>
             </a:r>
             <a:br>
               <a:rPr lang="en"/>
@@ -22120,7 +22181,7 @@
       </p:sp>
       <p:sp>
         <p:nvSpPr>
-          <p:cNvPr id="374" name="Google Shape;374;p56"/>
+          <p:cNvPr id="373" name="Google Shape;373;p56"/>
           <p:cNvSpPr txBox="1"/>
           <p:nvPr>
             <p:ph idx="12" type="sldNum"/>
@@ -22196,7 +22257,7 @@
   <p:cSld>
     <p:spTree>
       <p:nvGrpSpPr>
-        <p:cNvPr id="61" name="Shape 61"/>
+        <p:cNvPr id="60" name="Shape 60"/>
         <p:cNvGrpSpPr/>
         <p:nvPr/>
       </p:nvGrpSpPr>
@@ -22210,7 +22271,7 @@
       </p:grpSpPr>
       <p:sp>
         <p:nvSpPr>
-          <p:cNvPr id="62" name="Google Shape;62;p12"/>
+          <p:cNvPr id="61" name="Google Shape;61;p12"/>
           <p:cNvSpPr txBox="1"/>
           <p:nvPr>
             <p:ph type="title"/>
@@ -22250,7 +22311,7 @@
       </p:sp>
       <p:sp>
         <p:nvSpPr>
-          <p:cNvPr id="63" name="Google Shape;63;p12"/>
+          <p:cNvPr id="62" name="Google Shape;62;p12"/>
           <p:cNvSpPr txBox="1"/>
           <p:nvPr>
             <p:ph idx="1" type="body"/>
@@ -22378,7 +22439,7 @@
       </p:sp>
       <p:sp>
         <p:nvSpPr>
-          <p:cNvPr id="64" name="Google Shape;64;p12"/>
+          <p:cNvPr id="63" name="Google Shape;63;p12"/>
           <p:cNvSpPr txBox="1"/>
           <p:nvPr>
             <p:ph idx="12" type="sldNum"/>
@@ -22454,7 +22515,7 @@
   <p:cSld>
     <p:spTree>
       <p:nvGrpSpPr>
-        <p:cNvPr id="378" name="Shape 378"/>
+        <p:cNvPr id="377" name="Shape 377"/>
         <p:cNvGrpSpPr/>
         <p:nvPr/>
       </p:nvGrpSpPr>
@@ -22468,7 +22529,7 @@
       </p:grpSpPr>
       <p:sp>
         <p:nvSpPr>
-          <p:cNvPr id="379" name="Google Shape;379;p57"/>
+          <p:cNvPr id="378" name="Google Shape;378;p57"/>
           <p:cNvSpPr txBox="1"/>
           <p:nvPr>
             <p:ph type="title"/>
@@ -22512,7 +22573,7 @@
       </p:sp>
       <p:sp>
         <p:nvSpPr>
-          <p:cNvPr id="380" name="Google Shape;380;p57"/>
+          <p:cNvPr id="379" name="Google Shape;379;p57"/>
           <p:cNvSpPr txBox="1"/>
           <p:nvPr>
             <p:ph idx="1" type="body"/>
@@ -22624,7 +22685,7 @@
       </p:sp>
       <p:sp>
         <p:nvSpPr>
-          <p:cNvPr id="381" name="Google Shape;381;p57"/>
+          <p:cNvPr id="380" name="Google Shape;380;p57"/>
           <p:cNvSpPr txBox="1"/>
           <p:nvPr>
             <p:ph idx="12" type="sldNum"/>
@@ -22700,7 +22761,7 @@
   <p:cSld>
     <p:spTree>
       <p:nvGrpSpPr>
-        <p:cNvPr id="385" name="Shape 385"/>
+        <p:cNvPr id="384" name="Shape 384"/>
         <p:cNvGrpSpPr/>
         <p:nvPr/>
       </p:nvGrpSpPr>
@@ -22714,7 +22775,7 @@
       </p:grpSpPr>
       <p:sp>
         <p:nvSpPr>
-          <p:cNvPr id="386" name="Google Shape;386;p58"/>
+          <p:cNvPr id="385" name="Google Shape;385;p58"/>
           <p:cNvSpPr txBox="1"/>
           <p:nvPr>
             <p:ph type="title"/>
@@ -22758,7 +22819,7 @@
       </p:sp>
       <p:sp>
         <p:nvSpPr>
-          <p:cNvPr id="387" name="Google Shape;387;p58"/>
+          <p:cNvPr id="386" name="Google Shape;386;p58"/>
           <p:cNvSpPr txBox="1"/>
           <p:nvPr>
             <p:ph idx="1" type="body"/>
@@ -22863,7 +22924,7 @@
       </p:sp>
       <p:sp>
         <p:nvSpPr>
-          <p:cNvPr id="388" name="Google Shape;388;p58"/>
+          <p:cNvPr id="387" name="Google Shape;387;p58"/>
           <p:cNvSpPr txBox="1"/>
           <p:nvPr>
             <p:ph idx="12" type="sldNum"/>
@@ -22939,7 +23000,7 @@
   <p:cSld>
     <p:spTree>
       <p:nvGrpSpPr>
-        <p:cNvPr id="392" name="Shape 392"/>
+        <p:cNvPr id="391" name="Shape 391"/>
         <p:cNvGrpSpPr/>
         <p:nvPr/>
       </p:nvGrpSpPr>
@@ -22953,7 +23014,7 @@
       </p:grpSpPr>
       <p:sp>
         <p:nvSpPr>
-          <p:cNvPr id="393" name="Google Shape;393;p59"/>
+          <p:cNvPr id="392" name="Google Shape;392;p59"/>
           <p:cNvSpPr txBox="1"/>
           <p:nvPr>
             <p:ph type="title"/>
@@ -22985,7 +23046,7 @@
             </a:pPr>
             <a:r>
               <a:rPr lang="en"/>
-              <a:t>Avoid Weak Wording</a:t>
+              <a:t>Use of AIs 1 / 2</a:t>
             </a:r>
             <a:endParaRPr/>
           </a:p>
@@ -22993,97 +23054,7 @@
       </p:sp>
       <p:sp>
         <p:nvSpPr>
-          <p:cNvPr id="394" name="Google Shape;394;p59"/>
-          <p:cNvSpPr txBox="1"/>
-          <p:nvPr>
-            <p:ph idx="1" type="body"/>
-          </p:nvPr>
-        </p:nvSpPr>
-        <p:spPr>
-          <a:xfrm>
-            <a:off x="274320" y="914400"/>
-            <a:ext cx="8595300" cy="4114800"/>
-          </a:xfrm>
-          <a:prstGeom prst="rect">
-            <a:avLst/>
-          </a:prstGeom>
-        </p:spPr>
-        <p:txBody>
-          <a:bodyPr anchorCtr="0" anchor="t" bIns="0" lIns="0" spcFirstLastPara="1" rIns="0" wrap="square" tIns="0">
-            <a:noAutofit/>
-          </a:bodyPr>
-          <a:lstStyle/>
-          <a:p>
-            <a:pPr indent="0" lvl="0" marL="0" rtl="0" algn="l">
-              <a:spcBef>
-                <a:spcPts val="0"/>
-              </a:spcBef>
-              <a:spcAft>
-                <a:spcPts val="0"/>
-              </a:spcAft>
-              <a:buNone/>
-            </a:pPr>
-            <a:r>
-              <a:rPr lang="en"/>
-              <a:t>Examples of weak wording</a:t>
-            </a:r>
-            <a:endParaRPr/>
-          </a:p>
-          <a:p>
-            <a:pPr indent="-342900" lvl="0" marL="457200" rtl="0" algn="l">
-              <a:spcBef>
-                <a:spcPts val="1200"/>
-              </a:spcBef>
-              <a:spcAft>
-                <a:spcPts val="0"/>
-              </a:spcAft>
-              <a:buSzPts val="1800"/>
-              <a:buChar char="●"/>
-            </a:pPr>
-            <a:r>
-              <a:rPr lang="en"/>
-              <a:t>“We tried to…” (So what?)</a:t>
-            </a:r>
-            <a:endParaRPr/>
-          </a:p>
-          <a:p>
-            <a:pPr indent="-342900" lvl="0" marL="457200" rtl="0" algn="l">
-              <a:spcBef>
-                <a:spcPts val="0"/>
-              </a:spcBef>
-              <a:spcAft>
-                <a:spcPts val="0"/>
-              </a:spcAft>
-              <a:buSzPts val="1800"/>
-              <a:buChar char="●"/>
-            </a:pPr>
-            <a:r>
-              <a:rPr lang="en"/>
-              <a:t>“We believe…” (OK, why?)</a:t>
-            </a:r>
-            <a:endParaRPr/>
-          </a:p>
-          <a:p>
-            <a:pPr indent="0" lvl="0" marL="0" rtl="0" algn="l">
-              <a:spcBef>
-                <a:spcPts val="1200"/>
-              </a:spcBef>
-              <a:spcAft>
-                <a:spcPts val="1200"/>
-              </a:spcAft>
-              <a:buNone/>
-            </a:pPr>
-            <a:r>
-              <a:rPr lang="en"/>
-              <a:t>“Try not. Do or do not. There is no try.” </a:t>
-            </a:r>
-            <a:endParaRPr/>
-          </a:p>
-        </p:txBody>
-      </p:sp>
-      <p:sp>
-        <p:nvSpPr>
-          <p:cNvPr id="395" name="Google Shape;395;p59"/>
+          <p:cNvPr id="393" name="Google Shape;393;p59"/>
           <p:cNvSpPr txBox="1"/>
           <p:nvPr>
             <p:ph idx="12" type="sldNum"/>
@@ -23146,6 +23117,34 @@
           </a:p>
         </p:txBody>
       </p:sp>
+      <p:pic>
+        <p:nvPicPr>
+          <p:cNvPr id="394" name="Google Shape;394;p59"/>
+          <p:cNvPicPr preferRelativeResize="0"/>
+          <p:nvPr/>
+        </p:nvPicPr>
+        <p:blipFill>
+          <a:blip r:embed="rId4">
+            <a:alphaModFix/>
+          </a:blip>
+          <a:stretch>
+            <a:fillRect/>
+          </a:stretch>
+        </p:blipFill>
+        <p:spPr>
+          <a:xfrm>
+            <a:off x="274320" y="914400"/>
+            <a:ext cx="8595361" cy="2989275"/>
+          </a:xfrm>
+          <a:prstGeom prst="rect">
+            <a:avLst/>
+          </a:prstGeom>
+          <a:noFill/>
+          <a:ln>
+            <a:noFill/>
+          </a:ln>
+        </p:spPr>
+      </p:pic>
     </p:spTree>
   </p:cSld>
   <p:clrMapOvr>
@@ -23159,7 +23158,7 @@
   <p:cSld>
     <p:spTree>
       <p:nvGrpSpPr>
-        <p:cNvPr id="399" name="Shape 399"/>
+        <p:cNvPr id="398" name="Shape 398"/>
         <p:cNvGrpSpPr/>
         <p:nvPr/>
       </p:nvGrpSpPr>
@@ -23173,7 +23172,7 @@
       </p:grpSpPr>
       <p:sp>
         <p:nvSpPr>
-          <p:cNvPr id="400" name="Google Shape;400;p60"/>
+          <p:cNvPr id="399" name="Google Shape;399;p60"/>
           <p:cNvSpPr txBox="1"/>
           <p:nvPr>
             <p:ph type="title"/>
@@ -23205,7 +23204,7 @@
             </a:pPr>
             <a:r>
               <a:rPr lang="en"/>
-              <a:t>Avoid Imprecise Wording</a:t>
+              <a:t>Use of AIs 2 / 2</a:t>
             </a:r>
             <a:endParaRPr/>
           </a:p>
@@ -23213,112 +23212,7 @@
       </p:sp>
       <p:sp>
         <p:nvSpPr>
-          <p:cNvPr id="401" name="Google Shape;401;p60"/>
-          <p:cNvSpPr txBox="1"/>
-          <p:nvPr>
-            <p:ph idx="1" type="body"/>
-          </p:nvPr>
-        </p:nvSpPr>
-        <p:spPr>
-          <a:xfrm>
-            <a:off x="274320" y="914400"/>
-            <a:ext cx="8595300" cy="4114800"/>
-          </a:xfrm>
-          <a:prstGeom prst="rect">
-            <a:avLst/>
-          </a:prstGeom>
-        </p:spPr>
-        <p:txBody>
-          <a:bodyPr anchorCtr="0" anchor="t" bIns="0" lIns="0" spcFirstLastPara="1" rIns="0" wrap="square" tIns="0">
-            <a:noAutofit/>
-          </a:bodyPr>
-          <a:lstStyle/>
-          <a:p>
-            <a:pPr indent="0" lvl="0" marL="0" rtl="0" algn="l">
-              <a:spcBef>
-                <a:spcPts val="0"/>
-              </a:spcBef>
-              <a:spcAft>
-                <a:spcPts val="0"/>
-              </a:spcAft>
-              <a:buNone/>
-            </a:pPr>
-            <a:r>
-              <a:rPr lang="en"/>
-              <a:t>Examples of imprecise wording</a:t>
-            </a:r>
-            <a:endParaRPr/>
-          </a:p>
-          <a:p>
-            <a:pPr indent="-342900" lvl="0" marL="457200" rtl="0" algn="l">
-              <a:spcBef>
-                <a:spcPts val="1200"/>
-              </a:spcBef>
-              <a:spcAft>
-                <a:spcPts val="0"/>
-              </a:spcAft>
-              <a:buSzPts val="1800"/>
-              <a:buChar char="●"/>
-            </a:pPr>
-            <a:r>
-              <a:rPr lang="en"/>
-              <a:t>“Very efficient…” (How efficient?)</a:t>
-            </a:r>
-            <a:endParaRPr/>
-          </a:p>
-          <a:p>
-            <a:pPr indent="-342900" lvl="0" marL="457200" rtl="0" algn="l">
-              <a:spcBef>
-                <a:spcPts val="0"/>
-              </a:spcBef>
-              <a:spcAft>
-                <a:spcPts val="0"/>
-              </a:spcAft>
-              <a:buSzPts val="1800"/>
-              <a:buChar char="●"/>
-            </a:pPr>
-            <a:r>
-              <a:rPr lang="en"/>
-              <a:t>“Many occurrences…” (How many?)</a:t>
-            </a:r>
-            <a:endParaRPr/>
-          </a:p>
-          <a:p>
-            <a:pPr indent="0" lvl="0" marL="0" rtl="0" algn="l">
-              <a:spcBef>
-                <a:spcPts val="1200"/>
-              </a:spcBef>
-              <a:spcAft>
-                <a:spcPts val="0"/>
-              </a:spcAft>
-              <a:buNone/>
-            </a:pPr>
-            <a:r>
-              <a:rPr lang="en"/>
-              <a:t>Don’t leave your reader guessing</a:t>
-            </a:r>
-            <a:endParaRPr/>
-          </a:p>
-          <a:p>
-            <a:pPr indent="0" lvl="0" marL="0" rtl="0" algn="l">
-              <a:spcBef>
-                <a:spcPts val="1200"/>
-              </a:spcBef>
-              <a:spcAft>
-                <a:spcPts val="1200"/>
-              </a:spcAft>
-              <a:buNone/>
-            </a:pPr>
-            <a:r>
-              <a:t/>
-            </a:r>
-            <a:endParaRPr/>
-          </a:p>
-        </p:txBody>
-      </p:sp>
-      <p:sp>
-        <p:nvSpPr>
-          <p:cNvPr id="402" name="Google Shape;402;p60"/>
+          <p:cNvPr id="400" name="Google Shape;400;p60"/>
           <p:cNvSpPr txBox="1"/>
           <p:nvPr>
             <p:ph idx="12" type="sldNum"/>
@@ -23381,6 +23275,34 @@
           </a:p>
         </p:txBody>
       </p:sp>
+      <p:pic>
+        <p:nvPicPr>
+          <p:cNvPr id="401" name="Google Shape;401;p60"/>
+          <p:cNvPicPr preferRelativeResize="0"/>
+          <p:nvPr/>
+        </p:nvPicPr>
+        <p:blipFill>
+          <a:blip r:embed="rId4">
+            <a:alphaModFix/>
+          </a:blip>
+          <a:stretch>
+            <a:fillRect/>
+          </a:stretch>
+        </p:blipFill>
+        <p:spPr>
+          <a:xfrm>
+            <a:off x="274320" y="914400"/>
+            <a:ext cx="8595361" cy="1843227"/>
+          </a:xfrm>
+          <a:prstGeom prst="rect">
+            <a:avLst/>
+          </a:prstGeom>
+          <a:noFill/>
+          <a:ln>
+            <a:noFill/>
+          </a:ln>
+        </p:spPr>
+      </p:pic>
     </p:spTree>
   </p:cSld>
   <p:clrMapOvr>
@@ -23394,7 +23316,7 @@
   <p:cSld>
     <p:spTree>
       <p:nvGrpSpPr>
-        <p:cNvPr id="406" name="Shape 406"/>
+        <p:cNvPr id="405" name="Shape 405"/>
         <p:cNvGrpSpPr/>
         <p:nvPr/>
       </p:nvGrpSpPr>
@@ -23408,22 +23330,150 @@
       </p:grpSpPr>
       <p:sp>
         <p:nvSpPr>
-          <p:cNvPr id="407" name="Google Shape;407;p61"/>
+          <p:cNvPr id="406" name="Google Shape;406;p61"/>
           <p:cNvSpPr txBox="1"/>
-          <p:nvPr/>
-        </p:nvSpPr>
-        <p:spPr>
-          <a:xfrm>
-            <a:off x="-25" y="4412100"/>
-            <a:ext cx="9144000" cy="731400"/>
+          <p:nvPr>
+            <p:ph type="title"/>
+          </p:nvPr>
+        </p:nvSpPr>
+        <p:spPr>
+          <a:xfrm>
+            <a:off x="0" y="0"/>
+            <a:ext cx="9144000" cy="685800"/>
           </a:xfrm>
           <a:prstGeom prst="rect">
             <a:avLst/>
           </a:prstGeom>
-          <a:noFill/>
-          <a:ln>
-            <a:noFill/>
-          </a:ln>
+        </p:spPr>
+        <p:txBody>
+          <a:bodyPr anchorCtr="0" anchor="ctr" bIns="91425" lIns="274300" spcFirstLastPara="1" rIns="91425" wrap="square" tIns="91425">
+            <a:noAutofit/>
+          </a:bodyPr>
+          <a:lstStyle/>
+          <a:p>
+            <a:pPr indent="0" lvl="0" marL="0" rtl="0" algn="l">
+              <a:spcBef>
+                <a:spcPts val="0"/>
+              </a:spcBef>
+              <a:spcAft>
+                <a:spcPts val="0"/>
+              </a:spcAft>
+              <a:buNone/>
+            </a:pPr>
+            <a:r>
+              <a:rPr lang="en"/>
+              <a:t>Avoid Weak Wording</a:t>
+            </a:r>
+            <a:endParaRPr/>
+          </a:p>
+        </p:txBody>
+      </p:sp>
+      <p:sp>
+        <p:nvSpPr>
+          <p:cNvPr id="407" name="Google Shape;407;p61"/>
+          <p:cNvSpPr txBox="1"/>
+          <p:nvPr>
+            <p:ph idx="1" type="body"/>
+          </p:nvPr>
+        </p:nvSpPr>
+        <p:spPr>
+          <a:xfrm>
+            <a:off x="274320" y="914400"/>
+            <a:ext cx="8595300" cy="4114800"/>
+          </a:xfrm>
+          <a:prstGeom prst="rect">
+            <a:avLst/>
+          </a:prstGeom>
+        </p:spPr>
+        <p:txBody>
+          <a:bodyPr anchorCtr="0" anchor="t" bIns="0" lIns="0" spcFirstLastPara="1" rIns="0" wrap="square" tIns="0">
+            <a:noAutofit/>
+          </a:bodyPr>
+          <a:lstStyle/>
+          <a:p>
+            <a:pPr indent="0" lvl="0" marL="0" rtl="0" algn="l">
+              <a:spcBef>
+                <a:spcPts val="0"/>
+              </a:spcBef>
+              <a:spcAft>
+                <a:spcPts val="0"/>
+              </a:spcAft>
+              <a:buNone/>
+            </a:pPr>
+            <a:r>
+              <a:rPr lang="en"/>
+              <a:t>Examples of weak wording</a:t>
+            </a:r>
+            <a:endParaRPr/>
+          </a:p>
+          <a:p>
+            <a:pPr indent="-342900" lvl="0" marL="457200" rtl="0" algn="l">
+              <a:spcBef>
+                <a:spcPts val="1200"/>
+              </a:spcBef>
+              <a:spcAft>
+                <a:spcPts val="0"/>
+              </a:spcAft>
+              <a:buSzPts val="1800"/>
+              <a:buChar char="●"/>
+            </a:pPr>
+            <a:r>
+              <a:rPr lang="en"/>
+              <a:t>“We tried to…” (So what?)</a:t>
+            </a:r>
+            <a:endParaRPr/>
+          </a:p>
+          <a:p>
+            <a:pPr indent="-342900" lvl="0" marL="457200" rtl="0" algn="l">
+              <a:spcBef>
+                <a:spcPts val="0"/>
+              </a:spcBef>
+              <a:spcAft>
+                <a:spcPts val="0"/>
+              </a:spcAft>
+              <a:buSzPts val="1800"/>
+              <a:buChar char="●"/>
+            </a:pPr>
+            <a:r>
+              <a:rPr lang="en"/>
+              <a:t>“We believe…” (OK, why?)</a:t>
+            </a:r>
+            <a:endParaRPr/>
+          </a:p>
+          <a:p>
+            <a:pPr indent="0" lvl="0" marL="0" rtl="0" algn="l">
+              <a:spcBef>
+                <a:spcPts val="1200"/>
+              </a:spcBef>
+              <a:spcAft>
+                <a:spcPts val="1200"/>
+              </a:spcAft>
+              <a:buNone/>
+            </a:pPr>
+            <a:r>
+              <a:rPr lang="en"/>
+              <a:t>“Try not. Do or do not. There is no try.” </a:t>
+            </a:r>
+            <a:endParaRPr/>
+          </a:p>
+        </p:txBody>
+      </p:sp>
+      <p:sp>
+        <p:nvSpPr>
+          <p:cNvPr id="408" name="Google Shape;408;p61"/>
+          <p:cNvSpPr txBox="1"/>
+          <p:nvPr>
+            <p:ph idx="12" type="sldNum"/>
+          </p:nvPr>
+        </p:nvSpPr>
+        <p:spPr>
+          <a:xfrm>
+            <a:off x="7315209" y="4229101"/>
+            <a:ext cx="1828800" cy="914400"/>
+          </a:xfrm>
+          <a:prstGeom prst="rect">
+            <a:avLst/>
+          </a:prstGeom>
         </p:spPr>
         <p:txBody>
           <a:bodyPr anchorCtr="0" anchor="b" bIns="91425" lIns="91425" spcFirstLastPara="1" rIns="91425" wrap="square" tIns="91425">
@@ -23431,131 +23481,38 @@
           </a:bodyPr>
           <a:lstStyle/>
           <a:p>
-            <a:pPr indent="0" lvl="0" marL="0" rtl="0" algn="l">
-              <a:spcBef>
-                <a:spcPts val="0"/>
-              </a:spcBef>
-              <a:spcAft>
-                <a:spcPts val="0"/>
-              </a:spcAft>
-              <a:buNone/>
-            </a:pPr>
-            <a:r>
-              <a:rPr lang="en"/>
-              <a:t>[1] See </a:t>
-            </a:r>
-            <a:r>
-              <a:rPr lang="en" u="sng">
+            <a:pPr indent="0" lvl="0" marL="0" rtl="0" algn="r">
+              <a:spcBef>
+                <a:spcPts val="0"/>
+              </a:spcBef>
+              <a:spcAft>
+                <a:spcPts val="0"/>
+              </a:spcAft>
+              <a:buNone/>
+            </a:pPr>
+            <a:fld id="{00000000-1234-1234-1234-123412341234}" type="slidenum">
+              <a:rPr lang="en"/>
+              <a:t>‹#›</a:t>
+            </a:fld>
+            <a:endParaRPr/>
+          </a:p>
+          <a:p>
+            <a:pPr indent="0" lvl="0" marL="0" rtl="0" algn="r">
+              <a:spcBef>
+                <a:spcPts val="0"/>
+              </a:spcBef>
+              <a:spcAft>
+                <a:spcPts val="0"/>
+              </a:spcAft>
+              <a:buNone/>
+            </a:pPr>
+            <a:r>
+              <a:rPr b="0" lang="en" sz="1000" u="sng">
                 <a:solidFill>
                   <a:schemeClr val="hlink"/>
                 </a:solidFill>
                 <a:hlinkClick r:id="rId3"/>
               </a:rPr>
-              <a:t>https://www.newyorker.com/magazine/2021/12/27/florida-woman-bites-camel</a:t>
-            </a:r>
-            <a:r>
-              <a:rPr lang="en"/>
-              <a:t> </a:t>
-            </a:r>
-            <a:endParaRPr/>
-          </a:p>
-        </p:txBody>
-      </p:sp>
-      <p:sp>
-        <p:nvSpPr>
-          <p:cNvPr id="408" name="Google Shape;408;p61"/>
-          <p:cNvSpPr txBox="1"/>
-          <p:nvPr>
-            <p:ph type="title"/>
-          </p:nvPr>
-        </p:nvSpPr>
-        <p:spPr>
-          <a:xfrm>
-            <a:off x="0" y="0"/>
-            <a:ext cx="9144000" cy="685800"/>
-          </a:xfrm>
-          <a:prstGeom prst="rect">
-            <a:avLst/>
-          </a:prstGeom>
-        </p:spPr>
-        <p:txBody>
-          <a:bodyPr anchorCtr="0" anchor="ctr" bIns="91425" lIns="274300" spcFirstLastPara="1" rIns="91425" wrap="square" tIns="91425">
-            <a:noAutofit/>
-          </a:bodyPr>
-          <a:lstStyle/>
-          <a:p>
-            <a:pPr indent="0" lvl="0" marL="0" rtl="0" algn="l">
-              <a:spcBef>
-                <a:spcPts val="0"/>
-              </a:spcBef>
-              <a:spcAft>
-                <a:spcPts val="0"/>
-              </a:spcAft>
-              <a:buNone/>
-            </a:pPr>
-            <a:r>
-              <a:rPr lang="en"/>
-              <a:t>All Rules Break Down, Eventually</a:t>
-            </a:r>
-            <a:endParaRPr/>
-          </a:p>
-        </p:txBody>
-      </p:sp>
-      <p:sp>
-        <p:nvSpPr>
-          <p:cNvPr id="409" name="Google Shape;409;p61"/>
-          <p:cNvSpPr txBox="1"/>
-          <p:nvPr>
-            <p:ph idx="12" type="sldNum"/>
-          </p:nvPr>
-        </p:nvSpPr>
-        <p:spPr>
-          <a:xfrm>
-            <a:off x="7315209" y="4229101"/>
-            <a:ext cx="1828800" cy="914400"/>
-          </a:xfrm>
-          <a:prstGeom prst="rect">
-            <a:avLst/>
-          </a:prstGeom>
-        </p:spPr>
-        <p:txBody>
-          <a:bodyPr anchorCtr="0" anchor="b" bIns="91425" lIns="91425" spcFirstLastPara="1" rIns="91425" wrap="square" tIns="91425">
-            <a:noAutofit/>
-          </a:bodyPr>
-          <a:lstStyle/>
-          <a:p>
-            <a:pPr indent="0" lvl="0" marL="0" rtl="0" algn="r">
-              <a:spcBef>
-                <a:spcPts val="0"/>
-              </a:spcBef>
-              <a:spcAft>
-                <a:spcPts val="0"/>
-              </a:spcAft>
-              <a:buNone/>
-            </a:pPr>
-            <a:fld id="{00000000-1234-1234-1234-123412341234}" type="slidenum">
-              <a:rPr lang="en"/>
-              <a:t>‹#›</a:t>
-            </a:fld>
-            <a:endParaRPr/>
-          </a:p>
-          <a:p>
-            <a:pPr indent="0" lvl="0" marL="0" rtl="0" algn="r">
-              <a:spcBef>
-                <a:spcPts val="0"/>
-              </a:spcBef>
-              <a:spcAft>
-                <a:spcPts val="0"/>
-              </a:spcAft>
-              <a:buNone/>
-            </a:pPr>
-            <a:r>
-              <a:rPr b="0" lang="en" sz="1000" u="sng">
-                <a:solidFill>
-                  <a:schemeClr val="hlink"/>
-                </a:solidFill>
-                <a:hlinkClick r:id="rId4"/>
-              </a:rPr>
               <a:t>uni1.de/nyt</a:t>
             </a:r>
             <a:r>
@@ -23563,46 +23520,6 @@
               <a:t> </a:t>
             </a:r>
             <a:endParaRPr b="0" sz="1000"/>
-          </a:p>
-        </p:txBody>
-      </p:sp>
-      <p:sp>
-        <p:nvSpPr>
-          <p:cNvPr id="410" name="Google Shape;410;p61"/>
-          <p:cNvSpPr txBox="1"/>
-          <p:nvPr>
-            <p:ph idx="1" type="body"/>
-          </p:nvPr>
-        </p:nvSpPr>
-        <p:spPr>
-          <a:xfrm>
-            <a:off x="274320" y="914400"/>
-            <a:ext cx="8595300" cy="3657600"/>
-          </a:xfrm>
-          <a:prstGeom prst="rect">
-            <a:avLst/>
-          </a:prstGeom>
-        </p:spPr>
-        <p:txBody>
-          <a:bodyPr anchorCtr="0" anchor="ctr" bIns="91425" lIns="914400" spcFirstLastPara="1" rIns="914400" wrap="square" tIns="91425">
-            <a:noAutofit/>
-          </a:bodyPr>
-          <a:lstStyle/>
-          <a:p>
-            <a:pPr indent="0" lvl="0" marL="0" rtl="0" algn="just">
-              <a:spcBef>
-                <a:spcPts val="0"/>
-              </a:spcBef>
-              <a:spcAft>
-                <a:spcPts val="1200"/>
-              </a:spcAft>
-              <a:buNone/>
-            </a:pPr>
-            <a:r>
-              <a:rPr lang="en" sz="2400"/>
-              <a:t>“A veterinarian prescribed antibiotics Monday for a camel that lives behind an Iberville Parish truck stop after a Florida woman told law officers she bit the 600 pound animal’s genitalia after it sat on her when she and her husband entered its enclosure to retrieve their deaf dog.” [1]</a:t>
-            </a:r>
-            <a:endParaRPr sz="2400"/>
           </a:p>
         </p:txBody>
       </p:sp>
@@ -23619,7 +23536,7 @@
   <p:cSld>
     <p:spTree>
       <p:nvGrpSpPr>
-        <p:cNvPr id="414" name="Shape 414"/>
+        <p:cNvPr id="412" name="Shape 412"/>
         <p:cNvGrpSpPr/>
         <p:nvPr/>
       </p:nvGrpSpPr>
@@ -23633,7 +23550,7 @@
       </p:grpSpPr>
       <p:sp>
         <p:nvSpPr>
-          <p:cNvPr id="415" name="Google Shape;415;p62"/>
+          <p:cNvPr id="413" name="Google Shape;413;p62"/>
           <p:cNvSpPr txBox="1"/>
           <p:nvPr>
             <p:ph type="title"/>
@@ -23665,7 +23582,7 @@
             </a:pPr>
             <a:r>
               <a:rPr lang="en"/>
-              <a:t>Summary</a:t>
+              <a:t>Avoid Imprecise Wording</a:t>
             </a:r>
             <a:endParaRPr/>
           </a:p>
@@ -23673,7 +23590,7 @@
       </p:sp>
       <p:sp>
         <p:nvSpPr>
-          <p:cNvPr id="416" name="Google Shape;416;p62"/>
+          <p:cNvPr id="414" name="Google Shape;414;p62"/>
           <p:cNvSpPr txBox="1"/>
           <p:nvPr>
             <p:ph idx="1" type="body"/>
@@ -23694,19 +23611,35 @@
           </a:bodyPr>
           <a:lstStyle/>
           <a:p>
+            <a:pPr indent="0" lvl="0" marL="0" rtl="0" algn="l">
+              <a:spcBef>
+                <a:spcPts val="0"/>
+              </a:spcBef>
+              <a:spcAft>
+                <a:spcPts val="0"/>
+              </a:spcAft>
+              <a:buNone/>
+            </a:pPr>
+            <a:r>
+              <a:rPr lang="en"/>
+              <a:t>Examples of imprecise wording</a:t>
+            </a:r>
+            <a:endParaRPr/>
+          </a:p>
+          <a:p>
             <a:pPr indent="-342900" lvl="0" marL="457200" rtl="0" algn="l">
               <a:spcBef>
-                <a:spcPts val="0"/>
+                <a:spcPts val="1200"/>
               </a:spcBef>
               <a:spcAft>
                 <a:spcPts val="0"/>
               </a:spcAft>
               <a:buSzPts val="1800"/>
-              <a:buAutoNum type="arabicPeriod"/>
-            </a:pPr>
-            <a:r>
-              <a:rPr lang="en"/>
-              <a:t>The research paper</a:t>
+              <a:buChar char="●"/>
+            </a:pPr>
+            <a:r>
+              <a:rPr lang="en"/>
+              <a:t>“Very efficient…” (How efficient?)</a:t>
             </a:r>
             <a:endParaRPr/>
           </a:p>
@@ -23719,45 +23652,42 @@
                 <a:spcPts val="0"/>
               </a:spcAft>
               <a:buSzPts val="1800"/>
-              <a:buAutoNum type="arabicPeriod"/>
-            </a:pPr>
-            <a:r>
-              <a:rPr lang="en"/>
-              <a:t>Sections of a research paper</a:t>
-            </a:r>
-            <a:endParaRPr/>
-          </a:p>
-          <a:p>
-            <a:pPr indent="-342900" lvl="0" marL="457200" rtl="0" algn="l">
-              <a:spcBef>
-                <a:spcPts val="0"/>
-              </a:spcBef>
-              <a:spcAft>
-                <a:spcPts val="0"/>
-              </a:spcAft>
-              <a:buSzPts val="1800"/>
-              <a:buAutoNum type="arabicPeriod"/>
-            </a:pPr>
-            <a:r>
-              <a:rPr lang="en"/>
-              <a:t>Final research theses</a:t>
-            </a:r>
-            <a:endParaRPr/>
-          </a:p>
-          <a:p>
-            <a:pPr indent="-342900" lvl="0" marL="457200" rtl="0" algn="l">
-              <a:spcBef>
-                <a:spcPts val="0"/>
-              </a:spcBef>
-              <a:spcAft>
-                <a:spcPts val="0"/>
-              </a:spcAft>
-              <a:buSzPts val="1800"/>
-              <a:buAutoNum type="arabicPeriod"/>
-            </a:pPr>
-            <a:r>
-              <a:rPr lang="en"/>
-              <a:t>Academic writing</a:t>
+              <a:buChar char="●"/>
+            </a:pPr>
+            <a:r>
+              <a:rPr lang="en"/>
+              <a:t>“Many occurrences…” (How many?)</a:t>
+            </a:r>
+            <a:endParaRPr/>
+          </a:p>
+          <a:p>
+            <a:pPr indent="0" lvl="0" marL="0" rtl="0" algn="l">
+              <a:spcBef>
+                <a:spcPts val="1200"/>
+              </a:spcBef>
+              <a:spcAft>
+                <a:spcPts val="0"/>
+              </a:spcAft>
+              <a:buNone/>
+            </a:pPr>
+            <a:r>
+              <a:rPr lang="en"/>
+              <a:t>Don’t leave your reader guessing</a:t>
+            </a:r>
+            <a:endParaRPr/>
+          </a:p>
+          <a:p>
+            <a:pPr indent="0" lvl="0" marL="0" rtl="0" algn="l">
+              <a:spcBef>
+                <a:spcPts val="1200"/>
+              </a:spcBef>
+              <a:spcAft>
+                <a:spcPts val="1200"/>
+              </a:spcAft>
+              <a:buNone/>
+            </a:pPr>
+            <a:r>
+              <a:t/>
             </a:r>
             <a:endParaRPr/>
           </a:p>
@@ -23765,7 +23695,7 @@
       </p:sp>
       <p:sp>
         <p:nvSpPr>
-          <p:cNvPr id="417" name="Google Shape;417;p62"/>
+          <p:cNvPr id="415" name="Google Shape;415;p62"/>
           <p:cNvSpPr txBox="1"/>
           <p:nvPr>
             <p:ph idx="12" type="sldNum"/>
@@ -23841,7 +23771,7 @@
   <p:cSld>
     <p:spTree>
       <p:nvGrpSpPr>
-        <p:cNvPr id="421" name="Shape 421"/>
+        <p:cNvPr id="419" name="Shape 419"/>
         <p:cNvGrpSpPr/>
         <p:nvPr/>
       </p:nvGrpSpPr>
@@ -23855,79 +23785,42 @@
       </p:grpSpPr>
       <p:sp>
         <p:nvSpPr>
-          <p:cNvPr id="422" name="Google Shape;422;p63"/>
+          <p:cNvPr id="420" name="Google Shape;420;p63"/>
           <p:cNvSpPr txBox="1"/>
-          <p:nvPr>
-            <p:ph type="ctrTitle"/>
-          </p:nvPr>
-        </p:nvSpPr>
-        <p:spPr>
-          <a:xfrm>
-            <a:off x="0" y="0"/>
-            <a:ext cx="9144000" cy="2388900"/>
+          <p:nvPr/>
+        </p:nvSpPr>
+        <p:spPr>
+          <a:xfrm>
+            <a:off x="-25" y="4233672"/>
+            <a:ext cx="7315200" cy="914400"/>
           </a:xfrm>
           <a:prstGeom prst="rect">
             <a:avLst/>
           </a:prstGeom>
+          <a:noFill/>
+          <a:ln>
+            <a:noFill/>
+          </a:ln>
         </p:spPr>
         <p:txBody>
-          <a:bodyPr anchorCtr="0" anchor="b" bIns="274300" lIns="91425" spcFirstLastPara="1" rIns="91425" wrap="square" tIns="91425">
+          <a:bodyPr anchorCtr="0" anchor="b" bIns="91425" lIns="91425" spcFirstLastPara="1" rIns="91425" wrap="square" tIns="91425">
             <a:noAutofit/>
           </a:bodyPr>
           <a:lstStyle/>
           <a:p>
-            <a:pPr indent="0" lvl="0" marL="0" rtl="0" algn="ctr">
-              <a:spcBef>
-                <a:spcPts val="0"/>
-              </a:spcBef>
-              <a:spcAft>
-                <a:spcPts val="0"/>
-              </a:spcAft>
-              <a:buNone/>
-            </a:pPr>
-            <a:r>
-              <a:rPr lang="en"/>
-              <a:t>Thank you! Any questions?</a:t>
-            </a:r>
-            <a:endParaRPr/>
-          </a:p>
-        </p:txBody>
-      </p:sp>
-      <p:sp>
-        <p:nvSpPr>
-          <p:cNvPr id="423" name="Google Shape;423;p63"/>
-          <p:cNvSpPr txBox="1"/>
-          <p:nvPr>
-            <p:ph idx="1" type="subTitle"/>
-          </p:nvPr>
-        </p:nvSpPr>
-        <p:spPr>
-          <a:xfrm>
-            <a:off x="0" y="2569475"/>
-            <a:ext cx="9144000" cy="2574000"/>
-          </a:xfrm>
-          <a:prstGeom prst="rect">
-            <a:avLst/>
-          </a:prstGeom>
-        </p:spPr>
-        <p:txBody>
-          <a:bodyPr anchorCtr="0" anchor="t" bIns="91425" lIns="91425" spcFirstLastPara="1" rIns="91425" wrap="square" tIns="274300">
-            <a:noAutofit/>
-          </a:bodyPr>
-          <a:lstStyle/>
-          <a:p>
-            <a:pPr indent="0" lvl="0" marL="0" rtl="0" algn="ctr">
-              <a:lnSpc>
-                <a:spcPct val="150000"/>
-              </a:lnSpc>
-              <a:spcBef>
-                <a:spcPts val="0"/>
-              </a:spcBef>
-              <a:spcAft>
-                <a:spcPts val="0"/>
-              </a:spcAft>
-              <a:buNone/>
-            </a:pPr>
+            <a:pPr indent="0" lvl="0" marL="0" rtl="0" algn="l">
+              <a:spcBef>
+                <a:spcPts val="0"/>
+              </a:spcBef>
+              <a:spcAft>
+                <a:spcPts val="0"/>
+              </a:spcAft>
+              <a:buNone/>
+            </a:pPr>
+            <a:r>
+              <a:rPr lang="en"/>
+              <a:t>[1] See </a:t>
+            </a:r>
             <a:r>
               <a:rPr lang="en" u="sng">
                 <a:solidFill>
@@ -23935,78 +23828,156 @@
                 </a:solidFill>
                 <a:hlinkClick r:id="rId3"/>
               </a:rPr>
-              <a:t>dirk.riehle@fau.de</a:t>
+              <a:t>https://www.newyorker.com/magazine/2021/12/27/florida-woman-bites-camel</a:t>
             </a:r>
             <a:r>
               <a:rPr lang="en"/>
               <a:t> </a:t>
             </a:r>
-            <a:r>
-              <a:rPr lang="en" sz="2400"/>
-              <a:t>–</a:t>
-            </a:r>
-            <a:r>
-              <a:rPr lang="en"/>
-              <a:t> </a:t>
-            </a:r>
-            <a:r>
-              <a:rPr lang="en" u="sng">
+            <a:endParaRPr/>
+          </a:p>
+        </p:txBody>
+      </p:sp>
+      <p:sp>
+        <p:nvSpPr>
+          <p:cNvPr id="421" name="Google Shape;421;p63"/>
+          <p:cNvSpPr txBox="1"/>
+          <p:nvPr>
+            <p:ph type="title"/>
+          </p:nvPr>
+        </p:nvSpPr>
+        <p:spPr>
+          <a:xfrm>
+            <a:off x="0" y="0"/>
+            <a:ext cx="9144000" cy="685800"/>
+          </a:xfrm>
+          <a:prstGeom prst="rect">
+            <a:avLst/>
+          </a:prstGeom>
+        </p:spPr>
+        <p:txBody>
+          <a:bodyPr anchorCtr="0" anchor="ctr" bIns="91425" lIns="274300" spcFirstLastPara="1" rIns="91425" wrap="square" tIns="91425">
+            <a:noAutofit/>
+          </a:bodyPr>
+          <a:lstStyle/>
+          <a:p>
+            <a:pPr indent="0" lvl="0" marL="0" rtl="0" algn="l">
+              <a:spcBef>
+                <a:spcPts val="0"/>
+              </a:spcBef>
+              <a:spcAft>
+                <a:spcPts val="0"/>
+              </a:spcAft>
+              <a:buNone/>
+            </a:pPr>
+            <a:r>
+              <a:rPr lang="en"/>
+              <a:t>All Rules Break Down, Eventually</a:t>
+            </a:r>
+            <a:endParaRPr/>
+          </a:p>
+        </p:txBody>
+      </p:sp>
+      <p:sp>
+        <p:nvSpPr>
+          <p:cNvPr id="422" name="Google Shape;422;p63"/>
+          <p:cNvSpPr txBox="1"/>
+          <p:nvPr>
+            <p:ph idx="12" type="sldNum"/>
+          </p:nvPr>
+        </p:nvSpPr>
+        <p:spPr>
+          <a:xfrm>
+            <a:off x="7315209" y="4229101"/>
+            <a:ext cx="1828800" cy="914400"/>
+          </a:xfrm>
+          <a:prstGeom prst="rect">
+            <a:avLst/>
+          </a:prstGeom>
+        </p:spPr>
+        <p:txBody>
+          <a:bodyPr anchorCtr="0" anchor="b" bIns="91425" lIns="91425" spcFirstLastPara="1" rIns="91425" wrap="square" tIns="91425">
+            <a:noAutofit/>
+          </a:bodyPr>
+          <a:lstStyle/>
+          <a:p>
+            <a:pPr indent="0" lvl="0" marL="0" rtl="0" algn="r">
+              <a:spcBef>
+                <a:spcPts val="0"/>
+              </a:spcBef>
+              <a:spcAft>
+                <a:spcPts val="0"/>
+              </a:spcAft>
+              <a:buNone/>
+            </a:pPr>
+            <a:fld id="{00000000-1234-1234-1234-123412341234}" type="slidenum">
+              <a:rPr lang="en"/>
+              <a:t>‹#›</a:t>
+            </a:fld>
+            <a:endParaRPr/>
+          </a:p>
+          <a:p>
+            <a:pPr indent="0" lvl="0" marL="0" rtl="0" algn="r">
+              <a:spcBef>
+                <a:spcPts val="0"/>
+              </a:spcBef>
+              <a:spcAft>
+                <a:spcPts val="0"/>
+              </a:spcAft>
+              <a:buNone/>
+            </a:pPr>
+            <a:r>
+              <a:rPr b="0" lang="en" sz="1000" u="sng">
                 <a:solidFill>
                   <a:schemeClr val="hlink"/>
                 </a:solidFill>
                 <a:hlinkClick r:id="rId4"/>
               </a:rPr>
-              <a:t>https://oss.cs.fau.de</a:t>
-            </a:r>
-            <a:endParaRPr/>
-          </a:p>
-          <a:p>
-            <a:pPr indent="0" lvl="0" marL="0" rtl="0" algn="ctr">
-              <a:lnSpc>
-                <a:spcPct val="150000"/>
-              </a:lnSpc>
-              <a:spcBef>
-                <a:spcPts val="0"/>
-              </a:spcBef>
-              <a:spcAft>
-                <a:spcPts val="0"/>
-              </a:spcAft>
-              <a:buNone/>
-            </a:pPr>
-            <a:r>
-              <a:rPr lang="en" sz="2400" u="sng">
-                <a:solidFill>
-                  <a:schemeClr val="hlink"/>
-                </a:solidFill>
-                <a:hlinkClick r:id="rId5"/>
-              </a:rPr>
-              <a:t>dirk@riehle.org</a:t>
-            </a:r>
+              <a:t>uni1.de/nyt</a:t>
+            </a:r>
+            <a:r>
+              <a:rPr b="0" lang="en" sz="1000"/>
+              <a:t> </a:t>
+            </a:r>
+            <a:endParaRPr b="0" sz="1000"/>
+          </a:p>
+        </p:txBody>
+      </p:sp>
+      <p:sp>
+        <p:nvSpPr>
+          <p:cNvPr id="423" name="Google Shape;423;p63"/>
+          <p:cNvSpPr txBox="1"/>
+          <p:nvPr>
+            <p:ph idx="1" type="body"/>
+          </p:nvPr>
+        </p:nvSpPr>
+        <p:spPr>
+          <a:xfrm>
+            <a:off x="274320" y="914400"/>
+            <a:ext cx="8595300" cy="3657600"/>
+          </a:xfrm>
+          <a:prstGeom prst="rect">
+            <a:avLst/>
+          </a:prstGeom>
+        </p:spPr>
+        <p:txBody>
+          <a:bodyPr anchorCtr="0" anchor="ctr" bIns="91425" lIns="914400" spcFirstLastPara="1" rIns="914400" wrap="square" tIns="91425">
+            <a:noAutofit/>
+          </a:bodyPr>
+          <a:lstStyle/>
+          <a:p>
+            <a:pPr indent="0" lvl="0" marL="0" rtl="0" algn="just">
+              <a:spcBef>
+                <a:spcPts val="0"/>
+              </a:spcBef>
+              <a:spcAft>
+                <a:spcPts val="1200"/>
+              </a:spcAft>
+              <a:buNone/>
+            </a:pPr>
             <a:r>
               <a:rPr lang="en" sz="2400"/>
-              <a:t> – </a:t>
-            </a:r>
-            <a:r>
-              <a:rPr lang="en" sz="2400" u="sng">
-                <a:solidFill>
-                  <a:schemeClr val="hlink"/>
-                </a:solidFill>
-                <a:hlinkClick r:id="rId6"/>
-              </a:rPr>
-              <a:t>https://dirkriehle.com</a:t>
-            </a:r>
-            <a:r>
-              <a:rPr lang="en" sz="2400"/>
-              <a:t> – </a:t>
-            </a:r>
-            <a:r>
-              <a:rPr lang="en" sz="2400" u="sng">
-                <a:solidFill>
-                  <a:schemeClr val="hlink"/>
-                </a:solidFill>
-                <a:hlinkClick r:id="rId7"/>
-              </a:rPr>
-              <a:t>@dirkriehle</a:t>
+              <a:t>“A veterinarian prescribed antibiotics Monday for a camel that lives behind an Iberville Parish truck stop after a Florida woman told law officers she bit the 600 pound animal’s genitalia after it sat on her when she and her husband entered its enclosure to retrieve their deaf dog.” [1]</a:t>
             </a:r>
             <a:endParaRPr sz="2400"/>
           </a:p>
@@ -24071,7 +24042,7 @@
             </a:pPr>
             <a:r>
               <a:rPr lang="en"/>
-              <a:t>Legal Notices</a:t>
+              <a:t>Summary</a:t>
             </a:r>
             <a:endParaRPr/>
           </a:p>
@@ -24080,6 +24051,98 @@
       <p:sp>
         <p:nvSpPr>
           <p:cNvPr id="429" name="Google Shape;429;p64"/>
+          <p:cNvSpPr txBox="1"/>
+          <p:nvPr>
+            <p:ph idx="1" type="body"/>
+          </p:nvPr>
+        </p:nvSpPr>
+        <p:spPr>
+          <a:xfrm>
+            <a:off x="274320" y="914400"/>
+            <a:ext cx="8595300" cy="4114800"/>
+          </a:xfrm>
+          <a:prstGeom prst="rect">
+            <a:avLst/>
+          </a:prstGeom>
+        </p:spPr>
+        <p:txBody>
+          <a:bodyPr anchorCtr="0" anchor="t" bIns="0" lIns="0" spcFirstLastPara="1" rIns="0" wrap="square" tIns="0">
+            <a:noAutofit/>
+          </a:bodyPr>
+          <a:lstStyle/>
+          <a:p>
+            <a:pPr indent="-342900" lvl="0" marL="457200" rtl="0" algn="l">
+              <a:spcBef>
+                <a:spcPts val="0"/>
+              </a:spcBef>
+              <a:spcAft>
+                <a:spcPts val="0"/>
+              </a:spcAft>
+              <a:buSzPts val="1800"/>
+              <a:buAutoNum type="arabicPeriod"/>
+            </a:pPr>
+            <a:r>
+              <a:rPr lang="en"/>
+              <a:t>The research paper</a:t>
+            </a:r>
+            <a:endParaRPr/>
+          </a:p>
+          <a:p>
+            <a:pPr indent="-342900" lvl="0" marL="457200" rtl="0" algn="l">
+              <a:spcBef>
+                <a:spcPts val="0"/>
+              </a:spcBef>
+              <a:spcAft>
+                <a:spcPts val="0"/>
+              </a:spcAft>
+              <a:buSzPts val="1800"/>
+              <a:buAutoNum type="arabicPeriod"/>
+            </a:pPr>
+            <a:r>
+              <a:rPr lang="en"/>
+              <a:t>Sections of a research paper</a:t>
+            </a:r>
+            <a:endParaRPr/>
+          </a:p>
+          <a:p>
+            <a:pPr indent="-342900" lvl="0" marL="457200" rtl="0" algn="l">
+              <a:spcBef>
+                <a:spcPts val="0"/>
+              </a:spcBef>
+              <a:spcAft>
+                <a:spcPts val="0"/>
+              </a:spcAft>
+              <a:buSzPts val="1800"/>
+              <a:buAutoNum type="arabicPeriod"/>
+            </a:pPr>
+            <a:r>
+              <a:rPr lang="en"/>
+              <a:t>Final research theses</a:t>
+            </a:r>
+            <a:endParaRPr/>
+          </a:p>
+          <a:p>
+            <a:pPr indent="-342900" lvl="0" marL="457200" rtl="0" algn="l">
+              <a:spcBef>
+                <a:spcPts val="0"/>
+              </a:spcBef>
+              <a:spcAft>
+                <a:spcPts val="0"/>
+              </a:spcAft>
+              <a:buSzPts val="1800"/>
+              <a:buAutoNum type="arabicPeriod"/>
+            </a:pPr>
+            <a:r>
+              <a:rPr lang="en"/>
+              <a:t>Successful writing</a:t>
+            </a:r>
+            <a:endParaRPr/>
+          </a:p>
+        </p:txBody>
+      </p:sp>
+      <p:sp>
+        <p:nvSpPr>
+          <p:cNvPr id="430" name="Google Shape;430;p64"/>
           <p:cNvSpPr txBox="1"/>
           <p:nvPr>
             <p:ph idx="12" type="sldNum"/>
@@ -24126,33 +24189,339 @@
               <a:buNone/>
             </a:pPr>
             <a:r>
-              <a:rPr b="0" lang="en" sz="900" u="sng">
+              <a:rPr b="0" lang="en" sz="1000" u="sng">
                 <a:solidFill>
                   <a:schemeClr val="hlink"/>
                 </a:solidFill>
                 <a:hlinkClick r:id="rId3"/>
               </a:rPr>
-              <a:t>https://profriehle.com</a:t>
-            </a:r>
-            <a:r>
-              <a:rPr b="0" lang="en" sz="900">
+              <a:t>uni1.de/nyt</a:t>
+            </a:r>
+            <a:r>
+              <a:rPr b="0" lang="en" sz="1000"/>
+              <a:t> </a:t>
+            </a:r>
+            <a:endParaRPr b="0" sz="1000"/>
+          </a:p>
+        </p:txBody>
+      </p:sp>
+    </p:spTree>
+  </p:cSld>
+  <p:clrMapOvr>
+    <a:masterClrMapping/>
+  </p:clrMapOvr>
+</p:sld>
+</file>
+
+<file path=ppt/slides/slide58.xml><?xml version="1.0" encoding="utf-8"?>
+<p:sld xmlns:a="http://schemas.openxmlformats.org/drawingml/2006/main" xmlns:r="http://schemas.openxmlformats.org/officeDocument/2006/relationships" xmlns:mc="http://schemas.openxmlformats.org/markup-compatibility/2006" xmlns:mv="urn:schemas-microsoft-com:mac:vml" xmlns:p="http://schemas.openxmlformats.org/presentationml/2006/main" xmlns:c="http://schemas.openxmlformats.org/drawingml/2006/chart" xmlns:dgm="http://schemas.openxmlformats.org/drawingml/2006/diagram" xmlns:o="urn:schemas-microsoft-com:office:office" xmlns:v="urn:schemas-microsoft-com:vml" xmlns:pvml="urn:schemas-microsoft-com:office:powerpoint" xmlns:com="http://schemas.openxmlformats.org/drawingml/2006/compatibility" xmlns:p14="http://schemas.microsoft.com/office/powerpoint/2010/main" xmlns:p15="http://schemas.microsoft.com/office/powerpoint/2012/main" xmlns:ahyp="http://schemas.microsoft.com/office/drawing/2018/hyperlinkcolor">
+  <p:cSld>
+    <p:spTree>
+      <p:nvGrpSpPr>
+        <p:cNvPr id="434" name="Shape 434"/>
+        <p:cNvGrpSpPr/>
+        <p:nvPr/>
+      </p:nvGrpSpPr>
+      <p:grpSpPr>
+        <a:xfrm>
+          <a:off x="0" y="0"/>
+          <a:ext cx="0" cy="0"/>
+          <a:chOff x="0" y="0"/>
+          <a:chExt cx="0" cy="0"/>
+        </a:xfrm>
+      </p:grpSpPr>
+      <p:sp>
+        <p:nvSpPr>
+          <p:cNvPr id="435" name="Google Shape;435;p65"/>
+          <p:cNvSpPr txBox="1"/>
+          <p:nvPr>
+            <p:ph type="ctrTitle"/>
+          </p:nvPr>
+        </p:nvSpPr>
+        <p:spPr>
+          <a:xfrm>
+            <a:off x="0" y="0"/>
+            <a:ext cx="9144000" cy="2388900"/>
+          </a:xfrm>
+          <a:prstGeom prst="rect">
+            <a:avLst/>
+          </a:prstGeom>
+        </p:spPr>
+        <p:txBody>
+          <a:bodyPr anchorCtr="0" anchor="b" bIns="274300" lIns="91425" spcFirstLastPara="1" rIns="91425" wrap="square" tIns="91425">
+            <a:noAutofit/>
+          </a:bodyPr>
+          <a:lstStyle/>
+          <a:p>
+            <a:pPr indent="0" lvl="0" marL="0" rtl="0" algn="ctr">
+              <a:spcBef>
+                <a:spcPts val="0"/>
+              </a:spcBef>
+              <a:spcAft>
+                <a:spcPts val="0"/>
+              </a:spcAft>
+              <a:buNone/>
+            </a:pPr>
+            <a:r>
+              <a:rPr lang="en"/>
+              <a:t>Thank you! Any questions?</a:t>
+            </a:r>
+            <a:endParaRPr/>
+          </a:p>
+        </p:txBody>
+      </p:sp>
+      <p:sp>
+        <p:nvSpPr>
+          <p:cNvPr id="436" name="Google Shape;436;p65"/>
+          <p:cNvSpPr txBox="1"/>
+          <p:nvPr>
+            <p:ph idx="1" type="subTitle"/>
+          </p:nvPr>
+        </p:nvSpPr>
+        <p:spPr>
+          <a:xfrm>
+            <a:off x="0" y="2569475"/>
+            <a:ext cx="9144000" cy="2574000"/>
+          </a:xfrm>
+          <a:prstGeom prst="rect">
+            <a:avLst/>
+          </a:prstGeom>
+        </p:spPr>
+        <p:txBody>
+          <a:bodyPr anchorCtr="0" anchor="t" bIns="91425" lIns="91425" spcFirstLastPara="1" rIns="91425" wrap="square" tIns="274300">
+            <a:noAutofit/>
+          </a:bodyPr>
+          <a:lstStyle/>
+          <a:p>
+            <a:pPr indent="0" lvl="0" marL="0" rtl="0" algn="ctr">
+              <a:lnSpc>
+                <a:spcPct val="150000"/>
+              </a:lnSpc>
+              <a:spcBef>
+                <a:spcPts val="0"/>
+              </a:spcBef>
+              <a:spcAft>
+                <a:spcPts val="0"/>
+              </a:spcAft>
+              <a:buNone/>
+            </a:pPr>
+            <a:r>
+              <a:rPr lang="en" u="sng">
                 <a:solidFill>
-                  <a:schemeClr val="dk2"/>
+                  <a:schemeClr val="hlink"/>
                 </a:solidFill>
+                <a:hlinkClick r:id="rId3"/>
               </a:rPr>
+              <a:t>dirk.riehle@fau.de</a:t>
+            </a:r>
+            <a:r>
+              <a:rPr lang="en"/>
               <a:t> </a:t>
             </a:r>
-            <a:endParaRPr b="0" sz="900">
-              <a:solidFill>
-                <a:schemeClr val="dk2"/>
-              </a:solidFill>
-            </a:endParaRPr>
+            <a:r>
+              <a:rPr lang="en" sz="2400"/>
+              <a:t>–</a:t>
+            </a:r>
+            <a:r>
+              <a:rPr lang="en"/>
+              <a:t> </a:t>
+            </a:r>
+            <a:r>
+              <a:rPr lang="en" u="sng">
+                <a:solidFill>
+                  <a:schemeClr val="hlink"/>
+                </a:solidFill>
+                <a:hlinkClick r:id="rId4"/>
+              </a:rPr>
+              <a:t>https://oss.cs.fau.de</a:t>
+            </a:r>
+            <a:endParaRPr/>
+          </a:p>
+          <a:p>
+            <a:pPr indent="0" lvl="0" marL="0" rtl="0" algn="ctr">
+              <a:lnSpc>
+                <a:spcPct val="150000"/>
+              </a:lnSpc>
+              <a:spcBef>
+                <a:spcPts val="0"/>
+              </a:spcBef>
+              <a:spcAft>
+                <a:spcPts val="0"/>
+              </a:spcAft>
+              <a:buNone/>
+            </a:pPr>
+            <a:r>
+              <a:rPr lang="en" sz="2400" u="sng">
+                <a:solidFill>
+                  <a:schemeClr val="hlink"/>
+                </a:solidFill>
+                <a:hlinkClick r:id="rId5"/>
+              </a:rPr>
+              <a:t>dirk@riehle.org</a:t>
+            </a:r>
+            <a:r>
+              <a:rPr lang="en" sz="2400"/>
+              <a:t> – </a:t>
+            </a:r>
+            <a:r>
+              <a:rPr lang="en" sz="2400" u="sng">
+                <a:solidFill>
+                  <a:schemeClr val="hlink"/>
+                </a:solidFill>
+                <a:hlinkClick r:id="rId6"/>
+              </a:rPr>
+              <a:t>https://dirkriehle.com</a:t>
+            </a:r>
+            <a:r>
+              <a:rPr lang="en" sz="2400"/>
+              <a:t> – </a:t>
+            </a:r>
+            <a:r>
+              <a:rPr lang="en" sz="2400" u="sng">
+                <a:solidFill>
+                  <a:schemeClr val="hlink"/>
+                </a:solidFill>
+                <a:hlinkClick r:id="rId7"/>
+              </a:rPr>
+              <a:t>@dirkriehle</a:t>
+            </a:r>
+            <a:endParaRPr sz="2400"/>
           </a:p>
         </p:txBody>
       </p:sp>
-      <p:sp>
-        <p:nvSpPr>
-          <p:cNvPr id="430" name="Google Shape;430;p64"/>
+    </p:spTree>
+  </p:cSld>
+  <p:clrMapOvr>
+    <a:masterClrMapping/>
+  </p:clrMapOvr>
+</p:sld>
+</file>
+
+<file path=ppt/slides/slide59.xml><?xml version="1.0" encoding="utf-8"?>
+<p:sld xmlns:a="http://schemas.openxmlformats.org/drawingml/2006/main" xmlns:r="http://schemas.openxmlformats.org/officeDocument/2006/relationships" xmlns:mc="http://schemas.openxmlformats.org/markup-compatibility/2006" xmlns:mv="urn:schemas-microsoft-com:mac:vml" xmlns:p="http://schemas.openxmlformats.org/presentationml/2006/main" xmlns:c="http://schemas.openxmlformats.org/drawingml/2006/chart" xmlns:dgm="http://schemas.openxmlformats.org/drawingml/2006/diagram" xmlns:o="urn:schemas-microsoft-com:office:office" xmlns:v="urn:schemas-microsoft-com:vml" xmlns:pvml="urn:schemas-microsoft-com:office:powerpoint" xmlns:com="http://schemas.openxmlformats.org/drawingml/2006/compatibility" xmlns:p14="http://schemas.microsoft.com/office/powerpoint/2010/main" xmlns:p15="http://schemas.microsoft.com/office/powerpoint/2012/main" xmlns:ahyp="http://schemas.microsoft.com/office/drawing/2018/hyperlinkcolor">
+  <p:cSld>
+    <p:spTree>
+      <p:nvGrpSpPr>
+        <p:cNvPr id="440" name="Shape 440"/>
+        <p:cNvGrpSpPr/>
+        <p:nvPr/>
+      </p:nvGrpSpPr>
+      <p:grpSpPr>
+        <a:xfrm>
+          <a:off x="0" y="0"/>
+          <a:ext cx="0" cy="0"/>
+          <a:chOff x="0" y="0"/>
+          <a:chExt cx="0" cy="0"/>
+        </a:xfrm>
+      </p:grpSpPr>
+      <p:sp>
+        <p:nvSpPr>
+          <p:cNvPr id="441" name="Google Shape;441;p66"/>
+          <p:cNvSpPr txBox="1"/>
+          <p:nvPr>
+            <p:ph type="title"/>
+          </p:nvPr>
+        </p:nvSpPr>
+        <p:spPr>
+          <a:xfrm>
+            <a:off x="0" y="0"/>
+            <a:ext cx="9144000" cy="685800"/>
+          </a:xfrm>
+          <a:prstGeom prst="rect">
+            <a:avLst/>
+          </a:prstGeom>
+        </p:spPr>
+        <p:txBody>
+          <a:bodyPr anchorCtr="0" anchor="ctr" bIns="91425" lIns="274300" spcFirstLastPara="1" rIns="91425" wrap="square" tIns="91425">
+            <a:noAutofit/>
+          </a:bodyPr>
+          <a:lstStyle/>
+          <a:p>
+            <a:pPr indent="0" lvl="0" marL="0" rtl="0" algn="l">
+              <a:spcBef>
+                <a:spcPts val="0"/>
+              </a:spcBef>
+              <a:spcAft>
+                <a:spcPts val="0"/>
+              </a:spcAft>
+              <a:buNone/>
+            </a:pPr>
+            <a:r>
+              <a:rPr lang="en"/>
+              <a:t>Legal Notices</a:t>
+            </a:r>
+            <a:endParaRPr/>
+          </a:p>
+        </p:txBody>
+      </p:sp>
+      <p:sp>
+        <p:nvSpPr>
+          <p:cNvPr id="442" name="Google Shape;442;p66"/>
+          <p:cNvSpPr txBox="1"/>
+          <p:nvPr>
+            <p:ph idx="12" type="sldNum"/>
+          </p:nvPr>
+        </p:nvSpPr>
+        <p:spPr>
+          <a:xfrm>
+            <a:off x="7315209" y="4229101"/>
+            <a:ext cx="1828800" cy="914400"/>
+          </a:xfrm>
+          <a:prstGeom prst="rect">
+            <a:avLst/>
+          </a:prstGeom>
+        </p:spPr>
+        <p:txBody>
+          <a:bodyPr anchorCtr="0" anchor="b" bIns="91425" lIns="91425" spcFirstLastPara="1" rIns="91425" wrap="square" tIns="91425">
+            <a:noAutofit/>
+          </a:bodyPr>
+          <a:lstStyle/>
+          <a:p>
+            <a:pPr indent="0" lvl="0" marL="0" rtl="0" algn="r">
+              <a:spcBef>
+                <a:spcPts val="0"/>
+              </a:spcBef>
+              <a:spcAft>
+                <a:spcPts val="0"/>
+              </a:spcAft>
+              <a:buNone/>
+            </a:pPr>
+            <a:fld id="{00000000-1234-1234-1234-123412341234}" type="slidenum">
+              <a:rPr lang="en"/>
+              <a:t>‹#›</a:t>
+            </a:fld>
+            <a:endParaRPr/>
+          </a:p>
+          <a:p>
+            <a:pPr indent="0" lvl="0" marL="0" rtl="0" algn="r">
+              <a:spcBef>
+                <a:spcPts val="0"/>
+              </a:spcBef>
+              <a:spcAft>
+                <a:spcPts val="0"/>
+              </a:spcAft>
+              <a:buNone/>
+            </a:pPr>
+            <a:r>
+              <a:rPr b="0" lang="en" sz="1000" u="sng">
+                <a:solidFill>
+                  <a:schemeClr val="hlink"/>
+                </a:solidFill>
+                <a:hlinkClick r:id="rId3"/>
+              </a:rPr>
+              <a:t>uni1.de/nyt</a:t>
+            </a:r>
+            <a:r>
+              <a:rPr b="0" lang="en" sz="1000"/>
+              <a:t> </a:t>
+            </a:r>
+            <a:endParaRPr b="0" sz="1000"/>
+          </a:p>
+        </p:txBody>
+      </p:sp>
+      <p:sp>
+        <p:nvSpPr>
+          <p:cNvPr id="443" name="Google Shape;443;p66"/>
           <p:cNvSpPr txBox="1"/>
           <p:nvPr>
             <p:ph idx="1" type="body"/>
@@ -24247,7 +24616,7 @@
             </a:pPr>
             <a:r>
               <a:rPr lang="en"/>
-              <a:t>© 2012, 2023, 2024 Dirk Riehle, some rights reserved</a:t>
+              <a:t>© 2012-2025 Dirk Riehle, some rights reserved</a:t>
             </a:r>
             <a:endParaRPr/>
           </a:p>
@@ -24281,7 +24650,7 @@
   <p:cSld>
     <p:spTree>
       <p:nvGrpSpPr>
-        <p:cNvPr id="68" name="Shape 68"/>
+        <p:cNvPr id="67" name="Shape 67"/>
         <p:cNvGrpSpPr/>
         <p:nvPr/>
       </p:nvGrpSpPr>
@@ -24295,7 +24664,7 @@
       </p:grpSpPr>
       <p:sp>
         <p:nvSpPr>
-          <p:cNvPr id="69" name="Google Shape;69;p13"/>
+          <p:cNvPr id="68" name="Google Shape;68;p13"/>
           <p:cNvSpPr txBox="1"/>
           <p:nvPr>
             <p:ph type="title"/>
@@ -24346,7 +24715,7 @@
   <p:cSld>
     <p:spTree>
       <p:nvGrpSpPr>
-        <p:cNvPr id="73" name="Shape 73"/>
+        <p:cNvPr id="72" name="Shape 72"/>
         <p:cNvGrpSpPr/>
         <p:nvPr/>
       </p:nvGrpSpPr>
@@ -24360,7 +24729,7 @@
       </p:grpSpPr>
       <p:sp>
         <p:nvSpPr>
-          <p:cNvPr id="74" name="Google Shape;74;p14"/>
+          <p:cNvPr id="73" name="Google Shape;73;p14"/>
           <p:cNvSpPr txBox="1"/>
           <p:nvPr>
             <p:ph type="title"/>
@@ -24400,7 +24769,7 @@
       </p:sp>
       <p:sp>
         <p:nvSpPr>
-          <p:cNvPr id="75" name="Google Shape;75;p14"/>
+          <p:cNvPr id="74" name="Google Shape;74;p14"/>
           <p:cNvSpPr txBox="1"/>
           <p:nvPr>
             <p:ph idx="12" type="sldNum"/>
@@ -24465,7 +24834,7 @@
       </p:sp>
       <p:pic>
         <p:nvPicPr>
-          <p:cNvPr id="76" name="Google Shape;76;p14"/>
+          <p:cNvPr id="75" name="Google Shape;75;p14"/>
           <p:cNvPicPr preferRelativeResize="0"/>
           <p:nvPr/>
         </p:nvPicPr>
@@ -24480,7 +24849,7 @@
         <p:spPr>
           <a:xfrm>
             <a:off x="274320" y="914400"/>
-            <a:ext cx="8595360" cy="3502840"/>
+            <a:ext cx="8595360" cy="3495446"/>
           </a:xfrm>
           <a:prstGeom prst="rect">
             <a:avLst/>
@@ -24504,7 +24873,7 @@
   <p:cSld>
     <p:spTree>
       <p:nvGrpSpPr>
-        <p:cNvPr id="80" name="Shape 80"/>
+        <p:cNvPr id="79" name="Shape 79"/>
         <p:cNvGrpSpPr/>
         <p:nvPr/>
       </p:nvGrpSpPr>
@@ -24518,7 +24887,7 @@
       </p:grpSpPr>
       <p:sp>
         <p:nvSpPr>
-          <p:cNvPr id="81" name="Google Shape;81;p15"/>
+          <p:cNvPr id="80" name="Google Shape;80;p15"/>
           <p:cNvSpPr txBox="1"/>
           <p:nvPr>
             <p:ph type="title"/>
@@ -24558,7 +24927,7 @@
       </p:sp>
       <p:sp>
         <p:nvSpPr>
-          <p:cNvPr id="82" name="Google Shape;82;p15"/>
+          <p:cNvPr id="81" name="Google Shape;81;p15"/>
           <p:cNvSpPr txBox="1"/>
           <p:nvPr>
             <p:ph idx="1" type="body"/>
@@ -24682,7 +25051,7 @@
       </p:sp>
       <p:sp>
         <p:nvSpPr>
-          <p:cNvPr id="83" name="Google Shape;83;p15"/>
+          <p:cNvPr id="82" name="Google Shape;82;p15"/>
           <p:cNvSpPr txBox="1"/>
           <p:nvPr>
             <p:ph idx="12" type="sldNum"/>
@@ -24758,7 +25127,7 @@
   <p:cSld>
     <p:spTree>
       <p:nvGrpSpPr>
-        <p:cNvPr id="87" name="Shape 87"/>
+        <p:cNvPr id="86" name="Shape 86"/>
         <p:cNvGrpSpPr/>
         <p:nvPr/>
       </p:nvGrpSpPr>
@@ -24772,7 +25141,7 @@
       </p:grpSpPr>
       <p:sp>
         <p:nvSpPr>
-          <p:cNvPr id="88" name="Google Shape;88;p16"/>
+          <p:cNvPr id="87" name="Google Shape;87;p16"/>
           <p:cNvSpPr txBox="1"/>
           <p:nvPr>
             <p:ph type="title"/>
@@ -24812,7 +25181,7 @@
       </p:sp>
       <p:sp>
         <p:nvSpPr>
-          <p:cNvPr id="89" name="Google Shape;89;p16"/>
+          <p:cNvPr id="88" name="Google Shape;88;p16"/>
           <p:cNvSpPr txBox="1"/>
           <p:nvPr>
             <p:ph idx="1" type="body"/>
@@ -24935,7 +25304,7 @@
       </p:sp>
       <p:sp>
         <p:nvSpPr>
-          <p:cNvPr id="90" name="Google Shape;90;p16"/>
+          <p:cNvPr id="89" name="Google Shape;89;p16"/>
           <p:cNvSpPr txBox="1"/>
           <p:nvPr>
             <p:ph idx="12" type="sldNum"/>
